--- a/docs/assets/drawings.pptx
+++ b/docs/assets/drawings.pptx
@@ -6,6 +6,11 @@
   </p:sldMasterIdLst>
   <p:sldIdLst>
     <p:sldId id="256" r:id="rId2"/>
+    <p:sldId id="257" r:id="rId3"/>
+    <p:sldId id="258" r:id="rId4"/>
+    <p:sldId id="259" r:id="rId5"/>
+    <p:sldId id="260" r:id="rId6"/>
+    <p:sldId id="261" r:id="rId7"/>
   </p:sldIdLst>
   <p:sldSz cx="12192000" cy="6858000"/>
   <p:notesSz cx="6858000" cy="9144000"/>
@@ -104,6 +109,11 @@
       </a:defRPr>
     </a:lvl9pPr>
   </p:defaultTextStyle>
+  <p:extLst>
+    <p:ext uri="{EFAFB233-063F-42B5-8137-9DF3F51BA10A}">
+      <p15:sldGuideLst xmlns:p15="http://schemas.microsoft.com/office/powerpoint/2012/main"/>
+    </p:ext>
+  </p:extLst>
 </p:presentation>
 </file>
 
@@ -256,7 +266,7 @@
           <a:p>
             <a:fld id="{88F193AE-FE47-4820-8C27-F7A3B3C7D463}" type="datetimeFigureOut">
               <a:rPr lang="en-SI" smtClean="0"/>
-              <a:t>11/08/2026</a:t>
+              <a:t>16/08/2026</a:t>
             </a:fld>
             <a:endParaRPr lang="en-SI"/>
           </a:p>
@@ -456,7 +466,7 @@
           <a:p>
             <a:fld id="{88F193AE-FE47-4820-8C27-F7A3B3C7D463}" type="datetimeFigureOut">
               <a:rPr lang="en-SI" smtClean="0"/>
-              <a:t>11/08/2026</a:t>
+              <a:t>16/08/2026</a:t>
             </a:fld>
             <a:endParaRPr lang="en-SI"/>
           </a:p>
@@ -666,7 +676,7 @@
           <a:p>
             <a:fld id="{88F193AE-FE47-4820-8C27-F7A3B3C7D463}" type="datetimeFigureOut">
               <a:rPr lang="en-SI" smtClean="0"/>
-              <a:t>11/08/2026</a:t>
+              <a:t>16/08/2026</a:t>
             </a:fld>
             <a:endParaRPr lang="en-SI"/>
           </a:p>
@@ -866,7 +876,7 @@
           <a:p>
             <a:fld id="{88F193AE-FE47-4820-8C27-F7A3B3C7D463}" type="datetimeFigureOut">
               <a:rPr lang="en-SI" smtClean="0"/>
-              <a:t>11/08/2026</a:t>
+              <a:t>16/08/2026</a:t>
             </a:fld>
             <a:endParaRPr lang="en-SI"/>
           </a:p>
@@ -1142,7 +1152,7 @@
           <a:p>
             <a:fld id="{88F193AE-FE47-4820-8C27-F7A3B3C7D463}" type="datetimeFigureOut">
               <a:rPr lang="en-SI" smtClean="0"/>
-              <a:t>11/08/2026</a:t>
+              <a:t>16/08/2026</a:t>
             </a:fld>
             <a:endParaRPr lang="en-SI"/>
           </a:p>
@@ -1410,7 +1420,7 @@
           <a:p>
             <a:fld id="{88F193AE-FE47-4820-8C27-F7A3B3C7D463}" type="datetimeFigureOut">
               <a:rPr lang="en-SI" smtClean="0"/>
-              <a:t>11/08/2026</a:t>
+              <a:t>16/08/2026</a:t>
             </a:fld>
             <a:endParaRPr lang="en-SI"/>
           </a:p>
@@ -1825,7 +1835,7 @@
           <a:p>
             <a:fld id="{88F193AE-FE47-4820-8C27-F7A3B3C7D463}" type="datetimeFigureOut">
               <a:rPr lang="en-SI" smtClean="0"/>
-              <a:t>11/08/2026</a:t>
+              <a:t>16/08/2026</a:t>
             </a:fld>
             <a:endParaRPr lang="en-SI"/>
           </a:p>
@@ -1967,7 +1977,7 @@
           <a:p>
             <a:fld id="{88F193AE-FE47-4820-8C27-F7A3B3C7D463}" type="datetimeFigureOut">
               <a:rPr lang="en-SI" smtClean="0"/>
-              <a:t>11/08/2026</a:t>
+              <a:t>16/08/2026</a:t>
             </a:fld>
             <a:endParaRPr lang="en-SI"/>
           </a:p>
@@ -2080,7 +2090,7 @@
           <a:p>
             <a:fld id="{88F193AE-FE47-4820-8C27-F7A3B3C7D463}" type="datetimeFigureOut">
               <a:rPr lang="en-SI" smtClean="0"/>
-              <a:t>11/08/2026</a:t>
+              <a:t>16/08/2026</a:t>
             </a:fld>
             <a:endParaRPr lang="en-SI"/>
           </a:p>
@@ -2393,7 +2403,7 @@
           <a:p>
             <a:fld id="{88F193AE-FE47-4820-8C27-F7A3B3C7D463}" type="datetimeFigureOut">
               <a:rPr lang="en-SI" smtClean="0"/>
-              <a:t>11/08/2026</a:t>
+              <a:t>16/08/2026</a:t>
             </a:fld>
             <a:endParaRPr lang="en-SI"/>
           </a:p>
@@ -2682,7 +2692,7 @@
           <a:p>
             <a:fld id="{88F193AE-FE47-4820-8C27-F7A3B3C7D463}" type="datetimeFigureOut">
               <a:rPr lang="en-SI" smtClean="0"/>
-              <a:t>11/08/2026</a:t>
+              <a:t>16/08/2026</a:t>
             </a:fld>
             <a:endParaRPr lang="en-SI"/>
           </a:p>
@@ -2925,7 +2935,7 @@
           <a:p>
             <a:fld id="{88F193AE-FE47-4820-8C27-F7A3B3C7D463}" type="datetimeFigureOut">
               <a:rPr lang="en-SI" smtClean="0"/>
-              <a:t>11/08/2026</a:t>
+              <a:t>16/08/2026</a:t>
             </a:fld>
             <a:endParaRPr lang="en-SI"/>
           </a:p>
@@ -6042,6 +6052,5887 @@
     <p:extLst>
       <p:ext uri="{BB962C8B-B14F-4D97-AF65-F5344CB8AC3E}">
         <p14:creationId xmlns:p14="http://schemas.microsoft.com/office/powerpoint/2010/main" val="1900386443"/>
+      </p:ext>
+    </p:extLst>
+  </p:cSld>
+  <p:clrMapOvr>
+    <a:masterClrMapping/>
+  </p:clrMapOvr>
+</p:sld>
+</file>
+
+<file path=ppt/slides/slide2.xml><?xml version="1.0" encoding="utf-8"?>
+<p:sld xmlns:a="http://schemas.openxmlformats.org/drawingml/2006/main" xmlns:r="http://schemas.openxmlformats.org/officeDocument/2006/relationships" xmlns:p="http://schemas.openxmlformats.org/presentationml/2006/main">
+  <p:cSld>
+    <p:spTree>
+      <p:nvGrpSpPr>
+        <p:cNvPr id="1" name=""/>
+        <p:cNvGrpSpPr/>
+        <p:nvPr/>
+      </p:nvGrpSpPr>
+      <p:grpSpPr>
+        <a:xfrm>
+          <a:off x="0" y="0"/>
+          <a:ext cx="0" cy="0"/>
+          <a:chOff x="0" y="0"/>
+          <a:chExt cx="0" cy="0"/>
+        </a:xfrm>
+      </p:grpSpPr>
+      <p:sp>
+        <p:nvSpPr>
+          <p:cNvPr id="3" name="Rectangle 2">
+            <a:extLst>
+              <a:ext uri="{FF2B5EF4-FFF2-40B4-BE49-F238E27FC236}">
+                <a16:creationId xmlns:a16="http://schemas.microsoft.com/office/drawing/2014/main" id="{25CE165E-9269-1D94-5E6E-3C3950499159}"/>
+              </a:ext>
+            </a:extLst>
+          </p:cNvPr>
+          <p:cNvSpPr/>
+          <p:nvPr/>
+        </p:nvSpPr>
+        <p:spPr>
+          <a:xfrm>
+            <a:off x="2484715" y="1694150"/>
+            <a:ext cx="1742385" cy="2426620"/>
+          </a:xfrm>
+          <a:prstGeom prst="rect">
+            <a:avLst/>
+          </a:prstGeom>
+          <a:solidFill>
+            <a:srgbClr val="89D8F7">
+              <a:alpha val="50000"/>
+            </a:srgbClr>
+          </a:solidFill>
+          <a:ln>
+            <a:noFill/>
+          </a:ln>
+        </p:spPr>
+        <p:style>
+          <a:lnRef idx="0">
+            <a:scrgbClr r="0" g="0" b="0"/>
+          </a:lnRef>
+          <a:fillRef idx="0">
+            <a:scrgbClr r="0" g="0" b="0"/>
+          </a:fillRef>
+          <a:effectRef idx="0">
+            <a:scrgbClr r="0" g="0" b="0"/>
+          </a:effectRef>
+          <a:fontRef idx="minor">
+            <a:schemeClr val="lt1"/>
+          </a:fontRef>
+        </p:style>
+        <p:txBody>
+          <a:bodyPr rtlCol="0" anchor="ctr"/>
+          <a:lstStyle/>
+          <a:p>
+            <a:pPr algn="ctr"/>
+            <a:endParaRPr lang="en-SI"/>
+          </a:p>
+        </p:txBody>
+      </p:sp>
+      <p:sp>
+        <p:nvSpPr>
+          <p:cNvPr id="6" name="Rectangle 5">
+            <a:extLst>
+              <a:ext uri="{FF2B5EF4-FFF2-40B4-BE49-F238E27FC236}">
+                <a16:creationId xmlns:a16="http://schemas.microsoft.com/office/drawing/2014/main" id="{7CDD4EE2-6F4E-EC2C-BDF4-44548D4D4E5A}"/>
+              </a:ext>
+            </a:extLst>
+          </p:cNvPr>
+          <p:cNvSpPr/>
+          <p:nvPr/>
+        </p:nvSpPr>
+        <p:spPr>
+          <a:xfrm>
+            <a:off x="2920390" y="2305336"/>
+            <a:ext cx="845604" cy="502114"/>
+          </a:xfrm>
+          <a:prstGeom prst="rect">
+            <a:avLst/>
+          </a:prstGeom>
+        </p:spPr>
+        <p:style>
+          <a:lnRef idx="1">
+            <a:schemeClr val="accent4"/>
+          </a:lnRef>
+          <a:fillRef idx="3">
+            <a:schemeClr val="accent4"/>
+          </a:fillRef>
+          <a:effectRef idx="2">
+            <a:schemeClr val="accent4"/>
+          </a:effectRef>
+          <a:fontRef idx="minor">
+            <a:schemeClr val="lt1"/>
+          </a:fontRef>
+        </p:style>
+        <p:txBody>
+          <a:bodyPr rtlCol="0" anchor="ctr"/>
+          <a:lstStyle/>
+          <a:p>
+            <a:pPr algn="ctr"/>
+            <a:r>
+              <a:rPr lang="en-US" sz="1000" dirty="0"/>
+              <a:t>OC</a:t>
+            </a:r>
+          </a:p>
+        </p:txBody>
+      </p:sp>
+      <p:sp>
+        <p:nvSpPr>
+          <p:cNvPr id="8" name="Rectangle 7">
+            <a:extLst>
+              <a:ext uri="{FF2B5EF4-FFF2-40B4-BE49-F238E27FC236}">
+                <a16:creationId xmlns:a16="http://schemas.microsoft.com/office/drawing/2014/main" id="{EB267411-5E62-2149-31ED-6D37DD70F733}"/>
+              </a:ext>
+            </a:extLst>
+          </p:cNvPr>
+          <p:cNvSpPr/>
+          <p:nvPr/>
+        </p:nvSpPr>
+        <p:spPr>
+          <a:xfrm>
+            <a:off x="2920390" y="3132609"/>
+            <a:ext cx="845604" cy="502114"/>
+          </a:xfrm>
+          <a:prstGeom prst="rect">
+            <a:avLst/>
+          </a:prstGeom>
+        </p:spPr>
+        <p:style>
+          <a:lnRef idx="1">
+            <a:schemeClr val="accent4"/>
+          </a:lnRef>
+          <a:fillRef idx="3">
+            <a:schemeClr val="accent4"/>
+          </a:fillRef>
+          <a:effectRef idx="2">
+            <a:schemeClr val="accent4"/>
+          </a:effectRef>
+          <a:fontRef idx="minor">
+            <a:schemeClr val="lt1"/>
+          </a:fontRef>
+        </p:style>
+        <p:txBody>
+          <a:bodyPr rtlCol="0" anchor="ctr"/>
+          <a:lstStyle/>
+          <a:p>
+            <a:pPr algn="ctr"/>
+            <a:r>
+              <a:rPr lang="en-US" sz="1000" dirty="0"/>
+              <a:t>FC</a:t>
+            </a:r>
+          </a:p>
+        </p:txBody>
+      </p:sp>
+      <p:sp>
+        <p:nvSpPr>
+          <p:cNvPr id="9" name="Rectangle 8">
+            <a:extLst>
+              <a:ext uri="{FF2B5EF4-FFF2-40B4-BE49-F238E27FC236}">
+                <a16:creationId xmlns:a16="http://schemas.microsoft.com/office/drawing/2014/main" id="{1F80E9CB-AFB0-39F4-D7C9-5D36AD374EE3}"/>
+              </a:ext>
+            </a:extLst>
+          </p:cNvPr>
+          <p:cNvSpPr/>
+          <p:nvPr/>
+        </p:nvSpPr>
+        <p:spPr>
+          <a:xfrm>
+            <a:off x="5758401" y="1694150"/>
+            <a:ext cx="1742385" cy="2451531"/>
+          </a:xfrm>
+          <a:prstGeom prst="rect">
+            <a:avLst/>
+          </a:prstGeom>
+          <a:solidFill>
+            <a:srgbClr val="89D8F7">
+              <a:alpha val="50000"/>
+            </a:srgbClr>
+          </a:solidFill>
+          <a:ln>
+            <a:noFill/>
+          </a:ln>
+        </p:spPr>
+        <p:style>
+          <a:lnRef idx="0">
+            <a:scrgbClr r="0" g="0" b="0"/>
+          </a:lnRef>
+          <a:fillRef idx="0">
+            <a:scrgbClr r="0" g="0" b="0"/>
+          </a:fillRef>
+          <a:effectRef idx="0">
+            <a:scrgbClr r="0" g="0" b="0"/>
+          </a:effectRef>
+          <a:fontRef idx="minor">
+            <a:schemeClr val="lt1"/>
+          </a:fontRef>
+        </p:style>
+        <p:txBody>
+          <a:bodyPr rtlCol="0" anchor="ctr"/>
+          <a:lstStyle/>
+          <a:p>
+            <a:pPr algn="ctr"/>
+            <a:endParaRPr lang="en-SI"/>
+          </a:p>
+        </p:txBody>
+      </p:sp>
+      <p:sp>
+        <p:nvSpPr>
+          <p:cNvPr id="10" name="Rectangle 9">
+            <a:extLst>
+              <a:ext uri="{FF2B5EF4-FFF2-40B4-BE49-F238E27FC236}">
+                <a16:creationId xmlns:a16="http://schemas.microsoft.com/office/drawing/2014/main" id="{D12C1CE0-E272-C233-96EE-EDBF44CF331C}"/>
+              </a:ext>
+            </a:extLst>
+          </p:cNvPr>
+          <p:cNvSpPr/>
+          <p:nvPr/>
+        </p:nvSpPr>
+        <p:spPr>
+          <a:xfrm>
+            <a:off x="6194076" y="2305336"/>
+            <a:ext cx="845604" cy="502114"/>
+          </a:xfrm>
+          <a:prstGeom prst="rect">
+            <a:avLst/>
+          </a:prstGeom>
+        </p:spPr>
+        <p:style>
+          <a:lnRef idx="1">
+            <a:schemeClr val="accent4"/>
+          </a:lnRef>
+          <a:fillRef idx="3">
+            <a:schemeClr val="accent4"/>
+          </a:fillRef>
+          <a:effectRef idx="2">
+            <a:schemeClr val="accent4"/>
+          </a:effectRef>
+          <a:fontRef idx="minor">
+            <a:schemeClr val="lt1"/>
+          </a:fontRef>
+        </p:style>
+        <p:txBody>
+          <a:bodyPr rtlCol="0" anchor="ctr"/>
+          <a:lstStyle/>
+          <a:p>
+            <a:pPr algn="ctr"/>
+            <a:r>
+              <a:rPr lang="en-US" sz="1000" dirty="0"/>
+              <a:t>OC</a:t>
+            </a:r>
+          </a:p>
+        </p:txBody>
+      </p:sp>
+      <p:sp>
+        <p:nvSpPr>
+          <p:cNvPr id="11" name="Rectangle 10">
+            <a:extLst>
+              <a:ext uri="{FF2B5EF4-FFF2-40B4-BE49-F238E27FC236}">
+                <a16:creationId xmlns:a16="http://schemas.microsoft.com/office/drawing/2014/main" id="{CFB1383D-D9C4-A30D-D859-5F07B1F0DB1A}"/>
+              </a:ext>
+            </a:extLst>
+          </p:cNvPr>
+          <p:cNvSpPr/>
+          <p:nvPr/>
+        </p:nvSpPr>
+        <p:spPr>
+          <a:xfrm>
+            <a:off x="6194076" y="3132609"/>
+            <a:ext cx="845604" cy="502114"/>
+          </a:xfrm>
+          <a:prstGeom prst="rect">
+            <a:avLst/>
+          </a:prstGeom>
+        </p:spPr>
+        <p:style>
+          <a:lnRef idx="1">
+            <a:schemeClr val="accent4"/>
+          </a:lnRef>
+          <a:fillRef idx="3">
+            <a:schemeClr val="accent4"/>
+          </a:fillRef>
+          <a:effectRef idx="2">
+            <a:schemeClr val="accent4"/>
+          </a:effectRef>
+          <a:fontRef idx="minor">
+            <a:schemeClr val="lt1"/>
+          </a:fontRef>
+        </p:style>
+        <p:txBody>
+          <a:bodyPr rtlCol="0" anchor="ctr"/>
+          <a:lstStyle/>
+          <a:p>
+            <a:pPr algn="ctr"/>
+            <a:r>
+              <a:rPr lang="en-US" sz="1000" dirty="0"/>
+              <a:t>FC</a:t>
+            </a:r>
+          </a:p>
+        </p:txBody>
+      </p:sp>
+      <p:cxnSp>
+        <p:nvCxnSpPr>
+          <p:cNvPr id="17" name="Straight Arrow Connector 16">
+            <a:extLst>
+              <a:ext uri="{FF2B5EF4-FFF2-40B4-BE49-F238E27FC236}">
+                <a16:creationId xmlns:a16="http://schemas.microsoft.com/office/drawing/2014/main" id="{8DFBB532-2D02-8C78-71C1-5F1615DEDE61}"/>
+              </a:ext>
+            </a:extLst>
+          </p:cNvPr>
+          <p:cNvCxnSpPr>
+            <a:cxnSpLocks/>
+            <a:stCxn id="6" idx="3"/>
+            <a:endCxn id="25" idx="2"/>
+          </p:cNvCxnSpPr>
+          <p:nvPr/>
+        </p:nvCxnSpPr>
+        <p:spPr>
+          <a:xfrm flipV="1">
+            <a:off x="3765994" y="2550340"/>
+            <a:ext cx="861349" cy="6053"/>
+          </a:xfrm>
+          <a:prstGeom prst="straightConnector1">
+            <a:avLst/>
+          </a:prstGeom>
+          <a:ln>
+            <a:headEnd type="triangle"/>
+            <a:tailEnd type="triangle"/>
+          </a:ln>
+        </p:spPr>
+        <p:style>
+          <a:lnRef idx="2">
+            <a:schemeClr val="accent1"/>
+          </a:lnRef>
+          <a:fillRef idx="0">
+            <a:schemeClr val="accent1"/>
+          </a:fillRef>
+          <a:effectRef idx="1">
+            <a:schemeClr val="accent1"/>
+          </a:effectRef>
+          <a:fontRef idx="minor">
+            <a:schemeClr val="tx1"/>
+          </a:fontRef>
+        </p:style>
+      </p:cxnSp>
+      <p:cxnSp>
+        <p:nvCxnSpPr>
+          <p:cNvPr id="18" name="Straight Arrow Connector 17">
+            <a:extLst>
+              <a:ext uri="{FF2B5EF4-FFF2-40B4-BE49-F238E27FC236}">
+                <a16:creationId xmlns:a16="http://schemas.microsoft.com/office/drawing/2014/main" id="{7E7DD704-F9AF-DDEC-66CA-1CA931B809E4}"/>
+              </a:ext>
+            </a:extLst>
+          </p:cNvPr>
+          <p:cNvCxnSpPr>
+            <a:cxnSpLocks/>
+            <a:stCxn id="25" idx="4"/>
+            <a:endCxn id="10" idx="1"/>
+          </p:cNvCxnSpPr>
+          <p:nvPr/>
+        </p:nvCxnSpPr>
+        <p:spPr>
+          <a:xfrm>
+            <a:off x="5449971" y="2550340"/>
+            <a:ext cx="744105" cy="6053"/>
+          </a:xfrm>
+          <a:prstGeom prst="straightConnector1">
+            <a:avLst/>
+          </a:prstGeom>
+          <a:ln>
+            <a:headEnd type="triangle"/>
+            <a:tailEnd type="triangle"/>
+          </a:ln>
+        </p:spPr>
+        <p:style>
+          <a:lnRef idx="2">
+            <a:schemeClr val="accent1"/>
+          </a:lnRef>
+          <a:fillRef idx="0">
+            <a:schemeClr val="accent1"/>
+          </a:fillRef>
+          <a:effectRef idx="1">
+            <a:schemeClr val="accent1"/>
+          </a:effectRef>
+          <a:fontRef idx="minor">
+            <a:schemeClr val="tx1"/>
+          </a:fontRef>
+        </p:style>
+      </p:cxnSp>
+      <p:sp>
+        <p:nvSpPr>
+          <p:cNvPr id="25" name="Cylinder 24">
+            <a:extLst>
+              <a:ext uri="{FF2B5EF4-FFF2-40B4-BE49-F238E27FC236}">
+                <a16:creationId xmlns:a16="http://schemas.microsoft.com/office/drawing/2014/main" id="{60737796-EA81-101D-DD24-2C60368313BB}"/>
+              </a:ext>
+            </a:extLst>
+          </p:cNvPr>
+          <p:cNvSpPr/>
+          <p:nvPr/>
+        </p:nvSpPr>
+        <p:spPr>
+          <a:xfrm>
+            <a:off x="4627343" y="2341793"/>
+            <a:ext cx="822628" cy="417094"/>
+          </a:xfrm>
+          <a:prstGeom prst="can">
+            <a:avLst/>
+          </a:prstGeom>
+        </p:spPr>
+        <p:style>
+          <a:lnRef idx="1">
+            <a:schemeClr val="accent2"/>
+          </a:lnRef>
+          <a:fillRef idx="2">
+            <a:schemeClr val="accent2"/>
+          </a:fillRef>
+          <a:effectRef idx="1">
+            <a:schemeClr val="accent2"/>
+          </a:effectRef>
+          <a:fontRef idx="minor">
+            <a:schemeClr val="dk1"/>
+          </a:fontRef>
+        </p:style>
+        <p:txBody>
+          <a:bodyPr rtlCol="0" anchor="ctr"/>
+          <a:lstStyle/>
+          <a:p>
+            <a:pPr algn="ctr"/>
+            <a:r>
+              <a:rPr lang="en-GB" sz="1000" dirty="0" err="1">
+                <a:solidFill>
+                  <a:schemeClr val="bg1"/>
+                </a:solidFill>
+              </a:rPr>
+              <a:t>redis-oc</a:t>
+            </a:r>
+            <a:endParaRPr lang="en-SI" sz="1000" dirty="0">
+              <a:solidFill>
+                <a:schemeClr val="bg1"/>
+              </a:solidFill>
+            </a:endParaRPr>
+          </a:p>
+        </p:txBody>
+      </p:sp>
+      <p:sp>
+        <p:nvSpPr>
+          <p:cNvPr id="29" name="Cylinder 28">
+            <a:extLst>
+              <a:ext uri="{FF2B5EF4-FFF2-40B4-BE49-F238E27FC236}">
+                <a16:creationId xmlns:a16="http://schemas.microsoft.com/office/drawing/2014/main" id="{E8D3B449-91A5-3A0E-B3A8-12849F76F27A}"/>
+              </a:ext>
+            </a:extLst>
+          </p:cNvPr>
+          <p:cNvSpPr/>
+          <p:nvPr/>
+        </p:nvSpPr>
+        <p:spPr>
+          <a:xfrm>
+            <a:off x="4627343" y="3173926"/>
+            <a:ext cx="822628" cy="417094"/>
+          </a:xfrm>
+          <a:prstGeom prst="can">
+            <a:avLst/>
+          </a:prstGeom>
+        </p:spPr>
+        <p:style>
+          <a:lnRef idx="1">
+            <a:schemeClr val="accent2"/>
+          </a:lnRef>
+          <a:fillRef idx="2">
+            <a:schemeClr val="accent2"/>
+          </a:fillRef>
+          <a:effectRef idx="1">
+            <a:schemeClr val="accent2"/>
+          </a:effectRef>
+          <a:fontRef idx="minor">
+            <a:schemeClr val="dk1"/>
+          </a:fontRef>
+        </p:style>
+        <p:txBody>
+          <a:bodyPr rtlCol="0" anchor="ctr"/>
+          <a:lstStyle/>
+          <a:p>
+            <a:pPr algn="ctr"/>
+            <a:r>
+              <a:rPr lang="en-GB" sz="1000" dirty="0" err="1">
+                <a:solidFill>
+                  <a:schemeClr val="bg1"/>
+                </a:solidFill>
+              </a:rPr>
+              <a:t>redis</a:t>
+            </a:r>
+            <a:r>
+              <a:rPr lang="en-GB" sz="1000" dirty="0">
+                <a:solidFill>
+                  <a:schemeClr val="bg1"/>
+                </a:solidFill>
+              </a:rPr>
+              <a:t>-fc</a:t>
+            </a:r>
+            <a:endParaRPr lang="en-SI" sz="1000" dirty="0">
+              <a:solidFill>
+                <a:schemeClr val="bg1"/>
+              </a:solidFill>
+            </a:endParaRPr>
+          </a:p>
+        </p:txBody>
+      </p:sp>
+      <p:cxnSp>
+        <p:nvCxnSpPr>
+          <p:cNvPr id="30" name="Straight Arrow Connector 29">
+            <a:extLst>
+              <a:ext uri="{FF2B5EF4-FFF2-40B4-BE49-F238E27FC236}">
+                <a16:creationId xmlns:a16="http://schemas.microsoft.com/office/drawing/2014/main" id="{B7826256-D6D6-CC7C-B311-0E303D38CA55}"/>
+              </a:ext>
+            </a:extLst>
+          </p:cNvPr>
+          <p:cNvCxnSpPr>
+            <a:cxnSpLocks/>
+            <a:stCxn id="8" idx="3"/>
+            <a:endCxn id="29" idx="2"/>
+          </p:cNvCxnSpPr>
+          <p:nvPr/>
+        </p:nvCxnSpPr>
+        <p:spPr>
+          <a:xfrm flipV="1">
+            <a:off x="3765994" y="3382473"/>
+            <a:ext cx="861349" cy="1193"/>
+          </a:xfrm>
+          <a:prstGeom prst="straightConnector1">
+            <a:avLst/>
+          </a:prstGeom>
+          <a:ln>
+            <a:headEnd type="triangle"/>
+            <a:tailEnd type="triangle"/>
+          </a:ln>
+        </p:spPr>
+        <p:style>
+          <a:lnRef idx="2">
+            <a:schemeClr val="accent1"/>
+          </a:lnRef>
+          <a:fillRef idx="0">
+            <a:schemeClr val="accent1"/>
+          </a:fillRef>
+          <a:effectRef idx="1">
+            <a:schemeClr val="accent1"/>
+          </a:effectRef>
+          <a:fontRef idx="minor">
+            <a:schemeClr val="tx1"/>
+          </a:fontRef>
+        </p:style>
+      </p:cxnSp>
+      <p:cxnSp>
+        <p:nvCxnSpPr>
+          <p:cNvPr id="35" name="Straight Arrow Connector 34">
+            <a:extLst>
+              <a:ext uri="{FF2B5EF4-FFF2-40B4-BE49-F238E27FC236}">
+                <a16:creationId xmlns:a16="http://schemas.microsoft.com/office/drawing/2014/main" id="{D8E728B1-717A-1811-34E6-664557801FBE}"/>
+              </a:ext>
+            </a:extLst>
+          </p:cNvPr>
+          <p:cNvCxnSpPr>
+            <a:cxnSpLocks/>
+            <a:stCxn id="29" idx="4"/>
+            <a:endCxn id="11" idx="1"/>
+          </p:cNvCxnSpPr>
+          <p:nvPr/>
+        </p:nvCxnSpPr>
+        <p:spPr>
+          <a:xfrm>
+            <a:off x="5449971" y="3382473"/>
+            <a:ext cx="744105" cy="1193"/>
+          </a:xfrm>
+          <a:prstGeom prst="straightConnector1">
+            <a:avLst/>
+          </a:prstGeom>
+          <a:ln>
+            <a:headEnd type="triangle"/>
+            <a:tailEnd type="triangle"/>
+          </a:ln>
+        </p:spPr>
+        <p:style>
+          <a:lnRef idx="2">
+            <a:schemeClr val="accent1"/>
+          </a:lnRef>
+          <a:fillRef idx="0">
+            <a:schemeClr val="accent1"/>
+          </a:fillRef>
+          <a:effectRef idx="1">
+            <a:schemeClr val="accent1"/>
+          </a:effectRef>
+          <a:fontRef idx="minor">
+            <a:schemeClr val="tx1"/>
+          </a:fontRef>
+        </p:style>
+      </p:cxnSp>
+      <p:sp>
+        <p:nvSpPr>
+          <p:cNvPr id="41" name="Smiley Face 40">
+            <a:extLst>
+              <a:ext uri="{FF2B5EF4-FFF2-40B4-BE49-F238E27FC236}">
+                <a16:creationId xmlns:a16="http://schemas.microsoft.com/office/drawing/2014/main" id="{11151259-FD6D-34A4-F581-284D03AC019F}"/>
+              </a:ext>
+            </a:extLst>
+          </p:cNvPr>
+          <p:cNvSpPr/>
+          <p:nvPr/>
+        </p:nvSpPr>
+        <p:spPr>
+          <a:xfrm>
+            <a:off x="3142889" y="923977"/>
+            <a:ext cx="426036" cy="405063"/>
+          </a:xfrm>
+          <a:prstGeom prst="smileyFace">
+            <a:avLst/>
+          </a:prstGeom>
+        </p:spPr>
+        <p:style>
+          <a:lnRef idx="2">
+            <a:schemeClr val="accent4"/>
+          </a:lnRef>
+          <a:fillRef idx="1">
+            <a:schemeClr val="lt1"/>
+          </a:fillRef>
+          <a:effectRef idx="0">
+            <a:schemeClr val="accent4"/>
+          </a:effectRef>
+          <a:fontRef idx="minor">
+            <a:schemeClr val="dk1"/>
+          </a:fontRef>
+        </p:style>
+        <p:txBody>
+          <a:bodyPr rtlCol="0" anchor="ctr"/>
+          <a:lstStyle/>
+          <a:p>
+            <a:pPr algn="ctr"/>
+            <a:endParaRPr lang="en-SI"/>
+          </a:p>
+        </p:txBody>
+      </p:sp>
+      <p:cxnSp>
+        <p:nvCxnSpPr>
+          <p:cNvPr id="43" name="Straight Arrow Connector 42">
+            <a:extLst>
+              <a:ext uri="{FF2B5EF4-FFF2-40B4-BE49-F238E27FC236}">
+                <a16:creationId xmlns:a16="http://schemas.microsoft.com/office/drawing/2014/main" id="{A57D780E-6057-886D-DBF0-D8583A9AC9D0}"/>
+              </a:ext>
+            </a:extLst>
+          </p:cNvPr>
+          <p:cNvCxnSpPr>
+            <a:cxnSpLocks/>
+            <a:stCxn id="41" idx="4"/>
+            <a:endCxn id="3" idx="0"/>
+          </p:cNvCxnSpPr>
+          <p:nvPr/>
+        </p:nvCxnSpPr>
+        <p:spPr>
+          <a:xfrm>
+            <a:off x="3355907" y="1329040"/>
+            <a:ext cx="1" cy="365110"/>
+          </a:xfrm>
+          <a:prstGeom prst="straightConnector1">
+            <a:avLst/>
+          </a:prstGeom>
+          <a:ln>
+            <a:headEnd type="triangle"/>
+            <a:tailEnd type="triangle"/>
+          </a:ln>
+        </p:spPr>
+        <p:style>
+          <a:lnRef idx="2">
+            <a:schemeClr val="accent1"/>
+          </a:lnRef>
+          <a:fillRef idx="0">
+            <a:schemeClr val="accent1"/>
+          </a:fillRef>
+          <a:effectRef idx="1">
+            <a:schemeClr val="accent1"/>
+          </a:effectRef>
+          <a:fontRef idx="minor">
+            <a:schemeClr val="tx1"/>
+          </a:fontRef>
+        </p:style>
+      </p:cxnSp>
+      <p:sp>
+        <p:nvSpPr>
+          <p:cNvPr id="47" name="Smiley Face 46">
+            <a:extLst>
+              <a:ext uri="{FF2B5EF4-FFF2-40B4-BE49-F238E27FC236}">
+                <a16:creationId xmlns:a16="http://schemas.microsoft.com/office/drawing/2014/main" id="{E093E33C-C879-B42C-2B51-A9EE77740A37}"/>
+              </a:ext>
+            </a:extLst>
+          </p:cNvPr>
+          <p:cNvSpPr/>
+          <p:nvPr/>
+        </p:nvSpPr>
+        <p:spPr>
+          <a:xfrm>
+            <a:off x="6416576" y="921017"/>
+            <a:ext cx="426036" cy="405063"/>
+          </a:xfrm>
+          <a:prstGeom prst="smileyFace">
+            <a:avLst/>
+          </a:prstGeom>
+        </p:spPr>
+        <p:style>
+          <a:lnRef idx="2">
+            <a:schemeClr val="accent4"/>
+          </a:lnRef>
+          <a:fillRef idx="1">
+            <a:schemeClr val="lt1"/>
+          </a:fillRef>
+          <a:effectRef idx="0">
+            <a:schemeClr val="accent4"/>
+          </a:effectRef>
+          <a:fontRef idx="minor">
+            <a:schemeClr val="dk1"/>
+          </a:fontRef>
+        </p:style>
+        <p:txBody>
+          <a:bodyPr rtlCol="0" anchor="ctr"/>
+          <a:lstStyle/>
+          <a:p>
+            <a:pPr algn="ctr"/>
+            <a:endParaRPr lang="en-SI"/>
+          </a:p>
+        </p:txBody>
+      </p:sp>
+      <p:cxnSp>
+        <p:nvCxnSpPr>
+          <p:cNvPr id="48" name="Straight Arrow Connector 47">
+            <a:extLst>
+              <a:ext uri="{FF2B5EF4-FFF2-40B4-BE49-F238E27FC236}">
+                <a16:creationId xmlns:a16="http://schemas.microsoft.com/office/drawing/2014/main" id="{BF54F190-287E-0838-4E93-FE2B18E232B8}"/>
+              </a:ext>
+            </a:extLst>
+          </p:cNvPr>
+          <p:cNvCxnSpPr>
+            <a:cxnSpLocks/>
+            <a:stCxn id="47" idx="4"/>
+            <a:endCxn id="9" idx="0"/>
+          </p:cNvCxnSpPr>
+          <p:nvPr/>
+        </p:nvCxnSpPr>
+        <p:spPr>
+          <a:xfrm>
+            <a:off x="6629594" y="1326080"/>
+            <a:ext cx="0" cy="368070"/>
+          </a:xfrm>
+          <a:prstGeom prst="straightConnector1">
+            <a:avLst/>
+          </a:prstGeom>
+          <a:ln>
+            <a:headEnd type="triangle"/>
+            <a:tailEnd type="triangle"/>
+          </a:ln>
+        </p:spPr>
+        <p:style>
+          <a:lnRef idx="2">
+            <a:schemeClr val="accent1"/>
+          </a:lnRef>
+          <a:fillRef idx="0">
+            <a:schemeClr val="accent1"/>
+          </a:fillRef>
+          <a:effectRef idx="1">
+            <a:schemeClr val="accent1"/>
+          </a:effectRef>
+          <a:fontRef idx="minor">
+            <a:schemeClr val="tx1"/>
+          </a:fontRef>
+        </p:style>
+      </p:cxnSp>
+      <p:sp>
+        <p:nvSpPr>
+          <p:cNvPr id="55" name="Oval 54">
+            <a:extLst>
+              <a:ext uri="{FF2B5EF4-FFF2-40B4-BE49-F238E27FC236}">
+                <a16:creationId xmlns:a16="http://schemas.microsoft.com/office/drawing/2014/main" id="{6B10AE82-F5B9-C276-D873-E814BBAD0975}"/>
+              </a:ext>
+            </a:extLst>
+          </p:cNvPr>
+          <p:cNvSpPr/>
+          <p:nvPr/>
+        </p:nvSpPr>
+        <p:spPr>
+          <a:xfrm>
+            <a:off x="4114920" y="1838859"/>
+            <a:ext cx="197025" cy="197025"/>
+          </a:xfrm>
+          <a:prstGeom prst="ellipse">
+            <a:avLst/>
+          </a:prstGeom>
+          <a:ln/>
+        </p:spPr>
+        <p:style>
+          <a:lnRef idx="1">
+            <a:schemeClr val="accent4"/>
+          </a:lnRef>
+          <a:fillRef idx="3">
+            <a:schemeClr val="accent4"/>
+          </a:fillRef>
+          <a:effectRef idx="2">
+            <a:schemeClr val="accent4"/>
+          </a:effectRef>
+          <a:fontRef idx="minor">
+            <a:schemeClr val="lt1"/>
+          </a:fontRef>
+        </p:style>
+        <p:txBody>
+          <a:bodyPr rtlCol="0" anchor="ctr"/>
+          <a:lstStyle/>
+          <a:p>
+            <a:pPr algn="ctr"/>
+            <a:endParaRPr lang="en-SI"/>
+          </a:p>
+        </p:txBody>
+      </p:sp>
+      <p:sp>
+        <p:nvSpPr>
+          <p:cNvPr id="57" name="Oval 56">
+            <a:extLst>
+              <a:ext uri="{FF2B5EF4-FFF2-40B4-BE49-F238E27FC236}">
+                <a16:creationId xmlns:a16="http://schemas.microsoft.com/office/drawing/2014/main" id="{ACBDE953-8D8E-3886-912B-2EE05417851F}"/>
+              </a:ext>
+            </a:extLst>
+          </p:cNvPr>
+          <p:cNvSpPr/>
+          <p:nvPr/>
+        </p:nvSpPr>
+        <p:spPr>
+          <a:xfrm>
+            <a:off x="5680209" y="1838859"/>
+            <a:ext cx="197025" cy="197025"/>
+          </a:xfrm>
+          <a:prstGeom prst="ellipse">
+            <a:avLst/>
+          </a:prstGeom>
+          <a:ln/>
+        </p:spPr>
+        <p:style>
+          <a:lnRef idx="1">
+            <a:schemeClr val="accent4"/>
+          </a:lnRef>
+          <a:fillRef idx="3">
+            <a:schemeClr val="accent4"/>
+          </a:fillRef>
+          <a:effectRef idx="2">
+            <a:schemeClr val="accent4"/>
+          </a:effectRef>
+          <a:fontRef idx="minor">
+            <a:schemeClr val="lt1"/>
+          </a:fontRef>
+        </p:style>
+        <p:txBody>
+          <a:bodyPr rtlCol="0" anchor="ctr"/>
+          <a:lstStyle/>
+          <a:p>
+            <a:pPr algn="ctr"/>
+            <a:endParaRPr lang="en-SI"/>
+          </a:p>
+        </p:txBody>
+      </p:sp>
+      <p:cxnSp>
+        <p:nvCxnSpPr>
+          <p:cNvPr id="59" name="Straight Arrow Connector 58">
+            <a:extLst>
+              <a:ext uri="{FF2B5EF4-FFF2-40B4-BE49-F238E27FC236}">
+                <a16:creationId xmlns:a16="http://schemas.microsoft.com/office/drawing/2014/main" id="{6889E160-27B2-4ECC-361D-B78E1E875182}"/>
+              </a:ext>
+            </a:extLst>
+          </p:cNvPr>
+          <p:cNvCxnSpPr>
+            <a:cxnSpLocks/>
+            <a:stCxn id="55" idx="6"/>
+            <a:endCxn id="57" idx="2"/>
+          </p:cNvCxnSpPr>
+          <p:nvPr/>
+        </p:nvCxnSpPr>
+        <p:spPr>
+          <a:xfrm>
+            <a:off x="4311945" y="1937372"/>
+            <a:ext cx="1368264" cy="0"/>
+          </a:xfrm>
+          <a:prstGeom prst="straightConnector1">
+            <a:avLst/>
+          </a:prstGeom>
+          <a:ln>
+            <a:headEnd type="triangle"/>
+            <a:tailEnd type="triangle"/>
+          </a:ln>
+        </p:spPr>
+        <p:style>
+          <a:lnRef idx="2">
+            <a:schemeClr val="accent1"/>
+          </a:lnRef>
+          <a:fillRef idx="0">
+            <a:schemeClr val="accent1"/>
+          </a:fillRef>
+          <a:effectRef idx="1">
+            <a:schemeClr val="accent1"/>
+          </a:effectRef>
+          <a:fontRef idx="minor">
+            <a:schemeClr val="tx1"/>
+          </a:fontRef>
+        </p:style>
+      </p:cxnSp>
+      <p:sp>
+        <p:nvSpPr>
+          <p:cNvPr id="64" name="TextBox 63">
+            <a:extLst>
+              <a:ext uri="{FF2B5EF4-FFF2-40B4-BE49-F238E27FC236}">
+                <a16:creationId xmlns:a16="http://schemas.microsoft.com/office/drawing/2014/main" id="{44C9C7DA-C782-85AE-15A5-E894AC70FCBC}"/>
+              </a:ext>
+            </a:extLst>
+          </p:cNvPr>
+          <p:cNvSpPr txBox="1"/>
+          <p:nvPr/>
+        </p:nvSpPr>
+        <p:spPr>
+          <a:xfrm>
+            <a:off x="4698661" y="1698411"/>
+            <a:ext cx="704039" cy="246221"/>
+          </a:xfrm>
+          <a:prstGeom prst="rect">
+            <a:avLst/>
+          </a:prstGeom>
+          <a:noFill/>
+        </p:spPr>
+        <p:txBody>
+          <a:bodyPr wrap="none" rtlCol="0">
+            <a:spAutoFit/>
+          </a:bodyPr>
+          <a:lstStyle/>
+          <a:p>
+            <a:r>
+              <a:rPr lang="en-GB" sz="1000" dirty="0"/>
+              <a:t>HTTP bus</a:t>
+            </a:r>
+            <a:endParaRPr lang="en-SI" sz="1000" dirty="0"/>
+          </a:p>
+        </p:txBody>
+      </p:sp>
+      <p:sp>
+        <p:nvSpPr>
+          <p:cNvPr id="75" name="Oval 74">
+            <a:extLst>
+              <a:ext uri="{FF2B5EF4-FFF2-40B4-BE49-F238E27FC236}">
+                <a16:creationId xmlns:a16="http://schemas.microsoft.com/office/drawing/2014/main" id="{6F7DC7A6-3345-F5B9-A4DE-AF62410F5BCF}"/>
+              </a:ext>
+            </a:extLst>
+          </p:cNvPr>
+          <p:cNvSpPr/>
+          <p:nvPr/>
+        </p:nvSpPr>
+        <p:spPr>
+          <a:xfrm>
+            <a:off x="3257394" y="4015530"/>
+            <a:ext cx="197025" cy="197025"/>
+          </a:xfrm>
+          <a:prstGeom prst="ellipse">
+            <a:avLst/>
+          </a:prstGeom>
+          <a:ln/>
+        </p:spPr>
+        <p:style>
+          <a:lnRef idx="1">
+            <a:schemeClr val="accent4"/>
+          </a:lnRef>
+          <a:fillRef idx="3">
+            <a:schemeClr val="accent4"/>
+          </a:fillRef>
+          <a:effectRef idx="2">
+            <a:schemeClr val="accent4"/>
+          </a:effectRef>
+          <a:fontRef idx="minor">
+            <a:schemeClr val="lt1"/>
+          </a:fontRef>
+        </p:style>
+        <p:txBody>
+          <a:bodyPr rtlCol="0" anchor="ctr"/>
+          <a:lstStyle/>
+          <a:p>
+            <a:pPr algn="ctr"/>
+            <a:endParaRPr lang="en-SI"/>
+          </a:p>
+        </p:txBody>
+      </p:sp>
+      <p:sp>
+        <p:nvSpPr>
+          <p:cNvPr id="77" name="Oval 76">
+            <a:extLst>
+              <a:ext uri="{FF2B5EF4-FFF2-40B4-BE49-F238E27FC236}">
+                <a16:creationId xmlns:a16="http://schemas.microsoft.com/office/drawing/2014/main" id="{268E5B0C-8901-AFD7-9009-D7B2FC4DE96B}"/>
+              </a:ext>
+            </a:extLst>
+          </p:cNvPr>
+          <p:cNvSpPr/>
+          <p:nvPr/>
+        </p:nvSpPr>
+        <p:spPr>
+          <a:xfrm>
+            <a:off x="6522710" y="4047168"/>
+            <a:ext cx="197025" cy="197025"/>
+          </a:xfrm>
+          <a:prstGeom prst="ellipse">
+            <a:avLst/>
+          </a:prstGeom>
+          <a:ln/>
+        </p:spPr>
+        <p:style>
+          <a:lnRef idx="1">
+            <a:schemeClr val="accent4"/>
+          </a:lnRef>
+          <a:fillRef idx="3">
+            <a:schemeClr val="accent4"/>
+          </a:fillRef>
+          <a:effectRef idx="2">
+            <a:schemeClr val="accent4"/>
+          </a:effectRef>
+          <a:fontRef idx="minor">
+            <a:schemeClr val="lt1"/>
+          </a:fontRef>
+        </p:style>
+        <p:txBody>
+          <a:bodyPr rtlCol="0" anchor="ctr"/>
+          <a:lstStyle/>
+          <a:p>
+            <a:pPr algn="ctr"/>
+            <a:endParaRPr lang="en-SI"/>
+          </a:p>
+        </p:txBody>
+      </p:sp>
+      <p:sp>
+        <p:nvSpPr>
+          <p:cNvPr id="81" name="Cylinder 80">
+            <a:extLst>
+              <a:ext uri="{FF2B5EF4-FFF2-40B4-BE49-F238E27FC236}">
+                <a16:creationId xmlns:a16="http://schemas.microsoft.com/office/drawing/2014/main" id="{31CE0818-F57C-6449-0D20-8FB60F476164}"/>
+              </a:ext>
+            </a:extLst>
+          </p:cNvPr>
+          <p:cNvSpPr/>
+          <p:nvPr/>
+        </p:nvSpPr>
+        <p:spPr>
+          <a:xfrm>
+            <a:off x="8574562" y="3173926"/>
+            <a:ext cx="950438" cy="417094"/>
+          </a:xfrm>
+          <a:prstGeom prst="can">
+            <a:avLst/>
+          </a:prstGeom>
+        </p:spPr>
+        <p:style>
+          <a:lnRef idx="1">
+            <a:schemeClr val="accent6"/>
+          </a:lnRef>
+          <a:fillRef idx="2">
+            <a:schemeClr val="accent6"/>
+          </a:fillRef>
+          <a:effectRef idx="1">
+            <a:schemeClr val="accent6"/>
+          </a:effectRef>
+          <a:fontRef idx="minor">
+            <a:schemeClr val="dk1"/>
+          </a:fontRef>
+        </p:style>
+        <p:txBody>
+          <a:bodyPr rtlCol="0" anchor="ctr"/>
+          <a:lstStyle/>
+          <a:p>
+            <a:pPr algn="ctr"/>
+            <a:r>
+              <a:rPr lang="en-GB" sz="1000" dirty="0" err="1">
+                <a:solidFill>
+                  <a:schemeClr val="bg1"/>
+                </a:solidFill>
+              </a:rPr>
+              <a:t>prometheus</a:t>
+            </a:r>
+            <a:endParaRPr lang="en-SI" sz="1000" dirty="0">
+              <a:solidFill>
+                <a:schemeClr val="bg1"/>
+              </a:solidFill>
+            </a:endParaRPr>
+          </a:p>
+        </p:txBody>
+      </p:sp>
+      <p:cxnSp>
+        <p:nvCxnSpPr>
+          <p:cNvPr id="84" name="Connector: Elbow 83">
+            <a:extLst>
+              <a:ext uri="{FF2B5EF4-FFF2-40B4-BE49-F238E27FC236}">
+                <a16:creationId xmlns:a16="http://schemas.microsoft.com/office/drawing/2014/main" id="{0057634D-2CCE-D708-99B1-D2590894A7B4}"/>
+              </a:ext>
+            </a:extLst>
+          </p:cNvPr>
+          <p:cNvCxnSpPr>
+            <a:stCxn id="77" idx="4"/>
+            <a:endCxn id="81" idx="3"/>
+          </p:cNvCxnSpPr>
+          <p:nvPr/>
+        </p:nvCxnSpPr>
+        <p:spPr>
+          <a:xfrm rot="5400000" flipH="1" flipV="1">
+            <a:off x="7508915" y="2703328"/>
+            <a:ext cx="653173" cy="2428558"/>
+          </a:xfrm>
+          <a:prstGeom prst="bentConnector3">
+            <a:avLst>
+              <a:gd name="adj1" fmla="val -34998"/>
+            </a:avLst>
+          </a:prstGeom>
+          <a:ln w="12700">
+            <a:prstDash val="dash"/>
+            <a:headEnd type="triangle" w="med" len="med"/>
+            <a:tailEnd type="triangle" w="med" len="med"/>
+          </a:ln>
+        </p:spPr>
+        <p:style>
+          <a:lnRef idx="2">
+            <a:schemeClr val="accent1"/>
+          </a:lnRef>
+          <a:fillRef idx="0">
+            <a:schemeClr val="accent1"/>
+          </a:fillRef>
+          <a:effectRef idx="1">
+            <a:schemeClr val="accent1"/>
+          </a:effectRef>
+          <a:fontRef idx="minor">
+            <a:schemeClr val="tx1"/>
+          </a:fontRef>
+        </p:style>
+      </p:cxnSp>
+      <p:cxnSp>
+        <p:nvCxnSpPr>
+          <p:cNvPr id="91" name="Connector: Elbow 90">
+            <a:extLst>
+              <a:ext uri="{FF2B5EF4-FFF2-40B4-BE49-F238E27FC236}">
+                <a16:creationId xmlns:a16="http://schemas.microsoft.com/office/drawing/2014/main" id="{FD96F2AF-17A4-7D5A-F945-AAFD612E4BEA}"/>
+              </a:ext>
+            </a:extLst>
+          </p:cNvPr>
+          <p:cNvCxnSpPr>
+            <a:stCxn id="75" idx="4"/>
+          </p:cNvCxnSpPr>
+          <p:nvPr/>
+        </p:nvCxnSpPr>
+        <p:spPr>
+          <a:xfrm rot="16200000" flipH="1">
+            <a:off x="4856801" y="2711660"/>
+            <a:ext cx="259182" cy="3260971"/>
+          </a:xfrm>
+          <a:prstGeom prst="bentConnector2">
+            <a:avLst/>
+          </a:prstGeom>
+          <a:ln w="12700">
+            <a:prstDash val="dash"/>
+            <a:headEnd type="triangle" w="med" len="med"/>
+            <a:tailEnd type="none" w="med" len="med"/>
+          </a:ln>
+        </p:spPr>
+        <p:style>
+          <a:lnRef idx="2">
+            <a:schemeClr val="accent1"/>
+          </a:lnRef>
+          <a:fillRef idx="0">
+            <a:schemeClr val="accent1"/>
+          </a:fillRef>
+          <a:effectRef idx="1">
+            <a:schemeClr val="accent1"/>
+          </a:effectRef>
+          <a:fontRef idx="minor">
+            <a:schemeClr val="tx1"/>
+          </a:fontRef>
+        </p:style>
+      </p:cxnSp>
+      <p:cxnSp>
+        <p:nvCxnSpPr>
+          <p:cNvPr id="95" name="Straight Arrow Connector 94">
+            <a:extLst>
+              <a:ext uri="{FF2B5EF4-FFF2-40B4-BE49-F238E27FC236}">
+                <a16:creationId xmlns:a16="http://schemas.microsoft.com/office/drawing/2014/main" id="{DF62A103-30A8-A145-2F09-D8CF43FD1D93}"/>
+              </a:ext>
+            </a:extLst>
+          </p:cNvPr>
+          <p:cNvCxnSpPr>
+            <a:cxnSpLocks/>
+            <a:stCxn id="81" idx="1"/>
+            <a:endCxn id="102" idx="2"/>
+          </p:cNvCxnSpPr>
+          <p:nvPr/>
+        </p:nvCxnSpPr>
+        <p:spPr>
+          <a:xfrm flipV="1">
+            <a:off x="9049781" y="2521601"/>
+            <a:ext cx="1" cy="652325"/>
+          </a:xfrm>
+          <a:prstGeom prst="straightConnector1">
+            <a:avLst/>
+          </a:prstGeom>
+          <a:ln w="12700">
+            <a:prstDash val="dash"/>
+            <a:tailEnd type="triangle"/>
+          </a:ln>
+        </p:spPr>
+        <p:style>
+          <a:lnRef idx="2">
+            <a:schemeClr val="accent1"/>
+          </a:lnRef>
+          <a:fillRef idx="0">
+            <a:schemeClr val="accent1"/>
+          </a:fillRef>
+          <a:effectRef idx="1">
+            <a:schemeClr val="accent1"/>
+          </a:effectRef>
+          <a:fontRef idx="minor">
+            <a:schemeClr val="tx1"/>
+          </a:fontRef>
+        </p:style>
+      </p:cxnSp>
+      <p:cxnSp>
+        <p:nvCxnSpPr>
+          <p:cNvPr id="97" name="Connector: Elbow 96">
+            <a:extLst>
+              <a:ext uri="{FF2B5EF4-FFF2-40B4-BE49-F238E27FC236}">
+                <a16:creationId xmlns:a16="http://schemas.microsoft.com/office/drawing/2014/main" id="{F3D1BEE6-4261-F3EC-10EE-1F04B154A7FB}"/>
+              </a:ext>
+            </a:extLst>
+          </p:cNvPr>
+          <p:cNvCxnSpPr>
+            <a:cxnSpLocks/>
+            <a:endCxn id="102" idx="1"/>
+          </p:cNvCxnSpPr>
+          <p:nvPr/>
+        </p:nvCxnSpPr>
+        <p:spPr>
+          <a:xfrm rot="5400000" flipH="1" flipV="1">
+            <a:off x="7158978" y="3052143"/>
+            <a:ext cx="2197184" cy="633986"/>
+          </a:xfrm>
+          <a:prstGeom prst="bentConnector2">
+            <a:avLst/>
+          </a:prstGeom>
+          <a:ln w="12700">
+            <a:prstDash val="dash"/>
+            <a:tailEnd type="triangle"/>
+          </a:ln>
+        </p:spPr>
+        <p:style>
+          <a:lnRef idx="2">
+            <a:schemeClr val="accent1"/>
+          </a:lnRef>
+          <a:fillRef idx="0">
+            <a:schemeClr val="accent1"/>
+          </a:fillRef>
+          <a:effectRef idx="1">
+            <a:schemeClr val="accent1"/>
+          </a:effectRef>
+          <a:fontRef idx="minor">
+            <a:schemeClr val="tx1"/>
+          </a:fontRef>
+        </p:style>
+      </p:cxnSp>
+      <p:sp>
+        <p:nvSpPr>
+          <p:cNvPr id="102" name="Rectangle 101">
+            <a:extLst>
+              <a:ext uri="{FF2B5EF4-FFF2-40B4-BE49-F238E27FC236}">
+                <a16:creationId xmlns:a16="http://schemas.microsoft.com/office/drawing/2014/main" id="{8DF61415-58AE-15DA-CE4F-484B7B7622FD}"/>
+              </a:ext>
+            </a:extLst>
+          </p:cNvPr>
+          <p:cNvSpPr/>
+          <p:nvPr/>
+        </p:nvSpPr>
+        <p:spPr>
+          <a:xfrm>
+            <a:off x="8574563" y="2019487"/>
+            <a:ext cx="950437" cy="502114"/>
+          </a:xfrm>
+          <a:prstGeom prst="rect">
+            <a:avLst/>
+          </a:prstGeom>
+        </p:spPr>
+        <p:style>
+          <a:lnRef idx="1">
+            <a:schemeClr val="accent6"/>
+          </a:lnRef>
+          <a:fillRef idx="2">
+            <a:schemeClr val="accent6"/>
+          </a:fillRef>
+          <a:effectRef idx="1">
+            <a:schemeClr val="accent6"/>
+          </a:effectRef>
+          <a:fontRef idx="minor">
+            <a:schemeClr val="dk1"/>
+          </a:fontRef>
+        </p:style>
+        <p:txBody>
+          <a:bodyPr rtlCol="0" anchor="ctr"/>
+          <a:lstStyle/>
+          <a:p>
+            <a:pPr algn="ctr"/>
+            <a:r>
+              <a:rPr lang="en-US" sz="1000" dirty="0">
+                <a:solidFill>
+                  <a:schemeClr val="bg1"/>
+                </a:solidFill>
+              </a:rPr>
+              <a:t>admin console</a:t>
+            </a:r>
+          </a:p>
+        </p:txBody>
+      </p:sp>
+      <p:sp>
+        <p:nvSpPr>
+          <p:cNvPr id="109" name="Smiley Face 108">
+            <a:extLst>
+              <a:ext uri="{FF2B5EF4-FFF2-40B4-BE49-F238E27FC236}">
+                <a16:creationId xmlns:a16="http://schemas.microsoft.com/office/drawing/2014/main" id="{92064164-6FD7-571F-A230-1BAF26C54560}"/>
+              </a:ext>
+            </a:extLst>
+          </p:cNvPr>
+          <p:cNvSpPr/>
+          <p:nvPr/>
+        </p:nvSpPr>
+        <p:spPr>
+          <a:xfrm>
+            <a:off x="8841420" y="953431"/>
+            <a:ext cx="426036" cy="405063"/>
+          </a:xfrm>
+          <a:prstGeom prst="smileyFace">
+            <a:avLst/>
+          </a:prstGeom>
+        </p:spPr>
+        <p:style>
+          <a:lnRef idx="2">
+            <a:schemeClr val="accent6"/>
+          </a:lnRef>
+          <a:fillRef idx="1">
+            <a:schemeClr val="lt1"/>
+          </a:fillRef>
+          <a:effectRef idx="0">
+            <a:schemeClr val="accent6"/>
+          </a:effectRef>
+          <a:fontRef idx="minor">
+            <a:schemeClr val="dk1"/>
+          </a:fontRef>
+        </p:style>
+        <p:txBody>
+          <a:bodyPr rtlCol="0" anchor="ctr"/>
+          <a:lstStyle/>
+          <a:p>
+            <a:pPr algn="ctr"/>
+            <a:endParaRPr lang="en-SI"/>
+          </a:p>
+        </p:txBody>
+      </p:sp>
+      <p:cxnSp>
+        <p:nvCxnSpPr>
+          <p:cNvPr id="112" name="Straight Arrow Connector 111">
+            <a:extLst>
+              <a:ext uri="{FF2B5EF4-FFF2-40B4-BE49-F238E27FC236}">
+                <a16:creationId xmlns:a16="http://schemas.microsoft.com/office/drawing/2014/main" id="{2690FF45-2E20-3A89-4DCE-BE8F3826CDFA}"/>
+              </a:ext>
+            </a:extLst>
+          </p:cNvPr>
+          <p:cNvCxnSpPr>
+            <a:cxnSpLocks/>
+            <a:stCxn id="109" idx="4"/>
+            <a:endCxn id="102" idx="0"/>
+          </p:cNvCxnSpPr>
+          <p:nvPr/>
+        </p:nvCxnSpPr>
+        <p:spPr>
+          <a:xfrm flipH="1">
+            <a:off x="9049782" y="1358494"/>
+            <a:ext cx="4656" cy="660993"/>
+          </a:xfrm>
+          <a:prstGeom prst="straightConnector1">
+            <a:avLst/>
+          </a:prstGeom>
+          <a:ln>
+            <a:headEnd type="triangle"/>
+            <a:tailEnd type="triangle"/>
+          </a:ln>
+        </p:spPr>
+        <p:style>
+          <a:lnRef idx="2">
+            <a:schemeClr val="accent1"/>
+          </a:lnRef>
+          <a:fillRef idx="0">
+            <a:schemeClr val="accent1"/>
+          </a:fillRef>
+          <a:effectRef idx="1">
+            <a:schemeClr val="accent1"/>
+          </a:effectRef>
+          <a:fontRef idx="minor">
+            <a:schemeClr val="tx1"/>
+          </a:fontRef>
+        </p:style>
+      </p:cxnSp>
+      <p:sp>
+        <p:nvSpPr>
+          <p:cNvPr id="2" name="TextBox 1">
+            <a:extLst>
+              <a:ext uri="{FF2B5EF4-FFF2-40B4-BE49-F238E27FC236}">
+                <a16:creationId xmlns:a16="http://schemas.microsoft.com/office/drawing/2014/main" id="{4C731DA0-1575-7A42-D9B6-2AE476C96993}"/>
+              </a:ext>
+            </a:extLst>
+          </p:cNvPr>
+          <p:cNvSpPr txBox="1"/>
+          <p:nvPr/>
+        </p:nvSpPr>
+        <p:spPr>
+          <a:xfrm>
+            <a:off x="2888855" y="1694149"/>
+            <a:ext cx="920445" cy="246221"/>
+          </a:xfrm>
+          <a:prstGeom prst="rect">
+            <a:avLst/>
+          </a:prstGeom>
+          <a:noFill/>
+        </p:spPr>
+        <p:txBody>
+          <a:bodyPr wrap="none" rtlCol="0">
+            <a:spAutoFit/>
+          </a:bodyPr>
+          <a:lstStyle/>
+          <a:p>
+            <a:pPr algn="ctr"/>
+            <a:r>
+              <a:rPr lang="en-GB" sz="1000" dirty="0"/>
+              <a:t>playground-a</a:t>
+            </a:r>
+            <a:endParaRPr lang="en-SI" sz="1000" dirty="0"/>
+          </a:p>
+        </p:txBody>
+      </p:sp>
+      <p:sp>
+        <p:nvSpPr>
+          <p:cNvPr id="5" name="TextBox 4">
+            <a:extLst>
+              <a:ext uri="{FF2B5EF4-FFF2-40B4-BE49-F238E27FC236}">
+                <a16:creationId xmlns:a16="http://schemas.microsoft.com/office/drawing/2014/main" id="{FBCAB56F-4271-4236-36D1-361CF326DA46}"/>
+              </a:ext>
+            </a:extLst>
+          </p:cNvPr>
+          <p:cNvSpPr txBox="1"/>
+          <p:nvPr/>
+        </p:nvSpPr>
+        <p:spPr>
+          <a:xfrm>
+            <a:off x="6169256" y="1694149"/>
+            <a:ext cx="923651" cy="246221"/>
+          </a:xfrm>
+          <a:prstGeom prst="rect">
+            <a:avLst/>
+          </a:prstGeom>
+          <a:noFill/>
+        </p:spPr>
+        <p:txBody>
+          <a:bodyPr wrap="none" rtlCol="0">
+            <a:spAutoFit/>
+          </a:bodyPr>
+          <a:lstStyle/>
+          <a:p>
+            <a:pPr algn="ctr"/>
+            <a:r>
+              <a:rPr lang="en-GB" sz="1000" dirty="0"/>
+              <a:t>playground-b</a:t>
+            </a:r>
+            <a:endParaRPr lang="en-SI" sz="1000" dirty="0"/>
+          </a:p>
+        </p:txBody>
+      </p:sp>
+    </p:spTree>
+    <p:extLst>
+      <p:ext uri="{BB962C8B-B14F-4D97-AF65-F5344CB8AC3E}">
+        <p14:creationId xmlns:p14="http://schemas.microsoft.com/office/powerpoint/2010/main" val="2716084902"/>
+      </p:ext>
+    </p:extLst>
+  </p:cSld>
+  <p:clrMapOvr>
+    <a:masterClrMapping/>
+  </p:clrMapOvr>
+</p:sld>
+</file>
+
+<file path=ppt/slides/slide3.xml><?xml version="1.0" encoding="utf-8"?>
+<p:sld xmlns:a="http://schemas.openxmlformats.org/drawingml/2006/main" xmlns:r="http://schemas.openxmlformats.org/officeDocument/2006/relationships" xmlns:p="http://schemas.openxmlformats.org/presentationml/2006/main">
+  <p:cSld>
+    <p:spTree>
+      <p:nvGrpSpPr>
+        <p:cNvPr id="1" name=""/>
+        <p:cNvGrpSpPr/>
+        <p:nvPr/>
+      </p:nvGrpSpPr>
+      <p:grpSpPr>
+        <a:xfrm>
+          <a:off x="0" y="0"/>
+          <a:ext cx="0" cy="0"/>
+          <a:chOff x="0" y="0"/>
+          <a:chExt cx="0" cy="0"/>
+        </a:xfrm>
+      </p:grpSpPr>
+      <p:sp>
+        <p:nvSpPr>
+          <p:cNvPr id="2" name="Rectangle 1">
+            <a:extLst>
+              <a:ext uri="{FF2B5EF4-FFF2-40B4-BE49-F238E27FC236}">
+                <a16:creationId xmlns:a16="http://schemas.microsoft.com/office/drawing/2014/main" id="{B2A8196F-9874-7CCD-DE37-C07D3204D2A6}"/>
+              </a:ext>
+            </a:extLst>
+          </p:cNvPr>
+          <p:cNvSpPr/>
+          <p:nvPr/>
+        </p:nvSpPr>
+        <p:spPr>
+          <a:xfrm>
+            <a:off x="2484715" y="1694150"/>
+            <a:ext cx="1742385" cy="2426620"/>
+          </a:xfrm>
+          <a:prstGeom prst="rect">
+            <a:avLst/>
+          </a:prstGeom>
+          <a:solidFill>
+            <a:srgbClr val="89D8F7">
+              <a:alpha val="50000"/>
+            </a:srgbClr>
+          </a:solidFill>
+          <a:ln>
+            <a:noFill/>
+          </a:ln>
+        </p:spPr>
+        <p:style>
+          <a:lnRef idx="0">
+            <a:scrgbClr r="0" g="0" b="0"/>
+          </a:lnRef>
+          <a:fillRef idx="0">
+            <a:scrgbClr r="0" g="0" b="0"/>
+          </a:fillRef>
+          <a:effectRef idx="0">
+            <a:scrgbClr r="0" g="0" b="0"/>
+          </a:effectRef>
+          <a:fontRef idx="minor">
+            <a:schemeClr val="lt1"/>
+          </a:fontRef>
+        </p:style>
+        <p:txBody>
+          <a:bodyPr rtlCol="0" anchor="ctr"/>
+          <a:lstStyle/>
+          <a:p>
+            <a:pPr algn="ctr"/>
+            <a:endParaRPr lang="en-SI"/>
+          </a:p>
+        </p:txBody>
+      </p:sp>
+      <p:sp>
+        <p:nvSpPr>
+          <p:cNvPr id="3" name="Rectangle 2">
+            <a:extLst>
+              <a:ext uri="{FF2B5EF4-FFF2-40B4-BE49-F238E27FC236}">
+                <a16:creationId xmlns:a16="http://schemas.microsoft.com/office/drawing/2014/main" id="{D3393D6F-926E-1A1E-4E31-A9F9370FABB8}"/>
+              </a:ext>
+            </a:extLst>
+          </p:cNvPr>
+          <p:cNvSpPr/>
+          <p:nvPr/>
+        </p:nvSpPr>
+        <p:spPr>
+          <a:xfrm>
+            <a:off x="2920390" y="2305336"/>
+            <a:ext cx="845604" cy="502114"/>
+          </a:xfrm>
+          <a:prstGeom prst="rect">
+            <a:avLst/>
+          </a:prstGeom>
+        </p:spPr>
+        <p:style>
+          <a:lnRef idx="1">
+            <a:schemeClr val="accent4"/>
+          </a:lnRef>
+          <a:fillRef idx="3">
+            <a:schemeClr val="accent4"/>
+          </a:fillRef>
+          <a:effectRef idx="2">
+            <a:schemeClr val="accent4"/>
+          </a:effectRef>
+          <a:fontRef idx="minor">
+            <a:schemeClr val="lt1"/>
+          </a:fontRef>
+        </p:style>
+        <p:txBody>
+          <a:bodyPr rtlCol="0" anchor="ctr"/>
+          <a:lstStyle/>
+          <a:p>
+            <a:pPr algn="ctr"/>
+            <a:r>
+              <a:rPr lang="en-US" sz="1000" dirty="0"/>
+              <a:t>OC</a:t>
+            </a:r>
+          </a:p>
+        </p:txBody>
+      </p:sp>
+      <p:sp>
+        <p:nvSpPr>
+          <p:cNvPr id="4" name="Rectangle 3">
+            <a:extLst>
+              <a:ext uri="{FF2B5EF4-FFF2-40B4-BE49-F238E27FC236}">
+                <a16:creationId xmlns:a16="http://schemas.microsoft.com/office/drawing/2014/main" id="{6C5E7FCF-30D8-A39C-F64E-7947A9396E46}"/>
+              </a:ext>
+            </a:extLst>
+          </p:cNvPr>
+          <p:cNvSpPr/>
+          <p:nvPr/>
+        </p:nvSpPr>
+        <p:spPr>
+          <a:xfrm>
+            <a:off x="2920390" y="3132609"/>
+            <a:ext cx="845604" cy="502114"/>
+          </a:xfrm>
+          <a:prstGeom prst="rect">
+            <a:avLst/>
+          </a:prstGeom>
+        </p:spPr>
+        <p:style>
+          <a:lnRef idx="1">
+            <a:schemeClr val="accent4"/>
+          </a:lnRef>
+          <a:fillRef idx="3">
+            <a:schemeClr val="accent4"/>
+          </a:fillRef>
+          <a:effectRef idx="2">
+            <a:schemeClr val="accent4"/>
+          </a:effectRef>
+          <a:fontRef idx="minor">
+            <a:schemeClr val="lt1"/>
+          </a:fontRef>
+        </p:style>
+        <p:txBody>
+          <a:bodyPr rtlCol="0" anchor="ctr"/>
+          <a:lstStyle/>
+          <a:p>
+            <a:pPr algn="ctr"/>
+            <a:r>
+              <a:rPr lang="en-US" sz="1000" dirty="0"/>
+              <a:t>FC</a:t>
+            </a:r>
+          </a:p>
+        </p:txBody>
+      </p:sp>
+      <p:sp>
+        <p:nvSpPr>
+          <p:cNvPr id="5" name="Rectangle 4">
+            <a:extLst>
+              <a:ext uri="{FF2B5EF4-FFF2-40B4-BE49-F238E27FC236}">
+                <a16:creationId xmlns:a16="http://schemas.microsoft.com/office/drawing/2014/main" id="{E07DA92F-F656-6006-BCDF-9B073C9F322F}"/>
+              </a:ext>
+            </a:extLst>
+          </p:cNvPr>
+          <p:cNvSpPr/>
+          <p:nvPr/>
+        </p:nvSpPr>
+        <p:spPr>
+          <a:xfrm>
+            <a:off x="5758401" y="1694150"/>
+            <a:ext cx="1742385" cy="2451531"/>
+          </a:xfrm>
+          <a:prstGeom prst="rect">
+            <a:avLst/>
+          </a:prstGeom>
+          <a:solidFill>
+            <a:srgbClr val="89D8F7">
+              <a:alpha val="50000"/>
+            </a:srgbClr>
+          </a:solidFill>
+          <a:ln>
+            <a:noFill/>
+          </a:ln>
+        </p:spPr>
+        <p:style>
+          <a:lnRef idx="0">
+            <a:scrgbClr r="0" g="0" b="0"/>
+          </a:lnRef>
+          <a:fillRef idx="0">
+            <a:scrgbClr r="0" g="0" b="0"/>
+          </a:fillRef>
+          <a:effectRef idx="0">
+            <a:scrgbClr r="0" g="0" b="0"/>
+          </a:effectRef>
+          <a:fontRef idx="minor">
+            <a:schemeClr val="lt1"/>
+          </a:fontRef>
+        </p:style>
+        <p:txBody>
+          <a:bodyPr rtlCol="0" anchor="ctr"/>
+          <a:lstStyle/>
+          <a:p>
+            <a:pPr algn="ctr"/>
+            <a:endParaRPr lang="en-SI"/>
+          </a:p>
+        </p:txBody>
+      </p:sp>
+      <p:sp>
+        <p:nvSpPr>
+          <p:cNvPr id="6" name="Rectangle 5">
+            <a:extLst>
+              <a:ext uri="{FF2B5EF4-FFF2-40B4-BE49-F238E27FC236}">
+                <a16:creationId xmlns:a16="http://schemas.microsoft.com/office/drawing/2014/main" id="{A052CC1D-E404-9915-53D6-601215E7499C}"/>
+              </a:ext>
+            </a:extLst>
+          </p:cNvPr>
+          <p:cNvSpPr/>
+          <p:nvPr/>
+        </p:nvSpPr>
+        <p:spPr>
+          <a:xfrm>
+            <a:off x="6194076" y="2305336"/>
+            <a:ext cx="845604" cy="502114"/>
+          </a:xfrm>
+          <a:prstGeom prst="rect">
+            <a:avLst/>
+          </a:prstGeom>
+        </p:spPr>
+        <p:style>
+          <a:lnRef idx="1">
+            <a:schemeClr val="accent4"/>
+          </a:lnRef>
+          <a:fillRef idx="3">
+            <a:schemeClr val="accent4"/>
+          </a:fillRef>
+          <a:effectRef idx="2">
+            <a:schemeClr val="accent4"/>
+          </a:effectRef>
+          <a:fontRef idx="minor">
+            <a:schemeClr val="lt1"/>
+          </a:fontRef>
+        </p:style>
+        <p:txBody>
+          <a:bodyPr rtlCol="0" anchor="ctr"/>
+          <a:lstStyle/>
+          <a:p>
+            <a:pPr algn="ctr"/>
+            <a:r>
+              <a:rPr lang="en-US" sz="1000" dirty="0"/>
+              <a:t>OC</a:t>
+            </a:r>
+          </a:p>
+        </p:txBody>
+      </p:sp>
+      <p:sp>
+        <p:nvSpPr>
+          <p:cNvPr id="7" name="Rectangle 6">
+            <a:extLst>
+              <a:ext uri="{FF2B5EF4-FFF2-40B4-BE49-F238E27FC236}">
+                <a16:creationId xmlns:a16="http://schemas.microsoft.com/office/drawing/2014/main" id="{82F0C825-EB25-972D-37F4-EC4E929440DC}"/>
+              </a:ext>
+            </a:extLst>
+          </p:cNvPr>
+          <p:cNvSpPr/>
+          <p:nvPr/>
+        </p:nvSpPr>
+        <p:spPr>
+          <a:xfrm>
+            <a:off x="6194076" y="3132609"/>
+            <a:ext cx="845604" cy="502114"/>
+          </a:xfrm>
+          <a:prstGeom prst="rect">
+            <a:avLst/>
+          </a:prstGeom>
+        </p:spPr>
+        <p:style>
+          <a:lnRef idx="1">
+            <a:schemeClr val="accent4"/>
+          </a:lnRef>
+          <a:fillRef idx="3">
+            <a:schemeClr val="accent4"/>
+          </a:fillRef>
+          <a:effectRef idx="2">
+            <a:schemeClr val="accent4"/>
+          </a:effectRef>
+          <a:fontRef idx="minor">
+            <a:schemeClr val="lt1"/>
+          </a:fontRef>
+        </p:style>
+        <p:txBody>
+          <a:bodyPr rtlCol="0" anchor="ctr"/>
+          <a:lstStyle/>
+          <a:p>
+            <a:pPr algn="ctr"/>
+            <a:r>
+              <a:rPr lang="en-US" sz="1000" dirty="0"/>
+              <a:t>FC</a:t>
+            </a:r>
+          </a:p>
+        </p:txBody>
+      </p:sp>
+      <p:sp>
+        <p:nvSpPr>
+          <p:cNvPr id="11" name="Cylinder 10">
+            <a:extLst>
+              <a:ext uri="{FF2B5EF4-FFF2-40B4-BE49-F238E27FC236}">
+                <a16:creationId xmlns:a16="http://schemas.microsoft.com/office/drawing/2014/main" id="{336DBD33-421E-6D21-8E71-7A638796AC4E}"/>
+              </a:ext>
+            </a:extLst>
+          </p:cNvPr>
+          <p:cNvSpPr/>
+          <p:nvPr/>
+        </p:nvSpPr>
+        <p:spPr>
+          <a:xfrm>
+            <a:off x="4627343" y="3173926"/>
+            <a:ext cx="822628" cy="417094"/>
+          </a:xfrm>
+          <a:prstGeom prst="can">
+            <a:avLst/>
+          </a:prstGeom>
+        </p:spPr>
+        <p:style>
+          <a:lnRef idx="1">
+            <a:schemeClr val="accent2"/>
+          </a:lnRef>
+          <a:fillRef idx="2">
+            <a:schemeClr val="accent2"/>
+          </a:fillRef>
+          <a:effectRef idx="1">
+            <a:schemeClr val="accent2"/>
+          </a:effectRef>
+          <a:fontRef idx="minor">
+            <a:schemeClr val="dk1"/>
+          </a:fontRef>
+        </p:style>
+        <p:txBody>
+          <a:bodyPr rtlCol="0" anchor="ctr"/>
+          <a:lstStyle/>
+          <a:p>
+            <a:pPr algn="ctr"/>
+            <a:r>
+              <a:rPr lang="en-GB" sz="1000" dirty="0" err="1">
+                <a:solidFill>
+                  <a:schemeClr val="bg1"/>
+                </a:solidFill>
+              </a:rPr>
+              <a:t>redis</a:t>
+            </a:r>
+            <a:endParaRPr lang="en-SI" sz="1000" dirty="0">
+              <a:solidFill>
+                <a:schemeClr val="bg1"/>
+              </a:solidFill>
+            </a:endParaRPr>
+          </a:p>
+        </p:txBody>
+      </p:sp>
+      <p:cxnSp>
+        <p:nvCxnSpPr>
+          <p:cNvPr id="12" name="Straight Arrow Connector 11">
+            <a:extLst>
+              <a:ext uri="{FF2B5EF4-FFF2-40B4-BE49-F238E27FC236}">
+                <a16:creationId xmlns:a16="http://schemas.microsoft.com/office/drawing/2014/main" id="{BBBAD6D4-0EC6-2418-587F-0B4A1080DC72}"/>
+              </a:ext>
+            </a:extLst>
+          </p:cNvPr>
+          <p:cNvCxnSpPr>
+            <a:cxnSpLocks/>
+            <a:stCxn id="4" idx="3"/>
+            <a:endCxn id="11" idx="2"/>
+          </p:cNvCxnSpPr>
+          <p:nvPr/>
+        </p:nvCxnSpPr>
+        <p:spPr>
+          <a:xfrm flipV="1">
+            <a:off x="3765994" y="3382473"/>
+            <a:ext cx="861349" cy="1193"/>
+          </a:xfrm>
+          <a:prstGeom prst="straightConnector1">
+            <a:avLst/>
+          </a:prstGeom>
+          <a:ln>
+            <a:headEnd type="triangle"/>
+            <a:tailEnd type="triangle"/>
+          </a:ln>
+        </p:spPr>
+        <p:style>
+          <a:lnRef idx="2">
+            <a:schemeClr val="accent1"/>
+          </a:lnRef>
+          <a:fillRef idx="0">
+            <a:schemeClr val="accent1"/>
+          </a:fillRef>
+          <a:effectRef idx="1">
+            <a:schemeClr val="accent1"/>
+          </a:effectRef>
+          <a:fontRef idx="minor">
+            <a:schemeClr val="tx1"/>
+          </a:fontRef>
+        </p:style>
+      </p:cxnSp>
+      <p:cxnSp>
+        <p:nvCxnSpPr>
+          <p:cNvPr id="13" name="Straight Arrow Connector 12">
+            <a:extLst>
+              <a:ext uri="{FF2B5EF4-FFF2-40B4-BE49-F238E27FC236}">
+                <a16:creationId xmlns:a16="http://schemas.microsoft.com/office/drawing/2014/main" id="{3A73AE88-8AD6-A115-85D1-08D59CF65C00}"/>
+              </a:ext>
+            </a:extLst>
+          </p:cNvPr>
+          <p:cNvCxnSpPr>
+            <a:cxnSpLocks/>
+            <a:stCxn id="11" idx="4"/>
+            <a:endCxn id="7" idx="1"/>
+          </p:cNvCxnSpPr>
+          <p:nvPr/>
+        </p:nvCxnSpPr>
+        <p:spPr>
+          <a:xfrm>
+            <a:off x="5449971" y="3382473"/>
+            <a:ext cx="744105" cy="1193"/>
+          </a:xfrm>
+          <a:prstGeom prst="straightConnector1">
+            <a:avLst/>
+          </a:prstGeom>
+          <a:ln>
+            <a:headEnd type="triangle"/>
+            <a:tailEnd type="triangle"/>
+          </a:ln>
+        </p:spPr>
+        <p:style>
+          <a:lnRef idx="2">
+            <a:schemeClr val="accent1"/>
+          </a:lnRef>
+          <a:fillRef idx="0">
+            <a:schemeClr val="accent1"/>
+          </a:fillRef>
+          <a:effectRef idx="1">
+            <a:schemeClr val="accent1"/>
+          </a:effectRef>
+          <a:fontRef idx="minor">
+            <a:schemeClr val="tx1"/>
+          </a:fontRef>
+        </p:style>
+      </p:cxnSp>
+      <p:sp>
+        <p:nvSpPr>
+          <p:cNvPr id="14" name="Smiley Face 13">
+            <a:extLst>
+              <a:ext uri="{FF2B5EF4-FFF2-40B4-BE49-F238E27FC236}">
+                <a16:creationId xmlns:a16="http://schemas.microsoft.com/office/drawing/2014/main" id="{AE55CDB0-771B-9F70-AD9B-7079A143EE93}"/>
+              </a:ext>
+            </a:extLst>
+          </p:cNvPr>
+          <p:cNvSpPr/>
+          <p:nvPr/>
+        </p:nvSpPr>
+        <p:spPr>
+          <a:xfrm>
+            <a:off x="3142889" y="923977"/>
+            <a:ext cx="426036" cy="405063"/>
+          </a:xfrm>
+          <a:prstGeom prst="smileyFace">
+            <a:avLst/>
+          </a:prstGeom>
+        </p:spPr>
+        <p:style>
+          <a:lnRef idx="2">
+            <a:schemeClr val="accent4"/>
+          </a:lnRef>
+          <a:fillRef idx="1">
+            <a:schemeClr val="lt1"/>
+          </a:fillRef>
+          <a:effectRef idx="0">
+            <a:schemeClr val="accent4"/>
+          </a:effectRef>
+          <a:fontRef idx="minor">
+            <a:schemeClr val="dk1"/>
+          </a:fontRef>
+        </p:style>
+        <p:txBody>
+          <a:bodyPr rtlCol="0" anchor="ctr"/>
+          <a:lstStyle/>
+          <a:p>
+            <a:pPr algn="ctr"/>
+            <a:endParaRPr lang="en-SI"/>
+          </a:p>
+        </p:txBody>
+      </p:sp>
+      <p:cxnSp>
+        <p:nvCxnSpPr>
+          <p:cNvPr id="15" name="Straight Arrow Connector 14">
+            <a:extLst>
+              <a:ext uri="{FF2B5EF4-FFF2-40B4-BE49-F238E27FC236}">
+                <a16:creationId xmlns:a16="http://schemas.microsoft.com/office/drawing/2014/main" id="{98912E0D-9A29-5D10-142B-061C348A0AF6}"/>
+              </a:ext>
+            </a:extLst>
+          </p:cNvPr>
+          <p:cNvCxnSpPr>
+            <a:cxnSpLocks/>
+            <a:stCxn id="14" idx="4"/>
+            <a:endCxn id="2" idx="0"/>
+          </p:cNvCxnSpPr>
+          <p:nvPr/>
+        </p:nvCxnSpPr>
+        <p:spPr>
+          <a:xfrm>
+            <a:off x="3355907" y="1329040"/>
+            <a:ext cx="1" cy="365110"/>
+          </a:xfrm>
+          <a:prstGeom prst="straightConnector1">
+            <a:avLst/>
+          </a:prstGeom>
+          <a:ln>
+            <a:headEnd type="triangle"/>
+            <a:tailEnd type="triangle"/>
+          </a:ln>
+        </p:spPr>
+        <p:style>
+          <a:lnRef idx="2">
+            <a:schemeClr val="accent1"/>
+          </a:lnRef>
+          <a:fillRef idx="0">
+            <a:schemeClr val="accent1"/>
+          </a:fillRef>
+          <a:effectRef idx="1">
+            <a:schemeClr val="accent1"/>
+          </a:effectRef>
+          <a:fontRef idx="minor">
+            <a:schemeClr val="tx1"/>
+          </a:fontRef>
+        </p:style>
+      </p:cxnSp>
+      <p:sp>
+        <p:nvSpPr>
+          <p:cNvPr id="16" name="Smiley Face 15">
+            <a:extLst>
+              <a:ext uri="{FF2B5EF4-FFF2-40B4-BE49-F238E27FC236}">
+                <a16:creationId xmlns:a16="http://schemas.microsoft.com/office/drawing/2014/main" id="{30B40805-292A-A402-3AAD-8CDE331A2CC1}"/>
+              </a:ext>
+            </a:extLst>
+          </p:cNvPr>
+          <p:cNvSpPr/>
+          <p:nvPr/>
+        </p:nvSpPr>
+        <p:spPr>
+          <a:xfrm>
+            <a:off x="6416576" y="921017"/>
+            <a:ext cx="426036" cy="405063"/>
+          </a:xfrm>
+          <a:prstGeom prst="smileyFace">
+            <a:avLst/>
+          </a:prstGeom>
+        </p:spPr>
+        <p:style>
+          <a:lnRef idx="2">
+            <a:schemeClr val="accent4"/>
+          </a:lnRef>
+          <a:fillRef idx="1">
+            <a:schemeClr val="lt1"/>
+          </a:fillRef>
+          <a:effectRef idx="0">
+            <a:schemeClr val="accent4"/>
+          </a:effectRef>
+          <a:fontRef idx="minor">
+            <a:schemeClr val="dk1"/>
+          </a:fontRef>
+        </p:style>
+        <p:txBody>
+          <a:bodyPr rtlCol="0" anchor="ctr"/>
+          <a:lstStyle/>
+          <a:p>
+            <a:pPr algn="ctr"/>
+            <a:endParaRPr lang="en-SI"/>
+          </a:p>
+        </p:txBody>
+      </p:sp>
+      <p:cxnSp>
+        <p:nvCxnSpPr>
+          <p:cNvPr id="17" name="Straight Arrow Connector 16">
+            <a:extLst>
+              <a:ext uri="{FF2B5EF4-FFF2-40B4-BE49-F238E27FC236}">
+                <a16:creationId xmlns:a16="http://schemas.microsoft.com/office/drawing/2014/main" id="{FAA271F6-F668-6BB1-05BC-51DB60B2327A}"/>
+              </a:ext>
+            </a:extLst>
+          </p:cNvPr>
+          <p:cNvCxnSpPr>
+            <a:cxnSpLocks/>
+            <a:stCxn id="16" idx="4"/>
+            <a:endCxn id="5" idx="0"/>
+          </p:cNvCxnSpPr>
+          <p:nvPr/>
+        </p:nvCxnSpPr>
+        <p:spPr>
+          <a:xfrm>
+            <a:off x="6629594" y="1326080"/>
+            <a:ext cx="0" cy="368070"/>
+          </a:xfrm>
+          <a:prstGeom prst="straightConnector1">
+            <a:avLst/>
+          </a:prstGeom>
+          <a:ln>
+            <a:headEnd type="triangle"/>
+            <a:tailEnd type="triangle"/>
+          </a:ln>
+        </p:spPr>
+        <p:style>
+          <a:lnRef idx="2">
+            <a:schemeClr val="accent1"/>
+          </a:lnRef>
+          <a:fillRef idx="0">
+            <a:schemeClr val="accent1"/>
+          </a:fillRef>
+          <a:effectRef idx="1">
+            <a:schemeClr val="accent1"/>
+          </a:effectRef>
+          <a:fontRef idx="minor">
+            <a:schemeClr val="tx1"/>
+          </a:fontRef>
+        </p:style>
+      </p:cxnSp>
+      <p:sp>
+        <p:nvSpPr>
+          <p:cNvPr id="18" name="Oval 17">
+            <a:extLst>
+              <a:ext uri="{FF2B5EF4-FFF2-40B4-BE49-F238E27FC236}">
+                <a16:creationId xmlns:a16="http://schemas.microsoft.com/office/drawing/2014/main" id="{093994E2-5262-4D5E-4D9B-467E7432B957}"/>
+              </a:ext>
+            </a:extLst>
+          </p:cNvPr>
+          <p:cNvSpPr/>
+          <p:nvPr/>
+        </p:nvSpPr>
+        <p:spPr>
+          <a:xfrm>
+            <a:off x="4114920" y="1838859"/>
+            <a:ext cx="197025" cy="197025"/>
+          </a:xfrm>
+          <a:prstGeom prst="ellipse">
+            <a:avLst/>
+          </a:prstGeom>
+          <a:ln/>
+        </p:spPr>
+        <p:style>
+          <a:lnRef idx="1">
+            <a:schemeClr val="accent4"/>
+          </a:lnRef>
+          <a:fillRef idx="3">
+            <a:schemeClr val="accent4"/>
+          </a:fillRef>
+          <a:effectRef idx="2">
+            <a:schemeClr val="accent4"/>
+          </a:effectRef>
+          <a:fontRef idx="minor">
+            <a:schemeClr val="lt1"/>
+          </a:fontRef>
+        </p:style>
+        <p:txBody>
+          <a:bodyPr rtlCol="0" anchor="ctr"/>
+          <a:lstStyle/>
+          <a:p>
+            <a:pPr algn="ctr"/>
+            <a:endParaRPr lang="en-SI"/>
+          </a:p>
+        </p:txBody>
+      </p:sp>
+      <p:sp>
+        <p:nvSpPr>
+          <p:cNvPr id="19" name="Oval 18">
+            <a:extLst>
+              <a:ext uri="{FF2B5EF4-FFF2-40B4-BE49-F238E27FC236}">
+                <a16:creationId xmlns:a16="http://schemas.microsoft.com/office/drawing/2014/main" id="{767908DF-558A-22B6-320B-1B0BFFB1185E}"/>
+              </a:ext>
+            </a:extLst>
+          </p:cNvPr>
+          <p:cNvSpPr/>
+          <p:nvPr/>
+        </p:nvSpPr>
+        <p:spPr>
+          <a:xfrm>
+            <a:off x="5680209" y="1838859"/>
+            <a:ext cx="197025" cy="197025"/>
+          </a:xfrm>
+          <a:prstGeom prst="ellipse">
+            <a:avLst/>
+          </a:prstGeom>
+          <a:ln/>
+        </p:spPr>
+        <p:style>
+          <a:lnRef idx="1">
+            <a:schemeClr val="accent4"/>
+          </a:lnRef>
+          <a:fillRef idx="3">
+            <a:schemeClr val="accent4"/>
+          </a:fillRef>
+          <a:effectRef idx="2">
+            <a:schemeClr val="accent4"/>
+          </a:effectRef>
+          <a:fontRef idx="minor">
+            <a:schemeClr val="lt1"/>
+          </a:fontRef>
+        </p:style>
+        <p:txBody>
+          <a:bodyPr rtlCol="0" anchor="ctr"/>
+          <a:lstStyle/>
+          <a:p>
+            <a:pPr algn="ctr"/>
+            <a:endParaRPr lang="en-SI"/>
+          </a:p>
+        </p:txBody>
+      </p:sp>
+      <p:cxnSp>
+        <p:nvCxnSpPr>
+          <p:cNvPr id="20" name="Straight Arrow Connector 19">
+            <a:extLst>
+              <a:ext uri="{FF2B5EF4-FFF2-40B4-BE49-F238E27FC236}">
+                <a16:creationId xmlns:a16="http://schemas.microsoft.com/office/drawing/2014/main" id="{2A46FDA0-8B86-93F5-A907-81219090F28E}"/>
+              </a:ext>
+            </a:extLst>
+          </p:cNvPr>
+          <p:cNvCxnSpPr>
+            <a:cxnSpLocks/>
+            <a:stCxn id="18" idx="6"/>
+            <a:endCxn id="19" idx="2"/>
+          </p:cNvCxnSpPr>
+          <p:nvPr/>
+        </p:nvCxnSpPr>
+        <p:spPr>
+          <a:xfrm>
+            <a:off x="4311945" y="1937372"/>
+            <a:ext cx="1368264" cy="0"/>
+          </a:xfrm>
+          <a:prstGeom prst="straightConnector1">
+            <a:avLst/>
+          </a:prstGeom>
+          <a:ln>
+            <a:headEnd type="triangle"/>
+            <a:tailEnd type="triangle"/>
+          </a:ln>
+        </p:spPr>
+        <p:style>
+          <a:lnRef idx="2">
+            <a:schemeClr val="accent1"/>
+          </a:lnRef>
+          <a:fillRef idx="0">
+            <a:schemeClr val="accent1"/>
+          </a:fillRef>
+          <a:effectRef idx="1">
+            <a:schemeClr val="accent1"/>
+          </a:effectRef>
+          <a:fontRef idx="minor">
+            <a:schemeClr val="tx1"/>
+          </a:fontRef>
+        </p:style>
+      </p:cxnSp>
+      <p:sp>
+        <p:nvSpPr>
+          <p:cNvPr id="21" name="TextBox 20">
+            <a:extLst>
+              <a:ext uri="{FF2B5EF4-FFF2-40B4-BE49-F238E27FC236}">
+                <a16:creationId xmlns:a16="http://schemas.microsoft.com/office/drawing/2014/main" id="{8B30F3AC-6E76-188E-4E30-5A73A101A4A7}"/>
+              </a:ext>
+            </a:extLst>
+          </p:cNvPr>
+          <p:cNvSpPr txBox="1"/>
+          <p:nvPr/>
+        </p:nvSpPr>
+        <p:spPr>
+          <a:xfrm>
+            <a:off x="4698661" y="1698411"/>
+            <a:ext cx="704039" cy="246221"/>
+          </a:xfrm>
+          <a:prstGeom prst="rect">
+            <a:avLst/>
+          </a:prstGeom>
+          <a:noFill/>
+        </p:spPr>
+        <p:txBody>
+          <a:bodyPr wrap="none" rtlCol="0">
+            <a:spAutoFit/>
+          </a:bodyPr>
+          <a:lstStyle/>
+          <a:p>
+            <a:r>
+              <a:rPr lang="en-GB" sz="1000" dirty="0"/>
+              <a:t>HTTP bus</a:t>
+            </a:r>
+            <a:endParaRPr lang="en-SI" sz="1000" dirty="0"/>
+          </a:p>
+        </p:txBody>
+      </p:sp>
+      <p:sp>
+        <p:nvSpPr>
+          <p:cNvPr id="32" name="TextBox 31">
+            <a:extLst>
+              <a:ext uri="{FF2B5EF4-FFF2-40B4-BE49-F238E27FC236}">
+                <a16:creationId xmlns:a16="http://schemas.microsoft.com/office/drawing/2014/main" id="{610C46E6-5E4B-9972-4FE5-5D105459A37D}"/>
+              </a:ext>
+            </a:extLst>
+          </p:cNvPr>
+          <p:cNvSpPr txBox="1"/>
+          <p:nvPr/>
+        </p:nvSpPr>
+        <p:spPr>
+          <a:xfrm>
+            <a:off x="2888855" y="1694149"/>
+            <a:ext cx="920445" cy="246221"/>
+          </a:xfrm>
+          <a:prstGeom prst="rect">
+            <a:avLst/>
+          </a:prstGeom>
+          <a:noFill/>
+        </p:spPr>
+        <p:txBody>
+          <a:bodyPr wrap="none" rtlCol="0">
+            <a:spAutoFit/>
+          </a:bodyPr>
+          <a:lstStyle/>
+          <a:p>
+            <a:pPr algn="ctr"/>
+            <a:r>
+              <a:rPr lang="en-GB" sz="1000" dirty="0"/>
+              <a:t>playground-a</a:t>
+            </a:r>
+            <a:endParaRPr lang="en-SI" sz="1000" dirty="0"/>
+          </a:p>
+        </p:txBody>
+      </p:sp>
+      <p:sp>
+        <p:nvSpPr>
+          <p:cNvPr id="33" name="TextBox 32">
+            <a:extLst>
+              <a:ext uri="{FF2B5EF4-FFF2-40B4-BE49-F238E27FC236}">
+                <a16:creationId xmlns:a16="http://schemas.microsoft.com/office/drawing/2014/main" id="{85E52371-66A0-41D2-585A-AB45CE3C2E9F}"/>
+              </a:ext>
+            </a:extLst>
+          </p:cNvPr>
+          <p:cNvSpPr txBox="1"/>
+          <p:nvPr/>
+        </p:nvSpPr>
+        <p:spPr>
+          <a:xfrm>
+            <a:off x="6169256" y="1694149"/>
+            <a:ext cx="923651" cy="246221"/>
+          </a:xfrm>
+          <a:prstGeom prst="rect">
+            <a:avLst/>
+          </a:prstGeom>
+          <a:noFill/>
+        </p:spPr>
+        <p:txBody>
+          <a:bodyPr wrap="none" rtlCol="0">
+            <a:spAutoFit/>
+          </a:bodyPr>
+          <a:lstStyle/>
+          <a:p>
+            <a:pPr algn="ctr"/>
+            <a:r>
+              <a:rPr lang="en-GB" sz="1000" dirty="0"/>
+              <a:t>playground-b</a:t>
+            </a:r>
+            <a:endParaRPr lang="en-SI" sz="1000" dirty="0"/>
+          </a:p>
+        </p:txBody>
+      </p:sp>
+      <p:sp>
+        <p:nvSpPr>
+          <p:cNvPr id="35" name="Cylinder 34">
+            <a:extLst>
+              <a:ext uri="{FF2B5EF4-FFF2-40B4-BE49-F238E27FC236}">
+                <a16:creationId xmlns:a16="http://schemas.microsoft.com/office/drawing/2014/main" id="{F106490C-D0C0-C059-84DB-FCBB76059E21}"/>
+              </a:ext>
+            </a:extLst>
+          </p:cNvPr>
+          <p:cNvSpPr/>
+          <p:nvPr/>
+        </p:nvSpPr>
+        <p:spPr>
+          <a:xfrm>
+            <a:off x="2672726" y="2646562"/>
+            <a:ext cx="478185" cy="295179"/>
+          </a:xfrm>
+          <a:prstGeom prst="can">
+            <a:avLst/>
+          </a:prstGeom>
+        </p:spPr>
+        <p:style>
+          <a:lnRef idx="1">
+            <a:schemeClr val="accent2"/>
+          </a:lnRef>
+          <a:fillRef idx="2">
+            <a:schemeClr val="accent2"/>
+          </a:fillRef>
+          <a:effectRef idx="1">
+            <a:schemeClr val="accent2"/>
+          </a:effectRef>
+          <a:fontRef idx="minor">
+            <a:schemeClr val="dk1"/>
+          </a:fontRef>
+        </p:style>
+        <p:txBody>
+          <a:bodyPr rtlCol="0" anchor="ctr"/>
+          <a:lstStyle/>
+          <a:p>
+            <a:pPr algn="ctr"/>
+            <a:r>
+              <a:rPr lang="en-GB" sz="1000" dirty="0">
+                <a:solidFill>
+                  <a:schemeClr val="bg1"/>
+                </a:solidFill>
+              </a:rPr>
+              <a:t>mem</a:t>
+            </a:r>
+            <a:endParaRPr lang="en-SI" sz="1000" dirty="0">
+              <a:solidFill>
+                <a:schemeClr val="bg1"/>
+              </a:solidFill>
+            </a:endParaRPr>
+          </a:p>
+        </p:txBody>
+      </p:sp>
+      <p:sp>
+        <p:nvSpPr>
+          <p:cNvPr id="37" name="Cylinder 36">
+            <a:extLst>
+              <a:ext uri="{FF2B5EF4-FFF2-40B4-BE49-F238E27FC236}">
+                <a16:creationId xmlns:a16="http://schemas.microsoft.com/office/drawing/2014/main" id="{FB0E39DF-1661-923E-1E94-7C9175C011C6}"/>
+              </a:ext>
+            </a:extLst>
+          </p:cNvPr>
+          <p:cNvSpPr/>
+          <p:nvPr/>
+        </p:nvSpPr>
+        <p:spPr>
+          <a:xfrm>
+            <a:off x="5960462" y="2646562"/>
+            <a:ext cx="478185" cy="295179"/>
+          </a:xfrm>
+          <a:prstGeom prst="can">
+            <a:avLst/>
+          </a:prstGeom>
+        </p:spPr>
+        <p:style>
+          <a:lnRef idx="1">
+            <a:schemeClr val="accent2"/>
+          </a:lnRef>
+          <a:fillRef idx="2">
+            <a:schemeClr val="accent2"/>
+          </a:fillRef>
+          <a:effectRef idx="1">
+            <a:schemeClr val="accent2"/>
+          </a:effectRef>
+          <a:fontRef idx="minor">
+            <a:schemeClr val="dk1"/>
+          </a:fontRef>
+        </p:style>
+        <p:txBody>
+          <a:bodyPr rtlCol="0" anchor="ctr"/>
+          <a:lstStyle/>
+          <a:p>
+            <a:pPr algn="ctr"/>
+            <a:r>
+              <a:rPr lang="en-GB" sz="1000" dirty="0">
+                <a:solidFill>
+                  <a:schemeClr val="bg1"/>
+                </a:solidFill>
+              </a:rPr>
+              <a:t>mem</a:t>
+            </a:r>
+            <a:endParaRPr lang="en-SI" sz="1000" dirty="0">
+              <a:solidFill>
+                <a:schemeClr val="bg1"/>
+              </a:solidFill>
+            </a:endParaRPr>
+          </a:p>
+        </p:txBody>
+      </p:sp>
+      <p:sp>
+        <p:nvSpPr>
+          <p:cNvPr id="38" name="Oval 37">
+            <a:extLst>
+              <a:ext uri="{FF2B5EF4-FFF2-40B4-BE49-F238E27FC236}">
+                <a16:creationId xmlns:a16="http://schemas.microsoft.com/office/drawing/2014/main" id="{9199DCED-E4BF-B293-333B-7DA3EE6FC729}"/>
+              </a:ext>
+            </a:extLst>
+          </p:cNvPr>
+          <p:cNvSpPr/>
+          <p:nvPr/>
+        </p:nvSpPr>
+        <p:spPr>
+          <a:xfrm>
+            <a:off x="3257394" y="4015530"/>
+            <a:ext cx="197025" cy="197025"/>
+          </a:xfrm>
+          <a:prstGeom prst="ellipse">
+            <a:avLst/>
+          </a:prstGeom>
+          <a:ln/>
+        </p:spPr>
+        <p:style>
+          <a:lnRef idx="1">
+            <a:schemeClr val="accent4"/>
+          </a:lnRef>
+          <a:fillRef idx="3">
+            <a:schemeClr val="accent4"/>
+          </a:fillRef>
+          <a:effectRef idx="2">
+            <a:schemeClr val="accent4"/>
+          </a:effectRef>
+          <a:fontRef idx="minor">
+            <a:schemeClr val="lt1"/>
+          </a:fontRef>
+        </p:style>
+        <p:txBody>
+          <a:bodyPr rtlCol="0" anchor="ctr"/>
+          <a:lstStyle/>
+          <a:p>
+            <a:pPr algn="ctr"/>
+            <a:endParaRPr lang="en-SI"/>
+          </a:p>
+        </p:txBody>
+      </p:sp>
+      <p:sp>
+        <p:nvSpPr>
+          <p:cNvPr id="39" name="Oval 38">
+            <a:extLst>
+              <a:ext uri="{FF2B5EF4-FFF2-40B4-BE49-F238E27FC236}">
+                <a16:creationId xmlns:a16="http://schemas.microsoft.com/office/drawing/2014/main" id="{664095A8-B492-BDC9-D9BC-C39267F30282}"/>
+              </a:ext>
+            </a:extLst>
+          </p:cNvPr>
+          <p:cNvSpPr/>
+          <p:nvPr/>
+        </p:nvSpPr>
+        <p:spPr>
+          <a:xfrm>
+            <a:off x="6522710" y="4047168"/>
+            <a:ext cx="197025" cy="197025"/>
+          </a:xfrm>
+          <a:prstGeom prst="ellipse">
+            <a:avLst/>
+          </a:prstGeom>
+          <a:ln/>
+        </p:spPr>
+        <p:style>
+          <a:lnRef idx="1">
+            <a:schemeClr val="accent4"/>
+          </a:lnRef>
+          <a:fillRef idx="3">
+            <a:schemeClr val="accent4"/>
+          </a:fillRef>
+          <a:effectRef idx="2">
+            <a:schemeClr val="accent4"/>
+          </a:effectRef>
+          <a:fontRef idx="minor">
+            <a:schemeClr val="lt1"/>
+          </a:fontRef>
+        </p:style>
+        <p:txBody>
+          <a:bodyPr rtlCol="0" anchor="ctr"/>
+          <a:lstStyle/>
+          <a:p>
+            <a:pPr algn="ctr"/>
+            <a:endParaRPr lang="en-SI"/>
+          </a:p>
+        </p:txBody>
+      </p:sp>
+      <p:sp>
+        <p:nvSpPr>
+          <p:cNvPr id="40" name="Cylinder 39">
+            <a:extLst>
+              <a:ext uri="{FF2B5EF4-FFF2-40B4-BE49-F238E27FC236}">
+                <a16:creationId xmlns:a16="http://schemas.microsoft.com/office/drawing/2014/main" id="{3A146ABC-9532-2C09-A57A-D085FCD98922}"/>
+              </a:ext>
+            </a:extLst>
+          </p:cNvPr>
+          <p:cNvSpPr/>
+          <p:nvPr/>
+        </p:nvSpPr>
+        <p:spPr>
+          <a:xfrm>
+            <a:off x="8574562" y="3173926"/>
+            <a:ext cx="950438" cy="417094"/>
+          </a:xfrm>
+          <a:prstGeom prst="can">
+            <a:avLst/>
+          </a:prstGeom>
+        </p:spPr>
+        <p:style>
+          <a:lnRef idx="1">
+            <a:schemeClr val="accent6"/>
+          </a:lnRef>
+          <a:fillRef idx="2">
+            <a:schemeClr val="accent6"/>
+          </a:fillRef>
+          <a:effectRef idx="1">
+            <a:schemeClr val="accent6"/>
+          </a:effectRef>
+          <a:fontRef idx="minor">
+            <a:schemeClr val="dk1"/>
+          </a:fontRef>
+        </p:style>
+        <p:txBody>
+          <a:bodyPr rtlCol="0" anchor="ctr"/>
+          <a:lstStyle/>
+          <a:p>
+            <a:pPr algn="ctr"/>
+            <a:r>
+              <a:rPr lang="en-GB" sz="1000" dirty="0" err="1">
+                <a:solidFill>
+                  <a:schemeClr val="bg1"/>
+                </a:solidFill>
+              </a:rPr>
+              <a:t>prometheus</a:t>
+            </a:r>
+            <a:endParaRPr lang="en-SI" sz="1000" dirty="0">
+              <a:solidFill>
+                <a:schemeClr val="bg1"/>
+              </a:solidFill>
+            </a:endParaRPr>
+          </a:p>
+        </p:txBody>
+      </p:sp>
+      <p:cxnSp>
+        <p:nvCxnSpPr>
+          <p:cNvPr id="41" name="Connector: Elbow 40">
+            <a:extLst>
+              <a:ext uri="{FF2B5EF4-FFF2-40B4-BE49-F238E27FC236}">
+                <a16:creationId xmlns:a16="http://schemas.microsoft.com/office/drawing/2014/main" id="{FFA505D6-21F6-44B8-2B4C-4B7C305C93D7}"/>
+              </a:ext>
+            </a:extLst>
+          </p:cNvPr>
+          <p:cNvCxnSpPr>
+            <a:stCxn id="39" idx="4"/>
+            <a:endCxn id="40" idx="3"/>
+          </p:cNvCxnSpPr>
+          <p:nvPr/>
+        </p:nvCxnSpPr>
+        <p:spPr>
+          <a:xfrm rot="5400000" flipH="1" flipV="1">
+            <a:off x="7508915" y="2703328"/>
+            <a:ext cx="653173" cy="2428558"/>
+          </a:xfrm>
+          <a:prstGeom prst="bentConnector3">
+            <a:avLst>
+              <a:gd name="adj1" fmla="val -34998"/>
+            </a:avLst>
+          </a:prstGeom>
+          <a:ln w="12700">
+            <a:prstDash val="dash"/>
+            <a:headEnd type="triangle" w="med" len="med"/>
+            <a:tailEnd type="triangle" w="med" len="med"/>
+          </a:ln>
+        </p:spPr>
+        <p:style>
+          <a:lnRef idx="2">
+            <a:schemeClr val="accent1"/>
+          </a:lnRef>
+          <a:fillRef idx="0">
+            <a:schemeClr val="accent1"/>
+          </a:fillRef>
+          <a:effectRef idx="1">
+            <a:schemeClr val="accent1"/>
+          </a:effectRef>
+          <a:fontRef idx="minor">
+            <a:schemeClr val="tx1"/>
+          </a:fontRef>
+        </p:style>
+      </p:cxnSp>
+      <p:cxnSp>
+        <p:nvCxnSpPr>
+          <p:cNvPr id="42" name="Connector: Elbow 41">
+            <a:extLst>
+              <a:ext uri="{FF2B5EF4-FFF2-40B4-BE49-F238E27FC236}">
+                <a16:creationId xmlns:a16="http://schemas.microsoft.com/office/drawing/2014/main" id="{F6E64AE6-8E28-2132-3F43-3C3218004C73}"/>
+              </a:ext>
+            </a:extLst>
+          </p:cNvPr>
+          <p:cNvCxnSpPr>
+            <a:stCxn id="38" idx="4"/>
+          </p:cNvCxnSpPr>
+          <p:nvPr/>
+        </p:nvCxnSpPr>
+        <p:spPr>
+          <a:xfrm rot="16200000" flipH="1">
+            <a:off x="4856801" y="2711660"/>
+            <a:ext cx="259182" cy="3260971"/>
+          </a:xfrm>
+          <a:prstGeom prst="bentConnector2">
+            <a:avLst/>
+          </a:prstGeom>
+          <a:ln w="12700">
+            <a:prstDash val="dash"/>
+            <a:headEnd type="triangle" w="med" len="med"/>
+            <a:tailEnd type="none" w="med" len="med"/>
+          </a:ln>
+        </p:spPr>
+        <p:style>
+          <a:lnRef idx="2">
+            <a:schemeClr val="accent1"/>
+          </a:lnRef>
+          <a:fillRef idx="0">
+            <a:schemeClr val="accent1"/>
+          </a:fillRef>
+          <a:effectRef idx="1">
+            <a:schemeClr val="accent1"/>
+          </a:effectRef>
+          <a:fontRef idx="minor">
+            <a:schemeClr val="tx1"/>
+          </a:fontRef>
+        </p:style>
+      </p:cxnSp>
+      <p:cxnSp>
+        <p:nvCxnSpPr>
+          <p:cNvPr id="43" name="Straight Arrow Connector 42">
+            <a:extLst>
+              <a:ext uri="{FF2B5EF4-FFF2-40B4-BE49-F238E27FC236}">
+                <a16:creationId xmlns:a16="http://schemas.microsoft.com/office/drawing/2014/main" id="{8EE980C3-CE58-C807-D730-AC093711F07E}"/>
+              </a:ext>
+            </a:extLst>
+          </p:cNvPr>
+          <p:cNvCxnSpPr>
+            <a:cxnSpLocks/>
+            <a:stCxn id="40" idx="1"/>
+            <a:endCxn id="45" idx="2"/>
+          </p:cNvCxnSpPr>
+          <p:nvPr/>
+        </p:nvCxnSpPr>
+        <p:spPr>
+          <a:xfrm flipV="1">
+            <a:off x="9049781" y="2521601"/>
+            <a:ext cx="1" cy="652325"/>
+          </a:xfrm>
+          <a:prstGeom prst="straightConnector1">
+            <a:avLst/>
+          </a:prstGeom>
+          <a:ln w="12700">
+            <a:prstDash val="dash"/>
+            <a:tailEnd type="triangle"/>
+          </a:ln>
+        </p:spPr>
+        <p:style>
+          <a:lnRef idx="2">
+            <a:schemeClr val="accent1"/>
+          </a:lnRef>
+          <a:fillRef idx="0">
+            <a:schemeClr val="accent1"/>
+          </a:fillRef>
+          <a:effectRef idx="1">
+            <a:schemeClr val="accent1"/>
+          </a:effectRef>
+          <a:fontRef idx="minor">
+            <a:schemeClr val="tx1"/>
+          </a:fontRef>
+        </p:style>
+      </p:cxnSp>
+      <p:cxnSp>
+        <p:nvCxnSpPr>
+          <p:cNvPr id="44" name="Connector: Elbow 43">
+            <a:extLst>
+              <a:ext uri="{FF2B5EF4-FFF2-40B4-BE49-F238E27FC236}">
+                <a16:creationId xmlns:a16="http://schemas.microsoft.com/office/drawing/2014/main" id="{C42B1581-A7EF-6E46-CCBD-3B63E009E47C}"/>
+              </a:ext>
+            </a:extLst>
+          </p:cNvPr>
+          <p:cNvCxnSpPr>
+            <a:cxnSpLocks/>
+            <a:endCxn id="45" idx="1"/>
+          </p:cNvCxnSpPr>
+          <p:nvPr/>
+        </p:nvCxnSpPr>
+        <p:spPr>
+          <a:xfrm rot="5400000" flipH="1" flipV="1">
+            <a:off x="7158978" y="3052143"/>
+            <a:ext cx="2197184" cy="633986"/>
+          </a:xfrm>
+          <a:prstGeom prst="bentConnector2">
+            <a:avLst/>
+          </a:prstGeom>
+          <a:ln w="12700">
+            <a:prstDash val="dash"/>
+            <a:tailEnd type="triangle"/>
+          </a:ln>
+        </p:spPr>
+        <p:style>
+          <a:lnRef idx="2">
+            <a:schemeClr val="accent1"/>
+          </a:lnRef>
+          <a:fillRef idx="0">
+            <a:schemeClr val="accent1"/>
+          </a:fillRef>
+          <a:effectRef idx="1">
+            <a:schemeClr val="accent1"/>
+          </a:effectRef>
+          <a:fontRef idx="minor">
+            <a:schemeClr val="tx1"/>
+          </a:fontRef>
+        </p:style>
+      </p:cxnSp>
+      <p:sp>
+        <p:nvSpPr>
+          <p:cNvPr id="45" name="Rectangle 44">
+            <a:extLst>
+              <a:ext uri="{FF2B5EF4-FFF2-40B4-BE49-F238E27FC236}">
+                <a16:creationId xmlns:a16="http://schemas.microsoft.com/office/drawing/2014/main" id="{ADEE6BC8-7B82-3A00-A614-FB90DE2B9519}"/>
+              </a:ext>
+            </a:extLst>
+          </p:cNvPr>
+          <p:cNvSpPr/>
+          <p:nvPr/>
+        </p:nvSpPr>
+        <p:spPr>
+          <a:xfrm>
+            <a:off x="8574563" y="2019487"/>
+            <a:ext cx="950437" cy="502114"/>
+          </a:xfrm>
+          <a:prstGeom prst="rect">
+            <a:avLst/>
+          </a:prstGeom>
+        </p:spPr>
+        <p:style>
+          <a:lnRef idx="1">
+            <a:schemeClr val="accent6"/>
+          </a:lnRef>
+          <a:fillRef idx="2">
+            <a:schemeClr val="accent6"/>
+          </a:fillRef>
+          <a:effectRef idx="1">
+            <a:schemeClr val="accent6"/>
+          </a:effectRef>
+          <a:fontRef idx="minor">
+            <a:schemeClr val="dk1"/>
+          </a:fontRef>
+        </p:style>
+        <p:txBody>
+          <a:bodyPr rtlCol="0" anchor="ctr"/>
+          <a:lstStyle/>
+          <a:p>
+            <a:pPr algn="ctr"/>
+            <a:r>
+              <a:rPr lang="en-US" sz="1000" dirty="0">
+                <a:solidFill>
+                  <a:schemeClr val="bg1"/>
+                </a:solidFill>
+              </a:rPr>
+              <a:t>admin console</a:t>
+            </a:r>
+          </a:p>
+        </p:txBody>
+      </p:sp>
+      <p:sp>
+        <p:nvSpPr>
+          <p:cNvPr id="46" name="Smiley Face 45">
+            <a:extLst>
+              <a:ext uri="{FF2B5EF4-FFF2-40B4-BE49-F238E27FC236}">
+                <a16:creationId xmlns:a16="http://schemas.microsoft.com/office/drawing/2014/main" id="{E4638A21-FB81-A425-5AEC-0E38EF40E349}"/>
+              </a:ext>
+            </a:extLst>
+          </p:cNvPr>
+          <p:cNvSpPr/>
+          <p:nvPr/>
+        </p:nvSpPr>
+        <p:spPr>
+          <a:xfrm>
+            <a:off x="8841420" y="953431"/>
+            <a:ext cx="426036" cy="405063"/>
+          </a:xfrm>
+          <a:prstGeom prst="smileyFace">
+            <a:avLst/>
+          </a:prstGeom>
+        </p:spPr>
+        <p:style>
+          <a:lnRef idx="2">
+            <a:schemeClr val="accent6"/>
+          </a:lnRef>
+          <a:fillRef idx="1">
+            <a:schemeClr val="lt1"/>
+          </a:fillRef>
+          <a:effectRef idx="0">
+            <a:schemeClr val="accent6"/>
+          </a:effectRef>
+          <a:fontRef idx="minor">
+            <a:schemeClr val="dk1"/>
+          </a:fontRef>
+        </p:style>
+        <p:txBody>
+          <a:bodyPr rtlCol="0" anchor="ctr"/>
+          <a:lstStyle/>
+          <a:p>
+            <a:pPr algn="ctr"/>
+            <a:endParaRPr lang="en-SI"/>
+          </a:p>
+        </p:txBody>
+      </p:sp>
+      <p:cxnSp>
+        <p:nvCxnSpPr>
+          <p:cNvPr id="47" name="Straight Arrow Connector 46">
+            <a:extLst>
+              <a:ext uri="{FF2B5EF4-FFF2-40B4-BE49-F238E27FC236}">
+                <a16:creationId xmlns:a16="http://schemas.microsoft.com/office/drawing/2014/main" id="{5A3F0582-364D-1065-AE3C-25AD620491E1}"/>
+              </a:ext>
+            </a:extLst>
+          </p:cNvPr>
+          <p:cNvCxnSpPr>
+            <a:cxnSpLocks/>
+            <a:stCxn id="46" idx="4"/>
+            <a:endCxn id="45" idx="0"/>
+          </p:cNvCxnSpPr>
+          <p:nvPr/>
+        </p:nvCxnSpPr>
+        <p:spPr>
+          <a:xfrm flipH="1">
+            <a:off x="9049782" y="1358494"/>
+            <a:ext cx="4656" cy="660993"/>
+          </a:xfrm>
+          <a:prstGeom prst="straightConnector1">
+            <a:avLst/>
+          </a:prstGeom>
+          <a:ln>
+            <a:headEnd type="triangle"/>
+            <a:tailEnd type="triangle"/>
+          </a:ln>
+        </p:spPr>
+        <p:style>
+          <a:lnRef idx="2">
+            <a:schemeClr val="accent1"/>
+          </a:lnRef>
+          <a:fillRef idx="0">
+            <a:schemeClr val="accent1"/>
+          </a:fillRef>
+          <a:effectRef idx="1">
+            <a:schemeClr val="accent1"/>
+          </a:effectRef>
+          <a:fontRef idx="minor">
+            <a:schemeClr val="tx1"/>
+          </a:fontRef>
+        </p:style>
+      </p:cxnSp>
+    </p:spTree>
+    <p:extLst>
+      <p:ext uri="{BB962C8B-B14F-4D97-AF65-F5344CB8AC3E}">
+        <p14:creationId xmlns:p14="http://schemas.microsoft.com/office/powerpoint/2010/main" val="84827180"/>
+      </p:ext>
+    </p:extLst>
+  </p:cSld>
+  <p:clrMapOvr>
+    <a:masterClrMapping/>
+  </p:clrMapOvr>
+</p:sld>
+</file>
+
+<file path=ppt/slides/slide4.xml><?xml version="1.0" encoding="utf-8"?>
+<p:sld xmlns:a="http://schemas.openxmlformats.org/drawingml/2006/main" xmlns:r="http://schemas.openxmlformats.org/officeDocument/2006/relationships" xmlns:p="http://schemas.openxmlformats.org/presentationml/2006/main">
+  <p:cSld>
+    <p:spTree>
+      <p:nvGrpSpPr>
+        <p:cNvPr id="1" name="">
+          <a:extLst>
+            <a:ext uri="{FF2B5EF4-FFF2-40B4-BE49-F238E27FC236}">
+              <a16:creationId xmlns:a16="http://schemas.microsoft.com/office/drawing/2014/main" id="{60427B65-05D4-A4CC-EB53-40641E2F6872}"/>
+            </a:ext>
+          </a:extLst>
+        </p:cNvPr>
+        <p:cNvGrpSpPr/>
+        <p:nvPr/>
+      </p:nvGrpSpPr>
+      <p:grpSpPr>
+        <a:xfrm>
+          <a:off x="0" y="0"/>
+          <a:ext cx="0" cy="0"/>
+          <a:chOff x="0" y="0"/>
+          <a:chExt cx="0" cy="0"/>
+        </a:xfrm>
+      </p:grpSpPr>
+      <p:sp>
+        <p:nvSpPr>
+          <p:cNvPr id="2" name="Rectangle 1">
+            <a:extLst>
+              <a:ext uri="{FF2B5EF4-FFF2-40B4-BE49-F238E27FC236}">
+                <a16:creationId xmlns:a16="http://schemas.microsoft.com/office/drawing/2014/main" id="{E28CB38D-87A2-7678-547D-C4021305D396}"/>
+              </a:ext>
+            </a:extLst>
+          </p:cNvPr>
+          <p:cNvSpPr/>
+          <p:nvPr/>
+        </p:nvSpPr>
+        <p:spPr>
+          <a:xfrm>
+            <a:off x="2484715" y="1694150"/>
+            <a:ext cx="1742385" cy="2426620"/>
+          </a:xfrm>
+          <a:prstGeom prst="rect">
+            <a:avLst/>
+          </a:prstGeom>
+          <a:solidFill>
+            <a:srgbClr val="89D8F7">
+              <a:alpha val="50000"/>
+            </a:srgbClr>
+          </a:solidFill>
+          <a:ln>
+            <a:noFill/>
+          </a:ln>
+        </p:spPr>
+        <p:style>
+          <a:lnRef idx="0">
+            <a:scrgbClr r="0" g="0" b="0"/>
+          </a:lnRef>
+          <a:fillRef idx="0">
+            <a:scrgbClr r="0" g="0" b="0"/>
+          </a:fillRef>
+          <a:effectRef idx="0">
+            <a:scrgbClr r="0" g="0" b="0"/>
+          </a:effectRef>
+          <a:fontRef idx="minor">
+            <a:schemeClr val="lt1"/>
+          </a:fontRef>
+        </p:style>
+        <p:txBody>
+          <a:bodyPr rtlCol="0" anchor="ctr"/>
+          <a:lstStyle/>
+          <a:p>
+            <a:pPr algn="ctr"/>
+            <a:endParaRPr lang="en-SI"/>
+          </a:p>
+        </p:txBody>
+      </p:sp>
+      <p:sp>
+        <p:nvSpPr>
+          <p:cNvPr id="3" name="Rectangle 2">
+            <a:extLst>
+              <a:ext uri="{FF2B5EF4-FFF2-40B4-BE49-F238E27FC236}">
+                <a16:creationId xmlns:a16="http://schemas.microsoft.com/office/drawing/2014/main" id="{10FABDB7-E075-760A-87B0-00D160686A52}"/>
+              </a:ext>
+            </a:extLst>
+          </p:cNvPr>
+          <p:cNvSpPr/>
+          <p:nvPr/>
+        </p:nvSpPr>
+        <p:spPr>
+          <a:xfrm>
+            <a:off x="2920390" y="2305336"/>
+            <a:ext cx="845604" cy="502114"/>
+          </a:xfrm>
+          <a:prstGeom prst="rect">
+            <a:avLst/>
+          </a:prstGeom>
+        </p:spPr>
+        <p:style>
+          <a:lnRef idx="1">
+            <a:schemeClr val="accent4"/>
+          </a:lnRef>
+          <a:fillRef idx="3">
+            <a:schemeClr val="accent4"/>
+          </a:fillRef>
+          <a:effectRef idx="2">
+            <a:schemeClr val="accent4"/>
+          </a:effectRef>
+          <a:fontRef idx="minor">
+            <a:schemeClr val="lt1"/>
+          </a:fontRef>
+        </p:style>
+        <p:txBody>
+          <a:bodyPr rtlCol="0" anchor="ctr"/>
+          <a:lstStyle/>
+          <a:p>
+            <a:pPr algn="ctr"/>
+            <a:r>
+              <a:rPr lang="en-US" sz="1000" dirty="0"/>
+              <a:t>OC</a:t>
+            </a:r>
+          </a:p>
+        </p:txBody>
+      </p:sp>
+      <p:sp>
+        <p:nvSpPr>
+          <p:cNvPr id="4" name="Rectangle 3">
+            <a:extLst>
+              <a:ext uri="{FF2B5EF4-FFF2-40B4-BE49-F238E27FC236}">
+                <a16:creationId xmlns:a16="http://schemas.microsoft.com/office/drawing/2014/main" id="{3C0F1143-C545-5E07-DC33-07D25668AAC6}"/>
+              </a:ext>
+            </a:extLst>
+          </p:cNvPr>
+          <p:cNvSpPr/>
+          <p:nvPr/>
+        </p:nvSpPr>
+        <p:spPr>
+          <a:xfrm>
+            <a:off x="2920390" y="3132609"/>
+            <a:ext cx="845604" cy="502114"/>
+          </a:xfrm>
+          <a:prstGeom prst="rect">
+            <a:avLst/>
+          </a:prstGeom>
+        </p:spPr>
+        <p:style>
+          <a:lnRef idx="1">
+            <a:schemeClr val="accent4"/>
+          </a:lnRef>
+          <a:fillRef idx="3">
+            <a:schemeClr val="accent4"/>
+          </a:fillRef>
+          <a:effectRef idx="2">
+            <a:schemeClr val="accent4"/>
+          </a:effectRef>
+          <a:fontRef idx="minor">
+            <a:schemeClr val="lt1"/>
+          </a:fontRef>
+        </p:style>
+        <p:txBody>
+          <a:bodyPr rtlCol="0" anchor="ctr"/>
+          <a:lstStyle/>
+          <a:p>
+            <a:pPr algn="ctr"/>
+            <a:r>
+              <a:rPr lang="en-US" sz="1000" dirty="0"/>
+              <a:t>FC</a:t>
+            </a:r>
+          </a:p>
+        </p:txBody>
+      </p:sp>
+      <p:sp>
+        <p:nvSpPr>
+          <p:cNvPr id="5" name="Rectangle 4">
+            <a:extLst>
+              <a:ext uri="{FF2B5EF4-FFF2-40B4-BE49-F238E27FC236}">
+                <a16:creationId xmlns:a16="http://schemas.microsoft.com/office/drawing/2014/main" id="{5DEC8D5B-E229-6DA6-14EA-EC38F065E512}"/>
+              </a:ext>
+            </a:extLst>
+          </p:cNvPr>
+          <p:cNvSpPr/>
+          <p:nvPr/>
+        </p:nvSpPr>
+        <p:spPr>
+          <a:xfrm>
+            <a:off x="5758401" y="1694150"/>
+            <a:ext cx="1742385" cy="2451531"/>
+          </a:xfrm>
+          <a:prstGeom prst="rect">
+            <a:avLst/>
+          </a:prstGeom>
+          <a:solidFill>
+            <a:srgbClr val="89D8F7">
+              <a:alpha val="50000"/>
+            </a:srgbClr>
+          </a:solidFill>
+          <a:ln>
+            <a:noFill/>
+          </a:ln>
+        </p:spPr>
+        <p:style>
+          <a:lnRef idx="0">
+            <a:scrgbClr r="0" g="0" b="0"/>
+          </a:lnRef>
+          <a:fillRef idx="0">
+            <a:scrgbClr r="0" g="0" b="0"/>
+          </a:fillRef>
+          <a:effectRef idx="0">
+            <a:scrgbClr r="0" g="0" b="0"/>
+          </a:effectRef>
+          <a:fontRef idx="minor">
+            <a:schemeClr val="lt1"/>
+          </a:fontRef>
+        </p:style>
+        <p:txBody>
+          <a:bodyPr rtlCol="0" anchor="ctr"/>
+          <a:lstStyle/>
+          <a:p>
+            <a:pPr algn="ctr"/>
+            <a:endParaRPr lang="en-SI"/>
+          </a:p>
+        </p:txBody>
+      </p:sp>
+      <p:sp>
+        <p:nvSpPr>
+          <p:cNvPr id="6" name="Rectangle 5">
+            <a:extLst>
+              <a:ext uri="{FF2B5EF4-FFF2-40B4-BE49-F238E27FC236}">
+                <a16:creationId xmlns:a16="http://schemas.microsoft.com/office/drawing/2014/main" id="{A89E837A-40F3-3FDD-13E2-6410D2CEED18}"/>
+              </a:ext>
+            </a:extLst>
+          </p:cNvPr>
+          <p:cNvSpPr/>
+          <p:nvPr/>
+        </p:nvSpPr>
+        <p:spPr>
+          <a:xfrm>
+            <a:off x="6194076" y="2305336"/>
+            <a:ext cx="845604" cy="502114"/>
+          </a:xfrm>
+          <a:prstGeom prst="rect">
+            <a:avLst/>
+          </a:prstGeom>
+        </p:spPr>
+        <p:style>
+          <a:lnRef idx="1">
+            <a:schemeClr val="accent4"/>
+          </a:lnRef>
+          <a:fillRef idx="3">
+            <a:schemeClr val="accent4"/>
+          </a:fillRef>
+          <a:effectRef idx="2">
+            <a:schemeClr val="accent4"/>
+          </a:effectRef>
+          <a:fontRef idx="minor">
+            <a:schemeClr val="lt1"/>
+          </a:fontRef>
+        </p:style>
+        <p:txBody>
+          <a:bodyPr rtlCol="0" anchor="ctr"/>
+          <a:lstStyle/>
+          <a:p>
+            <a:pPr algn="ctr"/>
+            <a:r>
+              <a:rPr lang="en-US" sz="1000" dirty="0"/>
+              <a:t>OC</a:t>
+            </a:r>
+          </a:p>
+        </p:txBody>
+      </p:sp>
+      <p:sp>
+        <p:nvSpPr>
+          <p:cNvPr id="7" name="Rectangle 6">
+            <a:extLst>
+              <a:ext uri="{FF2B5EF4-FFF2-40B4-BE49-F238E27FC236}">
+                <a16:creationId xmlns:a16="http://schemas.microsoft.com/office/drawing/2014/main" id="{2BABE654-C9BF-0ABE-2E23-DE1D9BFB825B}"/>
+              </a:ext>
+            </a:extLst>
+          </p:cNvPr>
+          <p:cNvSpPr/>
+          <p:nvPr/>
+        </p:nvSpPr>
+        <p:spPr>
+          <a:xfrm>
+            <a:off x="6194076" y="3132609"/>
+            <a:ext cx="845604" cy="502114"/>
+          </a:xfrm>
+          <a:prstGeom prst="rect">
+            <a:avLst/>
+          </a:prstGeom>
+        </p:spPr>
+        <p:style>
+          <a:lnRef idx="1">
+            <a:schemeClr val="accent4"/>
+          </a:lnRef>
+          <a:fillRef idx="3">
+            <a:schemeClr val="accent4"/>
+          </a:fillRef>
+          <a:effectRef idx="2">
+            <a:schemeClr val="accent4"/>
+          </a:effectRef>
+          <a:fontRef idx="minor">
+            <a:schemeClr val="lt1"/>
+          </a:fontRef>
+        </p:style>
+        <p:txBody>
+          <a:bodyPr rtlCol="0" anchor="ctr"/>
+          <a:lstStyle/>
+          <a:p>
+            <a:pPr algn="ctr"/>
+            <a:r>
+              <a:rPr lang="en-US" sz="1000" dirty="0"/>
+              <a:t>FC</a:t>
+            </a:r>
+          </a:p>
+        </p:txBody>
+      </p:sp>
+      <p:sp>
+        <p:nvSpPr>
+          <p:cNvPr id="11" name="Cylinder 10">
+            <a:extLst>
+              <a:ext uri="{FF2B5EF4-FFF2-40B4-BE49-F238E27FC236}">
+                <a16:creationId xmlns:a16="http://schemas.microsoft.com/office/drawing/2014/main" id="{327DD955-7F89-A6D0-22C9-2BEAA484C4A6}"/>
+              </a:ext>
+            </a:extLst>
+          </p:cNvPr>
+          <p:cNvSpPr/>
+          <p:nvPr/>
+        </p:nvSpPr>
+        <p:spPr>
+          <a:xfrm>
+            <a:off x="4627343" y="3173926"/>
+            <a:ext cx="822628" cy="417094"/>
+          </a:xfrm>
+          <a:prstGeom prst="can">
+            <a:avLst/>
+          </a:prstGeom>
+        </p:spPr>
+        <p:style>
+          <a:lnRef idx="1">
+            <a:schemeClr val="accent2"/>
+          </a:lnRef>
+          <a:fillRef idx="2">
+            <a:schemeClr val="accent2"/>
+          </a:fillRef>
+          <a:effectRef idx="1">
+            <a:schemeClr val="accent2"/>
+          </a:effectRef>
+          <a:fontRef idx="minor">
+            <a:schemeClr val="dk1"/>
+          </a:fontRef>
+        </p:style>
+        <p:txBody>
+          <a:bodyPr rtlCol="0" anchor="ctr"/>
+          <a:lstStyle/>
+          <a:p>
+            <a:pPr algn="ctr"/>
+            <a:r>
+              <a:rPr lang="en-GB" sz="1000" dirty="0" err="1">
+                <a:solidFill>
+                  <a:schemeClr val="bg1"/>
+                </a:solidFill>
+              </a:rPr>
+              <a:t>redis</a:t>
+            </a:r>
+            <a:endParaRPr lang="en-SI" sz="1000" dirty="0">
+              <a:solidFill>
+                <a:schemeClr val="bg1"/>
+              </a:solidFill>
+            </a:endParaRPr>
+          </a:p>
+        </p:txBody>
+      </p:sp>
+      <p:cxnSp>
+        <p:nvCxnSpPr>
+          <p:cNvPr id="12" name="Straight Arrow Connector 11">
+            <a:extLst>
+              <a:ext uri="{FF2B5EF4-FFF2-40B4-BE49-F238E27FC236}">
+                <a16:creationId xmlns:a16="http://schemas.microsoft.com/office/drawing/2014/main" id="{C178E43E-C0C2-DD90-C287-AFBDDFC9AE53}"/>
+              </a:ext>
+            </a:extLst>
+          </p:cNvPr>
+          <p:cNvCxnSpPr>
+            <a:cxnSpLocks/>
+            <a:stCxn id="4" idx="3"/>
+            <a:endCxn id="11" idx="2"/>
+          </p:cNvCxnSpPr>
+          <p:nvPr/>
+        </p:nvCxnSpPr>
+        <p:spPr>
+          <a:xfrm flipV="1">
+            <a:off x="3765994" y="3382473"/>
+            <a:ext cx="861349" cy="1193"/>
+          </a:xfrm>
+          <a:prstGeom prst="straightConnector1">
+            <a:avLst/>
+          </a:prstGeom>
+          <a:ln>
+            <a:headEnd type="triangle"/>
+            <a:tailEnd type="triangle"/>
+          </a:ln>
+        </p:spPr>
+        <p:style>
+          <a:lnRef idx="2">
+            <a:schemeClr val="accent1"/>
+          </a:lnRef>
+          <a:fillRef idx="0">
+            <a:schemeClr val="accent1"/>
+          </a:fillRef>
+          <a:effectRef idx="1">
+            <a:schemeClr val="accent1"/>
+          </a:effectRef>
+          <a:fontRef idx="minor">
+            <a:schemeClr val="tx1"/>
+          </a:fontRef>
+        </p:style>
+      </p:cxnSp>
+      <p:cxnSp>
+        <p:nvCxnSpPr>
+          <p:cNvPr id="13" name="Straight Arrow Connector 12">
+            <a:extLst>
+              <a:ext uri="{FF2B5EF4-FFF2-40B4-BE49-F238E27FC236}">
+                <a16:creationId xmlns:a16="http://schemas.microsoft.com/office/drawing/2014/main" id="{1658ADD8-6253-ED28-1679-DF4241AEAB85}"/>
+              </a:ext>
+            </a:extLst>
+          </p:cNvPr>
+          <p:cNvCxnSpPr>
+            <a:cxnSpLocks/>
+            <a:stCxn id="11" idx="4"/>
+            <a:endCxn id="7" idx="1"/>
+          </p:cNvCxnSpPr>
+          <p:nvPr/>
+        </p:nvCxnSpPr>
+        <p:spPr>
+          <a:xfrm>
+            <a:off x="5449971" y="3382473"/>
+            <a:ext cx="744105" cy="1193"/>
+          </a:xfrm>
+          <a:prstGeom prst="straightConnector1">
+            <a:avLst/>
+          </a:prstGeom>
+          <a:ln>
+            <a:headEnd type="triangle"/>
+            <a:tailEnd type="triangle"/>
+          </a:ln>
+        </p:spPr>
+        <p:style>
+          <a:lnRef idx="2">
+            <a:schemeClr val="accent1"/>
+          </a:lnRef>
+          <a:fillRef idx="0">
+            <a:schemeClr val="accent1"/>
+          </a:fillRef>
+          <a:effectRef idx="1">
+            <a:schemeClr val="accent1"/>
+          </a:effectRef>
+          <a:fontRef idx="minor">
+            <a:schemeClr val="tx1"/>
+          </a:fontRef>
+        </p:style>
+      </p:cxnSp>
+      <p:sp>
+        <p:nvSpPr>
+          <p:cNvPr id="14" name="Smiley Face 13">
+            <a:extLst>
+              <a:ext uri="{FF2B5EF4-FFF2-40B4-BE49-F238E27FC236}">
+                <a16:creationId xmlns:a16="http://schemas.microsoft.com/office/drawing/2014/main" id="{AA38DEBD-D830-1667-9543-EC50588E1554}"/>
+              </a:ext>
+            </a:extLst>
+          </p:cNvPr>
+          <p:cNvSpPr/>
+          <p:nvPr/>
+        </p:nvSpPr>
+        <p:spPr>
+          <a:xfrm>
+            <a:off x="3142889" y="923977"/>
+            <a:ext cx="426036" cy="405063"/>
+          </a:xfrm>
+          <a:prstGeom prst="smileyFace">
+            <a:avLst/>
+          </a:prstGeom>
+        </p:spPr>
+        <p:style>
+          <a:lnRef idx="2">
+            <a:schemeClr val="accent4"/>
+          </a:lnRef>
+          <a:fillRef idx="1">
+            <a:schemeClr val="lt1"/>
+          </a:fillRef>
+          <a:effectRef idx="0">
+            <a:schemeClr val="accent4"/>
+          </a:effectRef>
+          <a:fontRef idx="minor">
+            <a:schemeClr val="dk1"/>
+          </a:fontRef>
+        </p:style>
+        <p:txBody>
+          <a:bodyPr rtlCol="0" anchor="ctr"/>
+          <a:lstStyle/>
+          <a:p>
+            <a:pPr algn="ctr"/>
+            <a:endParaRPr lang="en-SI"/>
+          </a:p>
+        </p:txBody>
+      </p:sp>
+      <p:cxnSp>
+        <p:nvCxnSpPr>
+          <p:cNvPr id="15" name="Straight Arrow Connector 14">
+            <a:extLst>
+              <a:ext uri="{FF2B5EF4-FFF2-40B4-BE49-F238E27FC236}">
+                <a16:creationId xmlns:a16="http://schemas.microsoft.com/office/drawing/2014/main" id="{53D94A91-5431-F84B-FC3F-D27158646CD7}"/>
+              </a:ext>
+            </a:extLst>
+          </p:cNvPr>
+          <p:cNvCxnSpPr>
+            <a:cxnSpLocks/>
+            <a:stCxn id="14" idx="4"/>
+            <a:endCxn id="2" idx="0"/>
+          </p:cNvCxnSpPr>
+          <p:nvPr/>
+        </p:nvCxnSpPr>
+        <p:spPr>
+          <a:xfrm>
+            <a:off x="3355907" y="1329040"/>
+            <a:ext cx="1" cy="365110"/>
+          </a:xfrm>
+          <a:prstGeom prst="straightConnector1">
+            <a:avLst/>
+          </a:prstGeom>
+          <a:ln>
+            <a:headEnd type="triangle"/>
+            <a:tailEnd type="triangle"/>
+          </a:ln>
+        </p:spPr>
+        <p:style>
+          <a:lnRef idx="2">
+            <a:schemeClr val="accent1"/>
+          </a:lnRef>
+          <a:fillRef idx="0">
+            <a:schemeClr val="accent1"/>
+          </a:fillRef>
+          <a:effectRef idx="1">
+            <a:schemeClr val="accent1"/>
+          </a:effectRef>
+          <a:fontRef idx="minor">
+            <a:schemeClr val="tx1"/>
+          </a:fontRef>
+        </p:style>
+      </p:cxnSp>
+      <p:sp>
+        <p:nvSpPr>
+          <p:cNvPr id="16" name="Smiley Face 15">
+            <a:extLst>
+              <a:ext uri="{FF2B5EF4-FFF2-40B4-BE49-F238E27FC236}">
+                <a16:creationId xmlns:a16="http://schemas.microsoft.com/office/drawing/2014/main" id="{70EB40B0-0240-D585-6D65-DD54E8A6E134}"/>
+              </a:ext>
+            </a:extLst>
+          </p:cNvPr>
+          <p:cNvSpPr/>
+          <p:nvPr/>
+        </p:nvSpPr>
+        <p:spPr>
+          <a:xfrm>
+            <a:off x="6416576" y="921017"/>
+            <a:ext cx="426036" cy="405063"/>
+          </a:xfrm>
+          <a:prstGeom prst="smileyFace">
+            <a:avLst/>
+          </a:prstGeom>
+        </p:spPr>
+        <p:style>
+          <a:lnRef idx="2">
+            <a:schemeClr val="accent4"/>
+          </a:lnRef>
+          <a:fillRef idx="1">
+            <a:schemeClr val="lt1"/>
+          </a:fillRef>
+          <a:effectRef idx="0">
+            <a:schemeClr val="accent4"/>
+          </a:effectRef>
+          <a:fontRef idx="minor">
+            <a:schemeClr val="dk1"/>
+          </a:fontRef>
+        </p:style>
+        <p:txBody>
+          <a:bodyPr rtlCol="0" anchor="ctr"/>
+          <a:lstStyle/>
+          <a:p>
+            <a:pPr algn="ctr"/>
+            <a:endParaRPr lang="en-SI"/>
+          </a:p>
+        </p:txBody>
+      </p:sp>
+      <p:cxnSp>
+        <p:nvCxnSpPr>
+          <p:cNvPr id="17" name="Straight Arrow Connector 16">
+            <a:extLst>
+              <a:ext uri="{FF2B5EF4-FFF2-40B4-BE49-F238E27FC236}">
+                <a16:creationId xmlns:a16="http://schemas.microsoft.com/office/drawing/2014/main" id="{19F1BF81-4463-6EF5-4EBA-F0F8575F49B0}"/>
+              </a:ext>
+            </a:extLst>
+          </p:cNvPr>
+          <p:cNvCxnSpPr>
+            <a:cxnSpLocks/>
+            <a:stCxn id="16" idx="4"/>
+            <a:endCxn id="5" idx="0"/>
+          </p:cNvCxnSpPr>
+          <p:nvPr/>
+        </p:nvCxnSpPr>
+        <p:spPr>
+          <a:xfrm>
+            <a:off x="6629594" y="1326080"/>
+            <a:ext cx="0" cy="368070"/>
+          </a:xfrm>
+          <a:prstGeom prst="straightConnector1">
+            <a:avLst/>
+          </a:prstGeom>
+          <a:ln>
+            <a:headEnd type="triangle"/>
+            <a:tailEnd type="triangle"/>
+          </a:ln>
+        </p:spPr>
+        <p:style>
+          <a:lnRef idx="2">
+            <a:schemeClr val="accent1"/>
+          </a:lnRef>
+          <a:fillRef idx="0">
+            <a:schemeClr val="accent1"/>
+          </a:fillRef>
+          <a:effectRef idx="1">
+            <a:schemeClr val="accent1"/>
+          </a:effectRef>
+          <a:fontRef idx="minor">
+            <a:schemeClr val="tx1"/>
+          </a:fontRef>
+        </p:style>
+      </p:cxnSp>
+      <p:sp>
+        <p:nvSpPr>
+          <p:cNvPr id="32" name="TextBox 31">
+            <a:extLst>
+              <a:ext uri="{FF2B5EF4-FFF2-40B4-BE49-F238E27FC236}">
+                <a16:creationId xmlns:a16="http://schemas.microsoft.com/office/drawing/2014/main" id="{97FDAF9D-A62B-5645-E60E-800EDF921988}"/>
+              </a:ext>
+            </a:extLst>
+          </p:cNvPr>
+          <p:cNvSpPr txBox="1"/>
+          <p:nvPr/>
+        </p:nvSpPr>
+        <p:spPr>
+          <a:xfrm>
+            <a:off x="2888855" y="1694149"/>
+            <a:ext cx="920445" cy="246221"/>
+          </a:xfrm>
+          <a:prstGeom prst="rect">
+            <a:avLst/>
+          </a:prstGeom>
+          <a:noFill/>
+        </p:spPr>
+        <p:txBody>
+          <a:bodyPr wrap="none" rtlCol="0">
+            <a:spAutoFit/>
+          </a:bodyPr>
+          <a:lstStyle/>
+          <a:p>
+            <a:pPr algn="ctr"/>
+            <a:r>
+              <a:rPr lang="en-GB" sz="1000" dirty="0"/>
+              <a:t>playground-a</a:t>
+            </a:r>
+            <a:endParaRPr lang="en-SI" sz="1000" dirty="0"/>
+          </a:p>
+        </p:txBody>
+      </p:sp>
+      <p:sp>
+        <p:nvSpPr>
+          <p:cNvPr id="33" name="TextBox 32">
+            <a:extLst>
+              <a:ext uri="{FF2B5EF4-FFF2-40B4-BE49-F238E27FC236}">
+                <a16:creationId xmlns:a16="http://schemas.microsoft.com/office/drawing/2014/main" id="{FD9A9A19-6CA1-F7F8-A2FF-C232E9599CF3}"/>
+              </a:ext>
+            </a:extLst>
+          </p:cNvPr>
+          <p:cNvSpPr txBox="1"/>
+          <p:nvPr/>
+        </p:nvSpPr>
+        <p:spPr>
+          <a:xfrm>
+            <a:off x="6169256" y="1694149"/>
+            <a:ext cx="923651" cy="246221"/>
+          </a:xfrm>
+          <a:prstGeom prst="rect">
+            <a:avLst/>
+          </a:prstGeom>
+          <a:noFill/>
+        </p:spPr>
+        <p:txBody>
+          <a:bodyPr wrap="none" rtlCol="0">
+            <a:spAutoFit/>
+          </a:bodyPr>
+          <a:lstStyle/>
+          <a:p>
+            <a:pPr algn="ctr"/>
+            <a:r>
+              <a:rPr lang="en-GB" sz="1000" dirty="0"/>
+              <a:t>playground-b</a:t>
+            </a:r>
+            <a:endParaRPr lang="en-SI" sz="1000" dirty="0"/>
+          </a:p>
+        </p:txBody>
+      </p:sp>
+      <p:sp>
+        <p:nvSpPr>
+          <p:cNvPr id="35" name="Cylinder 34">
+            <a:extLst>
+              <a:ext uri="{FF2B5EF4-FFF2-40B4-BE49-F238E27FC236}">
+                <a16:creationId xmlns:a16="http://schemas.microsoft.com/office/drawing/2014/main" id="{74FFBDCA-22A3-AF37-52BC-FAF5F4DA5201}"/>
+              </a:ext>
+            </a:extLst>
+          </p:cNvPr>
+          <p:cNvSpPr/>
+          <p:nvPr/>
+        </p:nvSpPr>
+        <p:spPr>
+          <a:xfrm>
+            <a:off x="2672726" y="2646562"/>
+            <a:ext cx="478185" cy="295179"/>
+          </a:xfrm>
+          <a:prstGeom prst="can">
+            <a:avLst/>
+          </a:prstGeom>
+        </p:spPr>
+        <p:style>
+          <a:lnRef idx="1">
+            <a:schemeClr val="accent2"/>
+          </a:lnRef>
+          <a:fillRef idx="2">
+            <a:schemeClr val="accent2"/>
+          </a:fillRef>
+          <a:effectRef idx="1">
+            <a:schemeClr val="accent2"/>
+          </a:effectRef>
+          <a:fontRef idx="minor">
+            <a:schemeClr val="dk1"/>
+          </a:fontRef>
+        </p:style>
+        <p:txBody>
+          <a:bodyPr rtlCol="0" anchor="ctr"/>
+          <a:lstStyle/>
+          <a:p>
+            <a:pPr algn="ctr"/>
+            <a:r>
+              <a:rPr lang="en-GB" sz="1000" dirty="0">
+                <a:solidFill>
+                  <a:schemeClr val="bg1"/>
+                </a:solidFill>
+              </a:rPr>
+              <a:t>mem</a:t>
+            </a:r>
+            <a:endParaRPr lang="en-SI" sz="1000" dirty="0">
+              <a:solidFill>
+                <a:schemeClr val="bg1"/>
+              </a:solidFill>
+            </a:endParaRPr>
+          </a:p>
+        </p:txBody>
+      </p:sp>
+      <p:sp>
+        <p:nvSpPr>
+          <p:cNvPr id="37" name="Cylinder 36">
+            <a:extLst>
+              <a:ext uri="{FF2B5EF4-FFF2-40B4-BE49-F238E27FC236}">
+                <a16:creationId xmlns:a16="http://schemas.microsoft.com/office/drawing/2014/main" id="{A6E184B6-510E-4648-C0E4-A2BCAA70928D}"/>
+              </a:ext>
+            </a:extLst>
+          </p:cNvPr>
+          <p:cNvSpPr/>
+          <p:nvPr/>
+        </p:nvSpPr>
+        <p:spPr>
+          <a:xfrm>
+            <a:off x="5960462" y="2646562"/>
+            <a:ext cx="478185" cy="295179"/>
+          </a:xfrm>
+          <a:prstGeom prst="can">
+            <a:avLst/>
+          </a:prstGeom>
+        </p:spPr>
+        <p:style>
+          <a:lnRef idx="1">
+            <a:schemeClr val="accent2"/>
+          </a:lnRef>
+          <a:fillRef idx="2">
+            <a:schemeClr val="accent2"/>
+          </a:fillRef>
+          <a:effectRef idx="1">
+            <a:schemeClr val="accent2"/>
+          </a:effectRef>
+          <a:fontRef idx="minor">
+            <a:schemeClr val="dk1"/>
+          </a:fontRef>
+        </p:style>
+        <p:txBody>
+          <a:bodyPr rtlCol="0" anchor="ctr"/>
+          <a:lstStyle/>
+          <a:p>
+            <a:pPr algn="ctr"/>
+            <a:r>
+              <a:rPr lang="en-GB" sz="1000" dirty="0">
+                <a:solidFill>
+                  <a:schemeClr val="bg1"/>
+                </a:solidFill>
+              </a:rPr>
+              <a:t>mem</a:t>
+            </a:r>
+            <a:endParaRPr lang="en-SI" sz="1000" dirty="0">
+              <a:solidFill>
+                <a:schemeClr val="bg1"/>
+              </a:solidFill>
+            </a:endParaRPr>
+          </a:p>
+        </p:txBody>
+      </p:sp>
+      <p:sp>
+        <p:nvSpPr>
+          <p:cNvPr id="8" name="Oval 7">
+            <a:extLst>
+              <a:ext uri="{FF2B5EF4-FFF2-40B4-BE49-F238E27FC236}">
+                <a16:creationId xmlns:a16="http://schemas.microsoft.com/office/drawing/2014/main" id="{EE5E571D-4191-71D6-3A64-482D0C4DB5C9}"/>
+              </a:ext>
+            </a:extLst>
+          </p:cNvPr>
+          <p:cNvSpPr/>
+          <p:nvPr/>
+        </p:nvSpPr>
+        <p:spPr>
+          <a:xfrm>
+            <a:off x="3257394" y="4015530"/>
+            <a:ext cx="197025" cy="197025"/>
+          </a:xfrm>
+          <a:prstGeom prst="ellipse">
+            <a:avLst/>
+          </a:prstGeom>
+          <a:ln/>
+        </p:spPr>
+        <p:style>
+          <a:lnRef idx="1">
+            <a:schemeClr val="accent4"/>
+          </a:lnRef>
+          <a:fillRef idx="3">
+            <a:schemeClr val="accent4"/>
+          </a:fillRef>
+          <a:effectRef idx="2">
+            <a:schemeClr val="accent4"/>
+          </a:effectRef>
+          <a:fontRef idx="minor">
+            <a:schemeClr val="lt1"/>
+          </a:fontRef>
+        </p:style>
+        <p:txBody>
+          <a:bodyPr rtlCol="0" anchor="ctr"/>
+          <a:lstStyle/>
+          <a:p>
+            <a:pPr algn="ctr"/>
+            <a:endParaRPr lang="en-SI"/>
+          </a:p>
+        </p:txBody>
+      </p:sp>
+      <p:sp>
+        <p:nvSpPr>
+          <p:cNvPr id="9" name="Oval 8">
+            <a:extLst>
+              <a:ext uri="{FF2B5EF4-FFF2-40B4-BE49-F238E27FC236}">
+                <a16:creationId xmlns:a16="http://schemas.microsoft.com/office/drawing/2014/main" id="{F0DCC6F8-2D56-3B1C-6A27-76F0103D4180}"/>
+              </a:ext>
+            </a:extLst>
+          </p:cNvPr>
+          <p:cNvSpPr/>
+          <p:nvPr/>
+        </p:nvSpPr>
+        <p:spPr>
+          <a:xfrm>
+            <a:off x="6522710" y="4047168"/>
+            <a:ext cx="197025" cy="197025"/>
+          </a:xfrm>
+          <a:prstGeom prst="ellipse">
+            <a:avLst/>
+          </a:prstGeom>
+          <a:ln/>
+        </p:spPr>
+        <p:style>
+          <a:lnRef idx="1">
+            <a:schemeClr val="accent4"/>
+          </a:lnRef>
+          <a:fillRef idx="3">
+            <a:schemeClr val="accent4"/>
+          </a:fillRef>
+          <a:effectRef idx="2">
+            <a:schemeClr val="accent4"/>
+          </a:effectRef>
+          <a:fontRef idx="minor">
+            <a:schemeClr val="lt1"/>
+          </a:fontRef>
+        </p:style>
+        <p:txBody>
+          <a:bodyPr rtlCol="0" anchor="ctr"/>
+          <a:lstStyle/>
+          <a:p>
+            <a:pPr algn="ctr"/>
+            <a:endParaRPr lang="en-SI"/>
+          </a:p>
+        </p:txBody>
+      </p:sp>
+      <p:sp>
+        <p:nvSpPr>
+          <p:cNvPr id="10" name="Cylinder 9">
+            <a:extLst>
+              <a:ext uri="{FF2B5EF4-FFF2-40B4-BE49-F238E27FC236}">
+                <a16:creationId xmlns:a16="http://schemas.microsoft.com/office/drawing/2014/main" id="{33C3C67B-F22E-6584-4709-1B583DC27035}"/>
+              </a:ext>
+            </a:extLst>
+          </p:cNvPr>
+          <p:cNvSpPr/>
+          <p:nvPr/>
+        </p:nvSpPr>
+        <p:spPr>
+          <a:xfrm>
+            <a:off x="8574562" y="3173926"/>
+            <a:ext cx="950438" cy="417094"/>
+          </a:xfrm>
+          <a:prstGeom prst="can">
+            <a:avLst/>
+          </a:prstGeom>
+        </p:spPr>
+        <p:style>
+          <a:lnRef idx="1">
+            <a:schemeClr val="accent6"/>
+          </a:lnRef>
+          <a:fillRef idx="2">
+            <a:schemeClr val="accent6"/>
+          </a:fillRef>
+          <a:effectRef idx="1">
+            <a:schemeClr val="accent6"/>
+          </a:effectRef>
+          <a:fontRef idx="minor">
+            <a:schemeClr val="dk1"/>
+          </a:fontRef>
+        </p:style>
+        <p:txBody>
+          <a:bodyPr rtlCol="0" anchor="ctr"/>
+          <a:lstStyle/>
+          <a:p>
+            <a:pPr algn="ctr"/>
+            <a:r>
+              <a:rPr lang="en-GB" sz="1000" dirty="0" err="1">
+                <a:solidFill>
+                  <a:schemeClr val="bg1"/>
+                </a:solidFill>
+              </a:rPr>
+              <a:t>prometheus</a:t>
+            </a:r>
+            <a:endParaRPr lang="en-SI" sz="1000" dirty="0">
+              <a:solidFill>
+                <a:schemeClr val="bg1"/>
+              </a:solidFill>
+            </a:endParaRPr>
+          </a:p>
+        </p:txBody>
+      </p:sp>
+      <p:cxnSp>
+        <p:nvCxnSpPr>
+          <p:cNvPr id="34" name="Connector: Elbow 33">
+            <a:extLst>
+              <a:ext uri="{FF2B5EF4-FFF2-40B4-BE49-F238E27FC236}">
+                <a16:creationId xmlns:a16="http://schemas.microsoft.com/office/drawing/2014/main" id="{3FE32E71-BF9A-A92C-27D8-798B73795957}"/>
+              </a:ext>
+            </a:extLst>
+          </p:cNvPr>
+          <p:cNvCxnSpPr>
+            <a:stCxn id="9" idx="4"/>
+            <a:endCxn id="10" idx="3"/>
+          </p:cNvCxnSpPr>
+          <p:nvPr/>
+        </p:nvCxnSpPr>
+        <p:spPr>
+          <a:xfrm rot="5400000" flipH="1" flipV="1">
+            <a:off x="7508915" y="2703328"/>
+            <a:ext cx="653173" cy="2428558"/>
+          </a:xfrm>
+          <a:prstGeom prst="bentConnector3">
+            <a:avLst>
+              <a:gd name="adj1" fmla="val -34998"/>
+            </a:avLst>
+          </a:prstGeom>
+          <a:ln w="12700">
+            <a:prstDash val="dash"/>
+            <a:headEnd type="triangle" w="med" len="med"/>
+            <a:tailEnd type="triangle" w="med" len="med"/>
+          </a:ln>
+        </p:spPr>
+        <p:style>
+          <a:lnRef idx="2">
+            <a:schemeClr val="accent1"/>
+          </a:lnRef>
+          <a:fillRef idx="0">
+            <a:schemeClr val="accent1"/>
+          </a:fillRef>
+          <a:effectRef idx="1">
+            <a:schemeClr val="accent1"/>
+          </a:effectRef>
+          <a:fontRef idx="minor">
+            <a:schemeClr val="tx1"/>
+          </a:fontRef>
+        </p:style>
+      </p:cxnSp>
+      <p:cxnSp>
+        <p:nvCxnSpPr>
+          <p:cNvPr id="36" name="Connector: Elbow 35">
+            <a:extLst>
+              <a:ext uri="{FF2B5EF4-FFF2-40B4-BE49-F238E27FC236}">
+                <a16:creationId xmlns:a16="http://schemas.microsoft.com/office/drawing/2014/main" id="{93E201AD-7467-DE5E-47DB-B8D845E24F02}"/>
+              </a:ext>
+            </a:extLst>
+          </p:cNvPr>
+          <p:cNvCxnSpPr>
+            <a:stCxn id="8" idx="4"/>
+          </p:cNvCxnSpPr>
+          <p:nvPr/>
+        </p:nvCxnSpPr>
+        <p:spPr>
+          <a:xfrm rot="16200000" flipH="1">
+            <a:off x="4856801" y="2711660"/>
+            <a:ext cx="259182" cy="3260971"/>
+          </a:xfrm>
+          <a:prstGeom prst="bentConnector2">
+            <a:avLst/>
+          </a:prstGeom>
+          <a:ln w="12700">
+            <a:prstDash val="dash"/>
+            <a:headEnd type="triangle" w="med" len="med"/>
+            <a:tailEnd type="none" w="med" len="med"/>
+          </a:ln>
+        </p:spPr>
+        <p:style>
+          <a:lnRef idx="2">
+            <a:schemeClr val="accent1"/>
+          </a:lnRef>
+          <a:fillRef idx="0">
+            <a:schemeClr val="accent1"/>
+          </a:fillRef>
+          <a:effectRef idx="1">
+            <a:schemeClr val="accent1"/>
+          </a:effectRef>
+          <a:fontRef idx="minor">
+            <a:schemeClr val="tx1"/>
+          </a:fontRef>
+        </p:style>
+      </p:cxnSp>
+      <p:cxnSp>
+        <p:nvCxnSpPr>
+          <p:cNvPr id="38" name="Straight Arrow Connector 37">
+            <a:extLst>
+              <a:ext uri="{FF2B5EF4-FFF2-40B4-BE49-F238E27FC236}">
+                <a16:creationId xmlns:a16="http://schemas.microsoft.com/office/drawing/2014/main" id="{2642BE9C-527D-6B46-64B8-858D03FA8520}"/>
+              </a:ext>
+            </a:extLst>
+          </p:cNvPr>
+          <p:cNvCxnSpPr>
+            <a:cxnSpLocks/>
+            <a:stCxn id="10" idx="1"/>
+            <a:endCxn id="40" idx="2"/>
+          </p:cNvCxnSpPr>
+          <p:nvPr/>
+        </p:nvCxnSpPr>
+        <p:spPr>
+          <a:xfrm flipV="1">
+            <a:off x="9049781" y="2521601"/>
+            <a:ext cx="1" cy="652325"/>
+          </a:xfrm>
+          <a:prstGeom prst="straightConnector1">
+            <a:avLst/>
+          </a:prstGeom>
+          <a:ln w="12700">
+            <a:prstDash val="dash"/>
+            <a:tailEnd type="triangle"/>
+          </a:ln>
+        </p:spPr>
+        <p:style>
+          <a:lnRef idx="2">
+            <a:schemeClr val="accent1"/>
+          </a:lnRef>
+          <a:fillRef idx="0">
+            <a:schemeClr val="accent1"/>
+          </a:fillRef>
+          <a:effectRef idx="1">
+            <a:schemeClr val="accent1"/>
+          </a:effectRef>
+          <a:fontRef idx="minor">
+            <a:schemeClr val="tx1"/>
+          </a:fontRef>
+        </p:style>
+      </p:cxnSp>
+      <p:cxnSp>
+        <p:nvCxnSpPr>
+          <p:cNvPr id="39" name="Connector: Elbow 38">
+            <a:extLst>
+              <a:ext uri="{FF2B5EF4-FFF2-40B4-BE49-F238E27FC236}">
+                <a16:creationId xmlns:a16="http://schemas.microsoft.com/office/drawing/2014/main" id="{0A17E99E-2380-4F38-AC88-69D3172ECF95}"/>
+              </a:ext>
+            </a:extLst>
+          </p:cNvPr>
+          <p:cNvCxnSpPr>
+            <a:cxnSpLocks/>
+            <a:endCxn id="40" idx="1"/>
+          </p:cNvCxnSpPr>
+          <p:nvPr/>
+        </p:nvCxnSpPr>
+        <p:spPr>
+          <a:xfrm rot="5400000" flipH="1" flipV="1">
+            <a:off x="7158978" y="3052143"/>
+            <a:ext cx="2197184" cy="633986"/>
+          </a:xfrm>
+          <a:prstGeom prst="bentConnector2">
+            <a:avLst/>
+          </a:prstGeom>
+          <a:ln w="12700">
+            <a:prstDash val="dash"/>
+            <a:tailEnd type="triangle"/>
+          </a:ln>
+        </p:spPr>
+        <p:style>
+          <a:lnRef idx="2">
+            <a:schemeClr val="accent1"/>
+          </a:lnRef>
+          <a:fillRef idx="0">
+            <a:schemeClr val="accent1"/>
+          </a:fillRef>
+          <a:effectRef idx="1">
+            <a:schemeClr val="accent1"/>
+          </a:effectRef>
+          <a:fontRef idx="minor">
+            <a:schemeClr val="tx1"/>
+          </a:fontRef>
+        </p:style>
+      </p:cxnSp>
+      <p:sp>
+        <p:nvSpPr>
+          <p:cNvPr id="40" name="Rectangle 39">
+            <a:extLst>
+              <a:ext uri="{FF2B5EF4-FFF2-40B4-BE49-F238E27FC236}">
+                <a16:creationId xmlns:a16="http://schemas.microsoft.com/office/drawing/2014/main" id="{4A9120D6-F0CA-1EB5-C68D-C3683D9734BB}"/>
+              </a:ext>
+            </a:extLst>
+          </p:cNvPr>
+          <p:cNvSpPr/>
+          <p:nvPr/>
+        </p:nvSpPr>
+        <p:spPr>
+          <a:xfrm>
+            <a:off x="8574563" y="2019487"/>
+            <a:ext cx="950437" cy="502114"/>
+          </a:xfrm>
+          <a:prstGeom prst="rect">
+            <a:avLst/>
+          </a:prstGeom>
+        </p:spPr>
+        <p:style>
+          <a:lnRef idx="1">
+            <a:schemeClr val="accent6"/>
+          </a:lnRef>
+          <a:fillRef idx="2">
+            <a:schemeClr val="accent6"/>
+          </a:fillRef>
+          <a:effectRef idx="1">
+            <a:schemeClr val="accent6"/>
+          </a:effectRef>
+          <a:fontRef idx="minor">
+            <a:schemeClr val="dk1"/>
+          </a:fontRef>
+        </p:style>
+        <p:txBody>
+          <a:bodyPr rtlCol="0" anchor="ctr"/>
+          <a:lstStyle/>
+          <a:p>
+            <a:pPr algn="ctr"/>
+            <a:r>
+              <a:rPr lang="en-US" sz="1000" dirty="0">
+                <a:solidFill>
+                  <a:schemeClr val="bg1"/>
+                </a:solidFill>
+              </a:rPr>
+              <a:t>admin console</a:t>
+            </a:r>
+          </a:p>
+        </p:txBody>
+      </p:sp>
+      <p:sp>
+        <p:nvSpPr>
+          <p:cNvPr id="41" name="Smiley Face 40">
+            <a:extLst>
+              <a:ext uri="{FF2B5EF4-FFF2-40B4-BE49-F238E27FC236}">
+                <a16:creationId xmlns:a16="http://schemas.microsoft.com/office/drawing/2014/main" id="{4C2A27EB-BFB9-EF48-0E32-65ED99A37EAA}"/>
+              </a:ext>
+            </a:extLst>
+          </p:cNvPr>
+          <p:cNvSpPr/>
+          <p:nvPr/>
+        </p:nvSpPr>
+        <p:spPr>
+          <a:xfrm>
+            <a:off x="8841420" y="953431"/>
+            <a:ext cx="426036" cy="405063"/>
+          </a:xfrm>
+          <a:prstGeom prst="smileyFace">
+            <a:avLst/>
+          </a:prstGeom>
+        </p:spPr>
+        <p:style>
+          <a:lnRef idx="2">
+            <a:schemeClr val="accent6"/>
+          </a:lnRef>
+          <a:fillRef idx="1">
+            <a:schemeClr val="lt1"/>
+          </a:fillRef>
+          <a:effectRef idx="0">
+            <a:schemeClr val="accent6"/>
+          </a:effectRef>
+          <a:fontRef idx="minor">
+            <a:schemeClr val="dk1"/>
+          </a:fontRef>
+        </p:style>
+        <p:txBody>
+          <a:bodyPr rtlCol="0" anchor="ctr"/>
+          <a:lstStyle/>
+          <a:p>
+            <a:pPr algn="ctr"/>
+            <a:endParaRPr lang="en-SI"/>
+          </a:p>
+        </p:txBody>
+      </p:sp>
+      <p:cxnSp>
+        <p:nvCxnSpPr>
+          <p:cNvPr id="42" name="Straight Arrow Connector 41">
+            <a:extLst>
+              <a:ext uri="{FF2B5EF4-FFF2-40B4-BE49-F238E27FC236}">
+                <a16:creationId xmlns:a16="http://schemas.microsoft.com/office/drawing/2014/main" id="{1C309FD5-D876-D146-2853-DB664491A68D}"/>
+              </a:ext>
+            </a:extLst>
+          </p:cNvPr>
+          <p:cNvCxnSpPr>
+            <a:cxnSpLocks/>
+            <a:stCxn id="41" idx="4"/>
+            <a:endCxn id="40" idx="0"/>
+          </p:cNvCxnSpPr>
+          <p:nvPr/>
+        </p:nvCxnSpPr>
+        <p:spPr>
+          <a:xfrm flipH="1">
+            <a:off x="9049782" y="1358494"/>
+            <a:ext cx="4656" cy="660993"/>
+          </a:xfrm>
+          <a:prstGeom prst="straightConnector1">
+            <a:avLst/>
+          </a:prstGeom>
+          <a:ln>
+            <a:headEnd type="triangle"/>
+            <a:tailEnd type="triangle"/>
+          </a:ln>
+        </p:spPr>
+        <p:style>
+          <a:lnRef idx="2">
+            <a:schemeClr val="accent1"/>
+          </a:lnRef>
+          <a:fillRef idx="0">
+            <a:schemeClr val="accent1"/>
+          </a:fillRef>
+          <a:effectRef idx="1">
+            <a:schemeClr val="accent1"/>
+          </a:effectRef>
+          <a:fontRef idx="minor">
+            <a:schemeClr val="tx1"/>
+          </a:fontRef>
+        </p:style>
+      </p:cxnSp>
+    </p:spTree>
+    <p:extLst>
+      <p:ext uri="{BB962C8B-B14F-4D97-AF65-F5344CB8AC3E}">
+        <p14:creationId xmlns:p14="http://schemas.microsoft.com/office/powerpoint/2010/main" val="1225103400"/>
+      </p:ext>
+    </p:extLst>
+  </p:cSld>
+  <p:clrMapOvr>
+    <a:masterClrMapping/>
+  </p:clrMapOvr>
+</p:sld>
+</file>
+
+<file path=ppt/slides/slide5.xml><?xml version="1.0" encoding="utf-8"?>
+<p:sld xmlns:a="http://schemas.openxmlformats.org/drawingml/2006/main" xmlns:r="http://schemas.openxmlformats.org/officeDocument/2006/relationships" xmlns:p="http://schemas.openxmlformats.org/presentationml/2006/main">
+  <p:cSld>
+    <p:spTree>
+      <p:nvGrpSpPr>
+        <p:cNvPr id="1" name="">
+          <a:extLst>
+            <a:ext uri="{FF2B5EF4-FFF2-40B4-BE49-F238E27FC236}">
+              <a16:creationId xmlns:a16="http://schemas.microsoft.com/office/drawing/2014/main" id="{15C1AC26-0B66-A447-CD29-B3E8BB362686}"/>
+            </a:ext>
+          </a:extLst>
+        </p:cNvPr>
+        <p:cNvGrpSpPr/>
+        <p:nvPr/>
+      </p:nvGrpSpPr>
+      <p:grpSpPr>
+        <a:xfrm>
+          <a:off x="0" y="0"/>
+          <a:ext cx="0" cy="0"/>
+          <a:chOff x="0" y="0"/>
+          <a:chExt cx="0" cy="0"/>
+        </a:xfrm>
+      </p:grpSpPr>
+      <p:sp>
+        <p:nvSpPr>
+          <p:cNvPr id="5" name="Rectangle 4">
+            <a:extLst>
+              <a:ext uri="{FF2B5EF4-FFF2-40B4-BE49-F238E27FC236}">
+                <a16:creationId xmlns:a16="http://schemas.microsoft.com/office/drawing/2014/main" id="{44D94C6C-E806-C0FE-633E-443C992C1651}"/>
+              </a:ext>
+            </a:extLst>
+          </p:cNvPr>
+          <p:cNvSpPr/>
+          <p:nvPr/>
+        </p:nvSpPr>
+        <p:spPr>
+          <a:xfrm>
+            <a:off x="5758401" y="1694150"/>
+            <a:ext cx="1742385" cy="2451531"/>
+          </a:xfrm>
+          <a:prstGeom prst="rect">
+            <a:avLst/>
+          </a:prstGeom>
+          <a:solidFill>
+            <a:srgbClr val="89D8F7">
+              <a:alpha val="50000"/>
+            </a:srgbClr>
+          </a:solidFill>
+          <a:ln>
+            <a:noFill/>
+          </a:ln>
+        </p:spPr>
+        <p:style>
+          <a:lnRef idx="0">
+            <a:scrgbClr r="0" g="0" b="0"/>
+          </a:lnRef>
+          <a:fillRef idx="0">
+            <a:scrgbClr r="0" g="0" b="0"/>
+          </a:fillRef>
+          <a:effectRef idx="0">
+            <a:scrgbClr r="0" g="0" b="0"/>
+          </a:effectRef>
+          <a:fontRef idx="minor">
+            <a:schemeClr val="lt1"/>
+          </a:fontRef>
+        </p:style>
+        <p:txBody>
+          <a:bodyPr rtlCol="0" anchor="ctr"/>
+          <a:lstStyle/>
+          <a:p>
+            <a:pPr algn="ctr"/>
+            <a:endParaRPr lang="en-SI"/>
+          </a:p>
+        </p:txBody>
+      </p:sp>
+      <p:sp>
+        <p:nvSpPr>
+          <p:cNvPr id="6" name="Rectangle 5">
+            <a:extLst>
+              <a:ext uri="{FF2B5EF4-FFF2-40B4-BE49-F238E27FC236}">
+                <a16:creationId xmlns:a16="http://schemas.microsoft.com/office/drawing/2014/main" id="{E8F80AC1-F934-4FC5-8209-3D78D002A763}"/>
+              </a:ext>
+            </a:extLst>
+          </p:cNvPr>
+          <p:cNvSpPr/>
+          <p:nvPr/>
+        </p:nvSpPr>
+        <p:spPr>
+          <a:xfrm>
+            <a:off x="6194076" y="2305336"/>
+            <a:ext cx="845604" cy="502114"/>
+          </a:xfrm>
+          <a:prstGeom prst="rect">
+            <a:avLst/>
+          </a:prstGeom>
+        </p:spPr>
+        <p:style>
+          <a:lnRef idx="1">
+            <a:schemeClr val="accent4"/>
+          </a:lnRef>
+          <a:fillRef idx="3">
+            <a:schemeClr val="accent4"/>
+          </a:fillRef>
+          <a:effectRef idx="2">
+            <a:schemeClr val="accent4"/>
+          </a:effectRef>
+          <a:fontRef idx="minor">
+            <a:schemeClr val="lt1"/>
+          </a:fontRef>
+        </p:style>
+        <p:txBody>
+          <a:bodyPr rtlCol="0" anchor="ctr"/>
+          <a:lstStyle/>
+          <a:p>
+            <a:pPr algn="ctr"/>
+            <a:r>
+              <a:rPr lang="en-US" sz="1000" dirty="0"/>
+              <a:t>OC</a:t>
+            </a:r>
+          </a:p>
+        </p:txBody>
+      </p:sp>
+      <p:sp>
+        <p:nvSpPr>
+          <p:cNvPr id="7" name="Rectangle 6">
+            <a:extLst>
+              <a:ext uri="{FF2B5EF4-FFF2-40B4-BE49-F238E27FC236}">
+                <a16:creationId xmlns:a16="http://schemas.microsoft.com/office/drawing/2014/main" id="{331184A5-741D-A9B7-DA16-2E05058CB57F}"/>
+              </a:ext>
+            </a:extLst>
+          </p:cNvPr>
+          <p:cNvSpPr/>
+          <p:nvPr/>
+        </p:nvSpPr>
+        <p:spPr>
+          <a:xfrm>
+            <a:off x="6194076" y="3132609"/>
+            <a:ext cx="845604" cy="502114"/>
+          </a:xfrm>
+          <a:prstGeom prst="rect">
+            <a:avLst/>
+          </a:prstGeom>
+        </p:spPr>
+        <p:style>
+          <a:lnRef idx="1">
+            <a:schemeClr val="accent4"/>
+          </a:lnRef>
+          <a:fillRef idx="3">
+            <a:schemeClr val="accent4"/>
+          </a:fillRef>
+          <a:effectRef idx="2">
+            <a:schemeClr val="accent4"/>
+          </a:effectRef>
+          <a:fontRef idx="minor">
+            <a:schemeClr val="lt1"/>
+          </a:fontRef>
+        </p:style>
+        <p:txBody>
+          <a:bodyPr rtlCol="0" anchor="ctr"/>
+          <a:lstStyle/>
+          <a:p>
+            <a:pPr algn="ctr"/>
+            <a:r>
+              <a:rPr lang="en-US" sz="1000" dirty="0"/>
+              <a:t>FC</a:t>
+            </a:r>
+          </a:p>
+        </p:txBody>
+      </p:sp>
+      <p:sp>
+        <p:nvSpPr>
+          <p:cNvPr id="11" name="Cylinder 10">
+            <a:extLst>
+              <a:ext uri="{FF2B5EF4-FFF2-40B4-BE49-F238E27FC236}">
+                <a16:creationId xmlns:a16="http://schemas.microsoft.com/office/drawing/2014/main" id="{4109D8AC-6151-D99F-B83C-C29C6C1AB1DD}"/>
+              </a:ext>
+            </a:extLst>
+          </p:cNvPr>
+          <p:cNvSpPr/>
+          <p:nvPr/>
+        </p:nvSpPr>
+        <p:spPr>
+          <a:xfrm>
+            <a:off x="4627343" y="3173926"/>
+            <a:ext cx="822628" cy="417094"/>
+          </a:xfrm>
+          <a:prstGeom prst="can">
+            <a:avLst/>
+          </a:prstGeom>
+        </p:spPr>
+        <p:style>
+          <a:lnRef idx="1">
+            <a:schemeClr val="accent2"/>
+          </a:lnRef>
+          <a:fillRef idx="2">
+            <a:schemeClr val="accent2"/>
+          </a:fillRef>
+          <a:effectRef idx="1">
+            <a:schemeClr val="accent2"/>
+          </a:effectRef>
+          <a:fontRef idx="minor">
+            <a:schemeClr val="dk1"/>
+          </a:fontRef>
+        </p:style>
+        <p:txBody>
+          <a:bodyPr rtlCol="0" anchor="ctr"/>
+          <a:lstStyle/>
+          <a:p>
+            <a:pPr algn="ctr"/>
+            <a:r>
+              <a:rPr lang="en-GB" sz="1000" dirty="0" err="1">
+                <a:solidFill>
+                  <a:schemeClr val="bg1"/>
+                </a:solidFill>
+              </a:rPr>
+              <a:t>redis</a:t>
+            </a:r>
+            <a:endParaRPr lang="en-SI" sz="1000" dirty="0">
+              <a:solidFill>
+                <a:schemeClr val="bg1"/>
+              </a:solidFill>
+            </a:endParaRPr>
+          </a:p>
+        </p:txBody>
+      </p:sp>
+      <p:cxnSp>
+        <p:nvCxnSpPr>
+          <p:cNvPr id="13" name="Straight Arrow Connector 12">
+            <a:extLst>
+              <a:ext uri="{FF2B5EF4-FFF2-40B4-BE49-F238E27FC236}">
+                <a16:creationId xmlns:a16="http://schemas.microsoft.com/office/drawing/2014/main" id="{313215FF-A2C2-006B-6D8B-101E73FC05B0}"/>
+              </a:ext>
+            </a:extLst>
+          </p:cNvPr>
+          <p:cNvCxnSpPr>
+            <a:cxnSpLocks/>
+            <a:stCxn id="11" idx="4"/>
+            <a:endCxn id="7" idx="1"/>
+          </p:cNvCxnSpPr>
+          <p:nvPr/>
+        </p:nvCxnSpPr>
+        <p:spPr>
+          <a:xfrm>
+            <a:off x="5449971" y="3382473"/>
+            <a:ext cx="744105" cy="1193"/>
+          </a:xfrm>
+          <a:prstGeom prst="straightConnector1">
+            <a:avLst/>
+          </a:prstGeom>
+          <a:ln>
+            <a:headEnd type="triangle"/>
+            <a:tailEnd type="triangle"/>
+          </a:ln>
+        </p:spPr>
+        <p:style>
+          <a:lnRef idx="2">
+            <a:schemeClr val="accent1"/>
+          </a:lnRef>
+          <a:fillRef idx="0">
+            <a:schemeClr val="accent1"/>
+          </a:fillRef>
+          <a:effectRef idx="1">
+            <a:schemeClr val="accent1"/>
+          </a:effectRef>
+          <a:fontRef idx="minor">
+            <a:schemeClr val="tx1"/>
+          </a:fontRef>
+        </p:style>
+      </p:cxnSp>
+      <p:sp>
+        <p:nvSpPr>
+          <p:cNvPr id="16" name="Smiley Face 15">
+            <a:extLst>
+              <a:ext uri="{FF2B5EF4-FFF2-40B4-BE49-F238E27FC236}">
+                <a16:creationId xmlns:a16="http://schemas.microsoft.com/office/drawing/2014/main" id="{3489E3D6-ABAF-C0C5-FED2-5CC838EB2C50}"/>
+              </a:ext>
+            </a:extLst>
+          </p:cNvPr>
+          <p:cNvSpPr/>
+          <p:nvPr/>
+        </p:nvSpPr>
+        <p:spPr>
+          <a:xfrm>
+            <a:off x="6416576" y="921017"/>
+            <a:ext cx="426036" cy="405063"/>
+          </a:xfrm>
+          <a:prstGeom prst="smileyFace">
+            <a:avLst/>
+          </a:prstGeom>
+        </p:spPr>
+        <p:style>
+          <a:lnRef idx="2">
+            <a:schemeClr val="accent4"/>
+          </a:lnRef>
+          <a:fillRef idx="1">
+            <a:schemeClr val="lt1"/>
+          </a:fillRef>
+          <a:effectRef idx="0">
+            <a:schemeClr val="accent4"/>
+          </a:effectRef>
+          <a:fontRef idx="minor">
+            <a:schemeClr val="dk1"/>
+          </a:fontRef>
+        </p:style>
+        <p:txBody>
+          <a:bodyPr rtlCol="0" anchor="ctr"/>
+          <a:lstStyle/>
+          <a:p>
+            <a:pPr algn="ctr"/>
+            <a:endParaRPr lang="en-SI"/>
+          </a:p>
+        </p:txBody>
+      </p:sp>
+      <p:cxnSp>
+        <p:nvCxnSpPr>
+          <p:cNvPr id="17" name="Straight Arrow Connector 16">
+            <a:extLst>
+              <a:ext uri="{FF2B5EF4-FFF2-40B4-BE49-F238E27FC236}">
+                <a16:creationId xmlns:a16="http://schemas.microsoft.com/office/drawing/2014/main" id="{596EDFED-B7F2-AFB0-9BE8-7D09D5341000}"/>
+              </a:ext>
+            </a:extLst>
+          </p:cNvPr>
+          <p:cNvCxnSpPr>
+            <a:cxnSpLocks/>
+            <a:stCxn id="16" idx="4"/>
+            <a:endCxn id="5" idx="0"/>
+          </p:cNvCxnSpPr>
+          <p:nvPr/>
+        </p:nvCxnSpPr>
+        <p:spPr>
+          <a:xfrm>
+            <a:off x="6629594" y="1326080"/>
+            <a:ext cx="0" cy="368070"/>
+          </a:xfrm>
+          <a:prstGeom prst="straightConnector1">
+            <a:avLst/>
+          </a:prstGeom>
+          <a:ln>
+            <a:headEnd type="triangle"/>
+            <a:tailEnd type="triangle"/>
+          </a:ln>
+        </p:spPr>
+        <p:style>
+          <a:lnRef idx="2">
+            <a:schemeClr val="accent1"/>
+          </a:lnRef>
+          <a:fillRef idx="0">
+            <a:schemeClr val="accent1"/>
+          </a:fillRef>
+          <a:effectRef idx="1">
+            <a:schemeClr val="accent1"/>
+          </a:effectRef>
+          <a:fontRef idx="minor">
+            <a:schemeClr val="tx1"/>
+          </a:fontRef>
+        </p:style>
+      </p:cxnSp>
+      <p:sp>
+        <p:nvSpPr>
+          <p:cNvPr id="23" name="Oval 22">
+            <a:extLst>
+              <a:ext uri="{FF2B5EF4-FFF2-40B4-BE49-F238E27FC236}">
+                <a16:creationId xmlns:a16="http://schemas.microsoft.com/office/drawing/2014/main" id="{BFC83E22-E3FE-CE2C-163F-CE5B6BA54E40}"/>
+              </a:ext>
+            </a:extLst>
+          </p:cNvPr>
+          <p:cNvSpPr/>
+          <p:nvPr/>
+        </p:nvSpPr>
+        <p:spPr>
+          <a:xfrm>
+            <a:off x="6522710" y="4047168"/>
+            <a:ext cx="197025" cy="197025"/>
+          </a:xfrm>
+          <a:prstGeom prst="ellipse">
+            <a:avLst/>
+          </a:prstGeom>
+          <a:ln/>
+        </p:spPr>
+        <p:style>
+          <a:lnRef idx="1">
+            <a:schemeClr val="accent4"/>
+          </a:lnRef>
+          <a:fillRef idx="3">
+            <a:schemeClr val="accent4"/>
+          </a:fillRef>
+          <a:effectRef idx="2">
+            <a:schemeClr val="accent4"/>
+          </a:effectRef>
+          <a:fontRef idx="minor">
+            <a:schemeClr val="lt1"/>
+          </a:fontRef>
+        </p:style>
+        <p:txBody>
+          <a:bodyPr rtlCol="0" anchor="ctr"/>
+          <a:lstStyle/>
+          <a:p>
+            <a:pPr algn="ctr"/>
+            <a:endParaRPr lang="en-SI"/>
+          </a:p>
+        </p:txBody>
+      </p:sp>
+      <p:sp>
+        <p:nvSpPr>
+          <p:cNvPr id="24" name="Cylinder 23">
+            <a:extLst>
+              <a:ext uri="{FF2B5EF4-FFF2-40B4-BE49-F238E27FC236}">
+                <a16:creationId xmlns:a16="http://schemas.microsoft.com/office/drawing/2014/main" id="{40377087-5B50-8929-BC92-380DC0DB5B7E}"/>
+              </a:ext>
+            </a:extLst>
+          </p:cNvPr>
+          <p:cNvSpPr/>
+          <p:nvPr/>
+        </p:nvSpPr>
+        <p:spPr>
+          <a:xfrm>
+            <a:off x="8574562" y="3173926"/>
+            <a:ext cx="950438" cy="417094"/>
+          </a:xfrm>
+          <a:prstGeom prst="can">
+            <a:avLst/>
+          </a:prstGeom>
+        </p:spPr>
+        <p:style>
+          <a:lnRef idx="1">
+            <a:schemeClr val="accent6"/>
+          </a:lnRef>
+          <a:fillRef idx="2">
+            <a:schemeClr val="accent6"/>
+          </a:fillRef>
+          <a:effectRef idx="1">
+            <a:schemeClr val="accent6"/>
+          </a:effectRef>
+          <a:fontRef idx="minor">
+            <a:schemeClr val="dk1"/>
+          </a:fontRef>
+        </p:style>
+        <p:txBody>
+          <a:bodyPr rtlCol="0" anchor="ctr"/>
+          <a:lstStyle/>
+          <a:p>
+            <a:pPr algn="ctr"/>
+            <a:r>
+              <a:rPr lang="en-GB" sz="1000" dirty="0" err="1">
+                <a:solidFill>
+                  <a:schemeClr val="bg1"/>
+                </a:solidFill>
+              </a:rPr>
+              <a:t>prometheus</a:t>
+            </a:r>
+            <a:endParaRPr lang="en-SI" sz="1000" dirty="0">
+              <a:solidFill>
+                <a:schemeClr val="bg1"/>
+              </a:solidFill>
+            </a:endParaRPr>
+          </a:p>
+        </p:txBody>
+      </p:sp>
+      <p:cxnSp>
+        <p:nvCxnSpPr>
+          <p:cNvPr id="25" name="Connector: Elbow 24">
+            <a:extLst>
+              <a:ext uri="{FF2B5EF4-FFF2-40B4-BE49-F238E27FC236}">
+                <a16:creationId xmlns:a16="http://schemas.microsoft.com/office/drawing/2014/main" id="{9EED213F-9CE7-F658-1B1D-3515D41B43B9}"/>
+              </a:ext>
+            </a:extLst>
+          </p:cNvPr>
+          <p:cNvCxnSpPr>
+            <a:stCxn id="23" idx="4"/>
+            <a:endCxn id="24" idx="3"/>
+          </p:cNvCxnSpPr>
+          <p:nvPr/>
+        </p:nvCxnSpPr>
+        <p:spPr>
+          <a:xfrm rot="5400000" flipH="1" flipV="1">
+            <a:off x="7508915" y="2703328"/>
+            <a:ext cx="653173" cy="2428558"/>
+          </a:xfrm>
+          <a:prstGeom prst="bentConnector3">
+            <a:avLst>
+              <a:gd name="adj1" fmla="val -34998"/>
+            </a:avLst>
+          </a:prstGeom>
+          <a:ln w="12700">
+            <a:prstDash val="dash"/>
+            <a:headEnd type="triangle" w="med" len="med"/>
+            <a:tailEnd type="triangle" w="med" len="med"/>
+          </a:ln>
+        </p:spPr>
+        <p:style>
+          <a:lnRef idx="2">
+            <a:schemeClr val="accent1"/>
+          </a:lnRef>
+          <a:fillRef idx="0">
+            <a:schemeClr val="accent1"/>
+          </a:fillRef>
+          <a:effectRef idx="1">
+            <a:schemeClr val="accent1"/>
+          </a:effectRef>
+          <a:fontRef idx="minor">
+            <a:schemeClr val="tx1"/>
+          </a:fontRef>
+        </p:style>
+      </p:cxnSp>
+      <p:cxnSp>
+        <p:nvCxnSpPr>
+          <p:cNvPr id="27" name="Straight Arrow Connector 26">
+            <a:extLst>
+              <a:ext uri="{FF2B5EF4-FFF2-40B4-BE49-F238E27FC236}">
+                <a16:creationId xmlns:a16="http://schemas.microsoft.com/office/drawing/2014/main" id="{FC0BA7C4-D3A4-19FE-2439-3B0602759FDD}"/>
+              </a:ext>
+            </a:extLst>
+          </p:cNvPr>
+          <p:cNvCxnSpPr>
+            <a:cxnSpLocks/>
+            <a:stCxn id="24" idx="1"/>
+            <a:endCxn id="29" idx="2"/>
+          </p:cNvCxnSpPr>
+          <p:nvPr/>
+        </p:nvCxnSpPr>
+        <p:spPr>
+          <a:xfrm flipV="1">
+            <a:off x="9049781" y="2521601"/>
+            <a:ext cx="1" cy="652325"/>
+          </a:xfrm>
+          <a:prstGeom prst="straightConnector1">
+            <a:avLst/>
+          </a:prstGeom>
+          <a:ln w="12700">
+            <a:prstDash val="dash"/>
+            <a:tailEnd type="triangle"/>
+          </a:ln>
+        </p:spPr>
+        <p:style>
+          <a:lnRef idx="2">
+            <a:schemeClr val="accent1"/>
+          </a:lnRef>
+          <a:fillRef idx="0">
+            <a:schemeClr val="accent1"/>
+          </a:fillRef>
+          <a:effectRef idx="1">
+            <a:schemeClr val="accent1"/>
+          </a:effectRef>
+          <a:fontRef idx="minor">
+            <a:schemeClr val="tx1"/>
+          </a:fontRef>
+        </p:style>
+      </p:cxnSp>
+      <p:cxnSp>
+        <p:nvCxnSpPr>
+          <p:cNvPr id="28" name="Connector: Elbow 27">
+            <a:extLst>
+              <a:ext uri="{FF2B5EF4-FFF2-40B4-BE49-F238E27FC236}">
+                <a16:creationId xmlns:a16="http://schemas.microsoft.com/office/drawing/2014/main" id="{F64BE8FB-BA8C-332A-28EE-411F302AB097}"/>
+              </a:ext>
+            </a:extLst>
+          </p:cNvPr>
+          <p:cNvCxnSpPr>
+            <a:cxnSpLocks/>
+            <a:endCxn id="29" idx="1"/>
+          </p:cNvCxnSpPr>
+          <p:nvPr/>
+        </p:nvCxnSpPr>
+        <p:spPr>
+          <a:xfrm rot="5400000" flipH="1" flipV="1">
+            <a:off x="7158978" y="3052143"/>
+            <a:ext cx="2197184" cy="633986"/>
+          </a:xfrm>
+          <a:prstGeom prst="bentConnector2">
+            <a:avLst/>
+          </a:prstGeom>
+          <a:ln w="12700">
+            <a:prstDash val="dash"/>
+            <a:tailEnd type="triangle"/>
+          </a:ln>
+        </p:spPr>
+        <p:style>
+          <a:lnRef idx="2">
+            <a:schemeClr val="accent1"/>
+          </a:lnRef>
+          <a:fillRef idx="0">
+            <a:schemeClr val="accent1"/>
+          </a:fillRef>
+          <a:effectRef idx="1">
+            <a:schemeClr val="accent1"/>
+          </a:effectRef>
+          <a:fontRef idx="minor">
+            <a:schemeClr val="tx1"/>
+          </a:fontRef>
+        </p:style>
+      </p:cxnSp>
+      <p:sp>
+        <p:nvSpPr>
+          <p:cNvPr id="29" name="Rectangle 28">
+            <a:extLst>
+              <a:ext uri="{FF2B5EF4-FFF2-40B4-BE49-F238E27FC236}">
+                <a16:creationId xmlns:a16="http://schemas.microsoft.com/office/drawing/2014/main" id="{10036A7D-832F-080D-144E-361C698646FB}"/>
+              </a:ext>
+            </a:extLst>
+          </p:cNvPr>
+          <p:cNvSpPr/>
+          <p:nvPr/>
+        </p:nvSpPr>
+        <p:spPr>
+          <a:xfrm>
+            <a:off x="8574563" y="2019487"/>
+            <a:ext cx="950437" cy="502114"/>
+          </a:xfrm>
+          <a:prstGeom prst="rect">
+            <a:avLst/>
+          </a:prstGeom>
+        </p:spPr>
+        <p:style>
+          <a:lnRef idx="1">
+            <a:schemeClr val="accent6"/>
+          </a:lnRef>
+          <a:fillRef idx="2">
+            <a:schemeClr val="accent6"/>
+          </a:fillRef>
+          <a:effectRef idx="1">
+            <a:schemeClr val="accent6"/>
+          </a:effectRef>
+          <a:fontRef idx="minor">
+            <a:schemeClr val="dk1"/>
+          </a:fontRef>
+        </p:style>
+        <p:txBody>
+          <a:bodyPr rtlCol="0" anchor="ctr"/>
+          <a:lstStyle/>
+          <a:p>
+            <a:pPr algn="ctr"/>
+            <a:r>
+              <a:rPr lang="en-US" sz="1000" dirty="0">
+                <a:solidFill>
+                  <a:schemeClr val="bg1"/>
+                </a:solidFill>
+              </a:rPr>
+              <a:t>admin console</a:t>
+            </a:r>
+          </a:p>
+        </p:txBody>
+      </p:sp>
+      <p:sp>
+        <p:nvSpPr>
+          <p:cNvPr id="30" name="Smiley Face 29">
+            <a:extLst>
+              <a:ext uri="{FF2B5EF4-FFF2-40B4-BE49-F238E27FC236}">
+                <a16:creationId xmlns:a16="http://schemas.microsoft.com/office/drawing/2014/main" id="{BF0C4B41-2827-64EB-FC06-16AF261852A4}"/>
+              </a:ext>
+            </a:extLst>
+          </p:cNvPr>
+          <p:cNvSpPr/>
+          <p:nvPr/>
+        </p:nvSpPr>
+        <p:spPr>
+          <a:xfrm>
+            <a:off x="8841420" y="953431"/>
+            <a:ext cx="426036" cy="405063"/>
+          </a:xfrm>
+          <a:prstGeom prst="smileyFace">
+            <a:avLst/>
+          </a:prstGeom>
+        </p:spPr>
+        <p:style>
+          <a:lnRef idx="2">
+            <a:schemeClr val="accent6"/>
+          </a:lnRef>
+          <a:fillRef idx="1">
+            <a:schemeClr val="lt1"/>
+          </a:fillRef>
+          <a:effectRef idx="0">
+            <a:schemeClr val="accent6"/>
+          </a:effectRef>
+          <a:fontRef idx="minor">
+            <a:schemeClr val="dk1"/>
+          </a:fontRef>
+        </p:style>
+        <p:txBody>
+          <a:bodyPr rtlCol="0" anchor="ctr"/>
+          <a:lstStyle/>
+          <a:p>
+            <a:pPr algn="ctr"/>
+            <a:endParaRPr lang="en-SI"/>
+          </a:p>
+        </p:txBody>
+      </p:sp>
+      <p:cxnSp>
+        <p:nvCxnSpPr>
+          <p:cNvPr id="31" name="Straight Arrow Connector 30">
+            <a:extLst>
+              <a:ext uri="{FF2B5EF4-FFF2-40B4-BE49-F238E27FC236}">
+                <a16:creationId xmlns:a16="http://schemas.microsoft.com/office/drawing/2014/main" id="{F162B0B2-52B1-1BFB-7CA0-AD91D7E5E908}"/>
+              </a:ext>
+            </a:extLst>
+          </p:cNvPr>
+          <p:cNvCxnSpPr>
+            <a:cxnSpLocks/>
+            <a:stCxn id="30" idx="4"/>
+            <a:endCxn id="29" idx="0"/>
+          </p:cNvCxnSpPr>
+          <p:nvPr/>
+        </p:nvCxnSpPr>
+        <p:spPr>
+          <a:xfrm flipH="1">
+            <a:off x="9049782" y="1358494"/>
+            <a:ext cx="4656" cy="660993"/>
+          </a:xfrm>
+          <a:prstGeom prst="straightConnector1">
+            <a:avLst/>
+          </a:prstGeom>
+          <a:ln>
+            <a:headEnd type="triangle"/>
+            <a:tailEnd type="triangle"/>
+          </a:ln>
+        </p:spPr>
+        <p:style>
+          <a:lnRef idx="2">
+            <a:schemeClr val="accent1"/>
+          </a:lnRef>
+          <a:fillRef idx="0">
+            <a:schemeClr val="accent1"/>
+          </a:fillRef>
+          <a:effectRef idx="1">
+            <a:schemeClr val="accent1"/>
+          </a:effectRef>
+          <a:fontRef idx="minor">
+            <a:schemeClr val="tx1"/>
+          </a:fontRef>
+        </p:style>
+      </p:cxnSp>
+      <p:sp>
+        <p:nvSpPr>
+          <p:cNvPr id="33" name="TextBox 32">
+            <a:extLst>
+              <a:ext uri="{FF2B5EF4-FFF2-40B4-BE49-F238E27FC236}">
+                <a16:creationId xmlns:a16="http://schemas.microsoft.com/office/drawing/2014/main" id="{C47D6C7F-1F48-E974-C638-86E03BF6B81C}"/>
+              </a:ext>
+            </a:extLst>
+          </p:cNvPr>
+          <p:cNvSpPr txBox="1"/>
+          <p:nvPr/>
+        </p:nvSpPr>
+        <p:spPr>
+          <a:xfrm>
+            <a:off x="6226964" y="1694149"/>
+            <a:ext cx="808235" cy="246221"/>
+          </a:xfrm>
+          <a:prstGeom prst="rect">
+            <a:avLst/>
+          </a:prstGeom>
+          <a:noFill/>
+        </p:spPr>
+        <p:txBody>
+          <a:bodyPr wrap="none" rtlCol="0">
+            <a:spAutoFit/>
+          </a:bodyPr>
+          <a:lstStyle/>
+          <a:p>
+            <a:pPr algn="ctr"/>
+            <a:r>
+              <a:rPr lang="en-GB" sz="1000" dirty="0"/>
+              <a:t>playground</a:t>
+            </a:r>
+            <a:endParaRPr lang="en-SI" sz="1000" dirty="0"/>
+          </a:p>
+        </p:txBody>
+      </p:sp>
+      <p:sp>
+        <p:nvSpPr>
+          <p:cNvPr id="37" name="Cylinder 36">
+            <a:extLst>
+              <a:ext uri="{FF2B5EF4-FFF2-40B4-BE49-F238E27FC236}">
+                <a16:creationId xmlns:a16="http://schemas.microsoft.com/office/drawing/2014/main" id="{C1959B90-0A84-30C3-16FC-FF46C1F4E277}"/>
+              </a:ext>
+            </a:extLst>
+          </p:cNvPr>
+          <p:cNvSpPr/>
+          <p:nvPr/>
+        </p:nvSpPr>
+        <p:spPr>
+          <a:xfrm>
+            <a:off x="5960462" y="2646562"/>
+            <a:ext cx="478185" cy="295179"/>
+          </a:xfrm>
+          <a:prstGeom prst="can">
+            <a:avLst/>
+          </a:prstGeom>
+        </p:spPr>
+        <p:style>
+          <a:lnRef idx="1">
+            <a:schemeClr val="accent2"/>
+          </a:lnRef>
+          <a:fillRef idx="2">
+            <a:schemeClr val="accent2"/>
+          </a:fillRef>
+          <a:effectRef idx="1">
+            <a:schemeClr val="accent2"/>
+          </a:effectRef>
+          <a:fontRef idx="minor">
+            <a:schemeClr val="dk1"/>
+          </a:fontRef>
+        </p:style>
+        <p:txBody>
+          <a:bodyPr rtlCol="0" anchor="ctr"/>
+          <a:lstStyle/>
+          <a:p>
+            <a:pPr algn="ctr"/>
+            <a:r>
+              <a:rPr lang="en-GB" sz="1000" dirty="0">
+                <a:solidFill>
+                  <a:schemeClr val="bg1"/>
+                </a:solidFill>
+              </a:rPr>
+              <a:t>mem</a:t>
+            </a:r>
+            <a:endParaRPr lang="en-SI" sz="1000" dirty="0">
+              <a:solidFill>
+                <a:schemeClr val="bg1"/>
+              </a:solidFill>
+            </a:endParaRPr>
+          </a:p>
+        </p:txBody>
+      </p:sp>
+    </p:spTree>
+    <p:extLst>
+      <p:ext uri="{BB962C8B-B14F-4D97-AF65-F5344CB8AC3E}">
+        <p14:creationId xmlns:p14="http://schemas.microsoft.com/office/powerpoint/2010/main" val="2607464398"/>
+      </p:ext>
+    </p:extLst>
+  </p:cSld>
+  <p:clrMapOvr>
+    <a:masterClrMapping/>
+  </p:clrMapOvr>
+</p:sld>
+</file>
+
+<file path=ppt/slides/slide6.xml><?xml version="1.0" encoding="utf-8"?>
+<p:sld xmlns:a="http://schemas.openxmlformats.org/drawingml/2006/main" xmlns:r="http://schemas.openxmlformats.org/officeDocument/2006/relationships" xmlns:p="http://schemas.openxmlformats.org/presentationml/2006/main">
+  <p:cSld>
+    <p:spTree>
+      <p:nvGrpSpPr>
+        <p:cNvPr id="1" name="">
+          <a:extLst>
+            <a:ext uri="{FF2B5EF4-FFF2-40B4-BE49-F238E27FC236}">
+              <a16:creationId xmlns:a16="http://schemas.microsoft.com/office/drawing/2014/main" id="{13E3E3D4-1172-FD69-B571-ADDD1AD64E9E}"/>
+            </a:ext>
+          </a:extLst>
+        </p:cNvPr>
+        <p:cNvGrpSpPr/>
+        <p:nvPr/>
+      </p:nvGrpSpPr>
+      <p:grpSpPr>
+        <a:xfrm>
+          <a:off x="0" y="0"/>
+          <a:ext cx="0" cy="0"/>
+          <a:chOff x="0" y="0"/>
+          <a:chExt cx="0" cy="0"/>
+        </a:xfrm>
+      </p:grpSpPr>
+      <p:sp>
+        <p:nvSpPr>
+          <p:cNvPr id="5" name="Rectangle 4">
+            <a:extLst>
+              <a:ext uri="{FF2B5EF4-FFF2-40B4-BE49-F238E27FC236}">
+                <a16:creationId xmlns:a16="http://schemas.microsoft.com/office/drawing/2014/main" id="{94C44742-AB75-8BC3-A61C-C1931343BC64}"/>
+              </a:ext>
+            </a:extLst>
+          </p:cNvPr>
+          <p:cNvSpPr/>
+          <p:nvPr/>
+        </p:nvSpPr>
+        <p:spPr>
+          <a:xfrm>
+            <a:off x="5758401" y="1694150"/>
+            <a:ext cx="1742385" cy="2451531"/>
+          </a:xfrm>
+          <a:prstGeom prst="rect">
+            <a:avLst/>
+          </a:prstGeom>
+          <a:solidFill>
+            <a:srgbClr val="89D8F7">
+              <a:alpha val="50000"/>
+            </a:srgbClr>
+          </a:solidFill>
+          <a:ln>
+            <a:noFill/>
+          </a:ln>
+        </p:spPr>
+        <p:style>
+          <a:lnRef idx="0">
+            <a:scrgbClr r="0" g="0" b="0"/>
+          </a:lnRef>
+          <a:fillRef idx="0">
+            <a:scrgbClr r="0" g="0" b="0"/>
+          </a:fillRef>
+          <a:effectRef idx="0">
+            <a:scrgbClr r="0" g="0" b="0"/>
+          </a:effectRef>
+          <a:fontRef idx="minor">
+            <a:schemeClr val="lt1"/>
+          </a:fontRef>
+        </p:style>
+        <p:txBody>
+          <a:bodyPr rtlCol="0" anchor="ctr"/>
+          <a:lstStyle/>
+          <a:p>
+            <a:pPr algn="ctr"/>
+            <a:endParaRPr lang="en-SI"/>
+          </a:p>
+        </p:txBody>
+      </p:sp>
+      <p:sp>
+        <p:nvSpPr>
+          <p:cNvPr id="6" name="Rectangle 5">
+            <a:extLst>
+              <a:ext uri="{FF2B5EF4-FFF2-40B4-BE49-F238E27FC236}">
+                <a16:creationId xmlns:a16="http://schemas.microsoft.com/office/drawing/2014/main" id="{0F9D2B39-ABFD-F036-963A-466663DA4006}"/>
+              </a:ext>
+            </a:extLst>
+          </p:cNvPr>
+          <p:cNvSpPr/>
+          <p:nvPr/>
+        </p:nvSpPr>
+        <p:spPr>
+          <a:xfrm>
+            <a:off x="6194076" y="2305336"/>
+            <a:ext cx="845604" cy="502114"/>
+          </a:xfrm>
+          <a:prstGeom prst="rect">
+            <a:avLst/>
+          </a:prstGeom>
+        </p:spPr>
+        <p:style>
+          <a:lnRef idx="1">
+            <a:schemeClr val="accent4"/>
+          </a:lnRef>
+          <a:fillRef idx="3">
+            <a:schemeClr val="accent4"/>
+          </a:fillRef>
+          <a:effectRef idx="2">
+            <a:schemeClr val="accent4"/>
+          </a:effectRef>
+          <a:fontRef idx="minor">
+            <a:schemeClr val="lt1"/>
+          </a:fontRef>
+        </p:style>
+        <p:txBody>
+          <a:bodyPr rtlCol="0" anchor="ctr"/>
+          <a:lstStyle/>
+          <a:p>
+            <a:pPr algn="ctr"/>
+            <a:r>
+              <a:rPr lang="en-US" sz="1000" dirty="0"/>
+              <a:t>OC</a:t>
+            </a:r>
+          </a:p>
+        </p:txBody>
+      </p:sp>
+      <p:sp>
+        <p:nvSpPr>
+          <p:cNvPr id="7" name="Rectangle 6">
+            <a:extLst>
+              <a:ext uri="{FF2B5EF4-FFF2-40B4-BE49-F238E27FC236}">
+                <a16:creationId xmlns:a16="http://schemas.microsoft.com/office/drawing/2014/main" id="{92DD39A7-CBEE-18C9-75EE-D5D44C5DCF1D}"/>
+              </a:ext>
+            </a:extLst>
+          </p:cNvPr>
+          <p:cNvSpPr/>
+          <p:nvPr/>
+        </p:nvSpPr>
+        <p:spPr>
+          <a:xfrm>
+            <a:off x="6194076" y="3132609"/>
+            <a:ext cx="845604" cy="502114"/>
+          </a:xfrm>
+          <a:prstGeom prst="rect">
+            <a:avLst/>
+          </a:prstGeom>
+        </p:spPr>
+        <p:style>
+          <a:lnRef idx="1">
+            <a:schemeClr val="accent4"/>
+          </a:lnRef>
+          <a:fillRef idx="3">
+            <a:schemeClr val="accent4"/>
+          </a:fillRef>
+          <a:effectRef idx="2">
+            <a:schemeClr val="accent4"/>
+          </a:effectRef>
+          <a:fontRef idx="minor">
+            <a:schemeClr val="lt1"/>
+          </a:fontRef>
+        </p:style>
+        <p:txBody>
+          <a:bodyPr rtlCol="0" anchor="ctr"/>
+          <a:lstStyle/>
+          <a:p>
+            <a:pPr algn="ctr"/>
+            <a:r>
+              <a:rPr lang="en-US" sz="1000" dirty="0"/>
+              <a:t>FC</a:t>
+            </a:r>
+          </a:p>
+        </p:txBody>
+      </p:sp>
+      <p:sp>
+        <p:nvSpPr>
+          <p:cNvPr id="16" name="Smiley Face 15">
+            <a:extLst>
+              <a:ext uri="{FF2B5EF4-FFF2-40B4-BE49-F238E27FC236}">
+                <a16:creationId xmlns:a16="http://schemas.microsoft.com/office/drawing/2014/main" id="{E893D247-5D32-2284-BED6-962F3AF44BF6}"/>
+              </a:ext>
+            </a:extLst>
+          </p:cNvPr>
+          <p:cNvSpPr/>
+          <p:nvPr/>
+        </p:nvSpPr>
+        <p:spPr>
+          <a:xfrm>
+            <a:off x="6416576" y="921017"/>
+            <a:ext cx="426036" cy="405063"/>
+          </a:xfrm>
+          <a:prstGeom prst="smileyFace">
+            <a:avLst/>
+          </a:prstGeom>
+        </p:spPr>
+        <p:style>
+          <a:lnRef idx="2">
+            <a:schemeClr val="accent4"/>
+          </a:lnRef>
+          <a:fillRef idx="1">
+            <a:schemeClr val="lt1"/>
+          </a:fillRef>
+          <a:effectRef idx="0">
+            <a:schemeClr val="accent4"/>
+          </a:effectRef>
+          <a:fontRef idx="minor">
+            <a:schemeClr val="dk1"/>
+          </a:fontRef>
+        </p:style>
+        <p:txBody>
+          <a:bodyPr rtlCol="0" anchor="ctr"/>
+          <a:lstStyle/>
+          <a:p>
+            <a:pPr algn="ctr"/>
+            <a:endParaRPr lang="en-SI"/>
+          </a:p>
+        </p:txBody>
+      </p:sp>
+      <p:cxnSp>
+        <p:nvCxnSpPr>
+          <p:cNvPr id="17" name="Straight Arrow Connector 16">
+            <a:extLst>
+              <a:ext uri="{FF2B5EF4-FFF2-40B4-BE49-F238E27FC236}">
+                <a16:creationId xmlns:a16="http://schemas.microsoft.com/office/drawing/2014/main" id="{01EEF052-055F-4C77-171D-0977958760A2}"/>
+              </a:ext>
+            </a:extLst>
+          </p:cNvPr>
+          <p:cNvCxnSpPr>
+            <a:cxnSpLocks/>
+            <a:stCxn id="16" idx="4"/>
+            <a:endCxn id="5" idx="0"/>
+          </p:cNvCxnSpPr>
+          <p:nvPr/>
+        </p:nvCxnSpPr>
+        <p:spPr>
+          <a:xfrm>
+            <a:off x="6629594" y="1326080"/>
+            <a:ext cx="0" cy="368070"/>
+          </a:xfrm>
+          <a:prstGeom prst="straightConnector1">
+            <a:avLst/>
+          </a:prstGeom>
+          <a:ln>
+            <a:headEnd type="triangle"/>
+            <a:tailEnd type="triangle"/>
+          </a:ln>
+        </p:spPr>
+        <p:style>
+          <a:lnRef idx="2">
+            <a:schemeClr val="accent1"/>
+          </a:lnRef>
+          <a:fillRef idx="0">
+            <a:schemeClr val="accent1"/>
+          </a:fillRef>
+          <a:effectRef idx="1">
+            <a:schemeClr val="accent1"/>
+          </a:effectRef>
+          <a:fontRef idx="minor">
+            <a:schemeClr val="tx1"/>
+          </a:fontRef>
+        </p:style>
+      </p:cxnSp>
+      <p:sp>
+        <p:nvSpPr>
+          <p:cNvPr id="33" name="TextBox 32">
+            <a:extLst>
+              <a:ext uri="{FF2B5EF4-FFF2-40B4-BE49-F238E27FC236}">
+                <a16:creationId xmlns:a16="http://schemas.microsoft.com/office/drawing/2014/main" id="{39511ACD-8604-07C4-D067-5C80E7B2B50E}"/>
+              </a:ext>
+            </a:extLst>
+          </p:cNvPr>
+          <p:cNvSpPr txBox="1"/>
+          <p:nvPr/>
+        </p:nvSpPr>
+        <p:spPr>
+          <a:xfrm>
+            <a:off x="6226964" y="1694149"/>
+            <a:ext cx="808235" cy="246221"/>
+          </a:xfrm>
+          <a:prstGeom prst="rect">
+            <a:avLst/>
+          </a:prstGeom>
+          <a:noFill/>
+        </p:spPr>
+        <p:txBody>
+          <a:bodyPr wrap="none" rtlCol="0">
+            <a:spAutoFit/>
+          </a:bodyPr>
+          <a:lstStyle/>
+          <a:p>
+            <a:pPr algn="ctr"/>
+            <a:r>
+              <a:rPr lang="en-GB" sz="1000" dirty="0"/>
+              <a:t>playground</a:t>
+            </a:r>
+            <a:endParaRPr lang="en-SI" sz="1000" dirty="0"/>
+          </a:p>
+        </p:txBody>
+      </p:sp>
+      <p:sp>
+        <p:nvSpPr>
+          <p:cNvPr id="37" name="Cylinder 36">
+            <a:extLst>
+              <a:ext uri="{FF2B5EF4-FFF2-40B4-BE49-F238E27FC236}">
+                <a16:creationId xmlns:a16="http://schemas.microsoft.com/office/drawing/2014/main" id="{6B26E5B1-259F-115D-3F4B-F0F4415E5A20}"/>
+              </a:ext>
+            </a:extLst>
+          </p:cNvPr>
+          <p:cNvSpPr/>
+          <p:nvPr/>
+        </p:nvSpPr>
+        <p:spPr>
+          <a:xfrm>
+            <a:off x="5960462" y="2646562"/>
+            <a:ext cx="478185" cy="295179"/>
+          </a:xfrm>
+          <a:prstGeom prst="can">
+            <a:avLst/>
+          </a:prstGeom>
+        </p:spPr>
+        <p:style>
+          <a:lnRef idx="1">
+            <a:schemeClr val="accent2"/>
+          </a:lnRef>
+          <a:fillRef idx="2">
+            <a:schemeClr val="accent2"/>
+          </a:fillRef>
+          <a:effectRef idx="1">
+            <a:schemeClr val="accent2"/>
+          </a:effectRef>
+          <a:fontRef idx="minor">
+            <a:schemeClr val="dk1"/>
+          </a:fontRef>
+        </p:style>
+        <p:txBody>
+          <a:bodyPr rtlCol="0" anchor="ctr"/>
+          <a:lstStyle/>
+          <a:p>
+            <a:pPr algn="ctr"/>
+            <a:r>
+              <a:rPr lang="en-GB" sz="1000" dirty="0">
+                <a:solidFill>
+                  <a:schemeClr val="bg1"/>
+                </a:solidFill>
+              </a:rPr>
+              <a:t>mem</a:t>
+            </a:r>
+            <a:endParaRPr lang="en-SI" sz="1000" dirty="0">
+              <a:solidFill>
+                <a:schemeClr val="bg1"/>
+              </a:solidFill>
+            </a:endParaRPr>
+          </a:p>
+        </p:txBody>
+      </p:sp>
+      <p:sp>
+        <p:nvSpPr>
+          <p:cNvPr id="3" name="Cylinder 2">
+            <a:extLst>
+              <a:ext uri="{FF2B5EF4-FFF2-40B4-BE49-F238E27FC236}">
+                <a16:creationId xmlns:a16="http://schemas.microsoft.com/office/drawing/2014/main" id="{CBEE32C7-771F-7D4E-F99B-19BD58E75C57}"/>
+              </a:ext>
+            </a:extLst>
+          </p:cNvPr>
+          <p:cNvSpPr/>
+          <p:nvPr/>
+        </p:nvSpPr>
+        <p:spPr>
+          <a:xfrm>
+            <a:off x="5954982" y="3487133"/>
+            <a:ext cx="478185" cy="295179"/>
+          </a:xfrm>
+          <a:prstGeom prst="can">
+            <a:avLst/>
+          </a:prstGeom>
+        </p:spPr>
+        <p:style>
+          <a:lnRef idx="1">
+            <a:schemeClr val="accent2"/>
+          </a:lnRef>
+          <a:fillRef idx="2">
+            <a:schemeClr val="accent2"/>
+          </a:fillRef>
+          <a:effectRef idx="1">
+            <a:schemeClr val="accent2"/>
+          </a:effectRef>
+          <a:fontRef idx="minor">
+            <a:schemeClr val="dk1"/>
+          </a:fontRef>
+        </p:style>
+        <p:txBody>
+          <a:bodyPr rtlCol="0" anchor="ctr"/>
+          <a:lstStyle/>
+          <a:p>
+            <a:pPr algn="ctr"/>
+            <a:r>
+              <a:rPr lang="en-GB" sz="1000" dirty="0">
+                <a:solidFill>
+                  <a:schemeClr val="bg1"/>
+                </a:solidFill>
+              </a:rPr>
+              <a:t>mem</a:t>
+            </a:r>
+            <a:endParaRPr lang="en-SI" sz="1000" dirty="0">
+              <a:solidFill>
+                <a:schemeClr val="bg1"/>
+              </a:solidFill>
+            </a:endParaRPr>
+          </a:p>
+        </p:txBody>
+      </p:sp>
+      <p:sp>
+        <p:nvSpPr>
+          <p:cNvPr id="8" name="Oval 7">
+            <a:extLst>
+              <a:ext uri="{FF2B5EF4-FFF2-40B4-BE49-F238E27FC236}">
+                <a16:creationId xmlns:a16="http://schemas.microsoft.com/office/drawing/2014/main" id="{0D81E58D-511D-2237-84C0-DB7920EC7D82}"/>
+              </a:ext>
+            </a:extLst>
+          </p:cNvPr>
+          <p:cNvSpPr/>
+          <p:nvPr/>
+        </p:nvSpPr>
+        <p:spPr>
+          <a:xfrm>
+            <a:off x="6522710" y="4047168"/>
+            <a:ext cx="197025" cy="197025"/>
+          </a:xfrm>
+          <a:prstGeom prst="ellipse">
+            <a:avLst/>
+          </a:prstGeom>
+          <a:ln/>
+        </p:spPr>
+        <p:style>
+          <a:lnRef idx="1">
+            <a:schemeClr val="accent4"/>
+          </a:lnRef>
+          <a:fillRef idx="3">
+            <a:schemeClr val="accent4"/>
+          </a:fillRef>
+          <a:effectRef idx="2">
+            <a:schemeClr val="accent4"/>
+          </a:effectRef>
+          <a:fontRef idx="minor">
+            <a:schemeClr val="lt1"/>
+          </a:fontRef>
+        </p:style>
+        <p:txBody>
+          <a:bodyPr rtlCol="0" anchor="ctr"/>
+          <a:lstStyle/>
+          <a:p>
+            <a:pPr algn="ctr"/>
+            <a:endParaRPr lang="en-SI"/>
+          </a:p>
+        </p:txBody>
+      </p:sp>
+      <p:sp>
+        <p:nvSpPr>
+          <p:cNvPr id="9" name="Cylinder 8">
+            <a:extLst>
+              <a:ext uri="{FF2B5EF4-FFF2-40B4-BE49-F238E27FC236}">
+                <a16:creationId xmlns:a16="http://schemas.microsoft.com/office/drawing/2014/main" id="{3B57E753-18A8-6D79-EB3A-39555B5DB234}"/>
+              </a:ext>
+            </a:extLst>
+          </p:cNvPr>
+          <p:cNvSpPr/>
+          <p:nvPr/>
+        </p:nvSpPr>
+        <p:spPr>
+          <a:xfrm>
+            <a:off x="8574562" y="3173926"/>
+            <a:ext cx="950438" cy="417094"/>
+          </a:xfrm>
+          <a:prstGeom prst="can">
+            <a:avLst/>
+          </a:prstGeom>
+        </p:spPr>
+        <p:style>
+          <a:lnRef idx="1">
+            <a:schemeClr val="accent6"/>
+          </a:lnRef>
+          <a:fillRef idx="2">
+            <a:schemeClr val="accent6"/>
+          </a:fillRef>
+          <a:effectRef idx="1">
+            <a:schemeClr val="accent6"/>
+          </a:effectRef>
+          <a:fontRef idx="minor">
+            <a:schemeClr val="dk1"/>
+          </a:fontRef>
+        </p:style>
+        <p:txBody>
+          <a:bodyPr rtlCol="0" anchor="ctr"/>
+          <a:lstStyle/>
+          <a:p>
+            <a:pPr algn="ctr"/>
+            <a:r>
+              <a:rPr lang="en-GB" sz="1000" dirty="0" err="1">
+                <a:solidFill>
+                  <a:schemeClr val="bg1"/>
+                </a:solidFill>
+              </a:rPr>
+              <a:t>prometheus</a:t>
+            </a:r>
+            <a:endParaRPr lang="en-SI" sz="1000" dirty="0">
+              <a:solidFill>
+                <a:schemeClr val="bg1"/>
+              </a:solidFill>
+            </a:endParaRPr>
+          </a:p>
+        </p:txBody>
+      </p:sp>
+      <p:cxnSp>
+        <p:nvCxnSpPr>
+          <p:cNvPr id="10" name="Connector: Elbow 9">
+            <a:extLst>
+              <a:ext uri="{FF2B5EF4-FFF2-40B4-BE49-F238E27FC236}">
+                <a16:creationId xmlns:a16="http://schemas.microsoft.com/office/drawing/2014/main" id="{57C759CB-28AB-B586-6CE8-8AEFE49B8EAF}"/>
+              </a:ext>
+            </a:extLst>
+          </p:cNvPr>
+          <p:cNvCxnSpPr>
+            <a:stCxn id="8" idx="4"/>
+            <a:endCxn id="9" idx="3"/>
+          </p:cNvCxnSpPr>
+          <p:nvPr/>
+        </p:nvCxnSpPr>
+        <p:spPr>
+          <a:xfrm rot="5400000" flipH="1" flipV="1">
+            <a:off x="7508915" y="2703328"/>
+            <a:ext cx="653173" cy="2428558"/>
+          </a:xfrm>
+          <a:prstGeom prst="bentConnector3">
+            <a:avLst>
+              <a:gd name="adj1" fmla="val -34998"/>
+            </a:avLst>
+          </a:prstGeom>
+          <a:ln w="12700">
+            <a:prstDash val="dash"/>
+            <a:headEnd type="triangle" w="med" len="med"/>
+            <a:tailEnd type="triangle" w="med" len="med"/>
+          </a:ln>
+        </p:spPr>
+        <p:style>
+          <a:lnRef idx="2">
+            <a:schemeClr val="accent1"/>
+          </a:lnRef>
+          <a:fillRef idx="0">
+            <a:schemeClr val="accent1"/>
+          </a:fillRef>
+          <a:effectRef idx="1">
+            <a:schemeClr val="accent1"/>
+          </a:effectRef>
+          <a:fontRef idx="minor">
+            <a:schemeClr val="tx1"/>
+          </a:fontRef>
+        </p:style>
+      </p:cxnSp>
+      <p:cxnSp>
+        <p:nvCxnSpPr>
+          <p:cNvPr id="12" name="Straight Arrow Connector 11">
+            <a:extLst>
+              <a:ext uri="{FF2B5EF4-FFF2-40B4-BE49-F238E27FC236}">
+                <a16:creationId xmlns:a16="http://schemas.microsoft.com/office/drawing/2014/main" id="{63415B4A-94E5-AC60-3563-E6E2B1357B1E}"/>
+              </a:ext>
+            </a:extLst>
+          </p:cNvPr>
+          <p:cNvCxnSpPr>
+            <a:cxnSpLocks/>
+            <a:stCxn id="9" idx="1"/>
+            <a:endCxn id="15" idx="2"/>
+          </p:cNvCxnSpPr>
+          <p:nvPr/>
+        </p:nvCxnSpPr>
+        <p:spPr>
+          <a:xfrm flipV="1">
+            <a:off x="9049781" y="2521601"/>
+            <a:ext cx="1" cy="652325"/>
+          </a:xfrm>
+          <a:prstGeom prst="straightConnector1">
+            <a:avLst/>
+          </a:prstGeom>
+          <a:ln w="12700">
+            <a:prstDash val="dash"/>
+            <a:tailEnd type="triangle"/>
+          </a:ln>
+        </p:spPr>
+        <p:style>
+          <a:lnRef idx="2">
+            <a:schemeClr val="accent1"/>
+          </a:lnRef>
+          <a:fillRef idx="0">
+            <a:schemeClr val="accent1"/>
+          </a:fillRef>
+          <a:effectRef idx="1">
+            <a:schemeClr val="accent1"/>
+          </a:effectRef>
+          <a:fontRef idx="minor">
+            <a:schemeClr val="tx1"/>
+          </a:fontRef>
+        </p:style>
+      </p:cxnSp>
+      <p:cxnSp>
+        <p:nvCxnSpPr>
+          <p:cNvPr id="14" name="Connector: Elbow 13">
+            <a:extLst>
+              <a:ext uri="{FF2B5EF4-FFF2-40B4-BE49-F238E27FC236}">
+                <a16:creationId xmlns:a16="http://schemas.microsoft.com/office/drawing/2014/main" id="{81A220F7-971D-40F6-9676-D37BE9534734}"/>
+              </a:ext>
+            </a:extLst>
+          </p:cNvPr>
+          <p:cNvCxnSpPr>
+            <a:cxnSpLocks/>
+            <a:endCxn id="15" idx="1"/>
+          </p:cNvCxnSpPr>
+          <p:nvPr/>
+        </p:nvCxnSpPr>
+        <p:spPr>
+          <a:xfrm rot="5400000" flipH="1" flipV="1">
+            <a:off x="7158978" y="3052143"/>
+            <a:ext cx="2197184" cy="633986"/>
+          </a:xfrm>
+          <a:prstGeom prst="bentConnector2">
+            <a:avLst/>
+          </a:prstGeom>
+          <a:ln w="12700">
+            <a:prstDash val="dash"/>
+            <a:tailEnd type="triangle"/>
+          </a:ln>
+        </p:spPr>
+        <p:style>
+          <a:lnRef idx="2">
+            <a:schemeClr val="accent1"/>
+          </a:lnRef>
+          <a:fillRef idx="0">
+            <a:schemeClr val="accent1"/>
+          </a:fillRef>
+          <a:effectRef idx="1">
+            <a:schemeClr val="accent1"/>
+          </a:effectRef>
+          <a:fontRef idx="minor">
+            <a:schemeClr val="tx1"/>
+          </a:fontRef>
+        </p:style>
+      </p:cxnSp>
+      <p:sp>
+        <p:nvSpPr>
+          <p:cNvPr id="15" name="Rectangle 14">
+            <a:extLst>
+              <a:ext uri="{FF2B5EF4-FFF2-40B4-BE49-F238E27FC236}">
+                <a16:creationId xmlns:a16="http://schemas.microsoft.com/office/drawing/2014/main" id="{C268F6E5-A1E8-F12E-D9B0-96FA96E6F1F7}"/>
+              </a:ext>
+            </a:extLst>
+          </p:cNvPr>
+          <p:cNvSpPr/>
+          <p:nvPr/>
+        </p:nvSpPr>
+        <p:spPr>
+          <a:xfrm>
+            <a:off x="8574563" y="2019487"/>
+            <a:ext cx="950437" cy="502114"/>
+          </a:xfrm>
+          <a:prstGeom prst="rect">
+            <a:avLst/>
+          </a:prstGeom>
+        </p:spPr>
+        <p:style>
+          <a:lnRef idx="1">
+            <a:schemeClr val="accent6"/>
+          </a:lnRef>
+          <a:fillRef idx="2">
+            <a:schemeClr val="accent6"/>
+          </a:fillRef>
+          <a:effectRef idx="1">
+            <a:schemeClr val="accent6"/>
+          </a:effectRef>
+          <a:fontRef idx="minor">
+            <a:schemeClr val="dk1"/>
+          </a:fontRef>
+        </p:style>
+        <p:txBody>
+          <a:bodyPr rtlCol="0" anchor="ctr"/>
+          <a:lstStyle/>
+          <a:p>
+            <a:pPr algn="ctr"/>
+            <a:r>
+              <a:rPr lang="en-US" sz="1000" dirty="0">
+                <a:solidFill>
+                  <a:schemeClr val="bg1"/>
+                </a:solidFill>
+              </a:rPr>
+              <a:t>admin console</a:t>
+            </a:r>
+          </a:p>
+        </p:txBody>
+      </p:sp>
+      <p:sp>
+        <p:nvSpPr>
+          <p:cNvPr id="18" name="Smiley Face 17">
+            <a:extLst>
+              <a:ext uri="{FF2B5EF4-FFF2-40B4-BE49-F238E27FC236}">
+                <a16:creationId xmlns:a16="http://schemas.microsoft.com/office/drawing/2014/main" id="{2C5CD993-EBE3-870B-1D40-6E8773B69417}"/>
+              </a:ext>
+            </a:extLst>
+          </p:cNvPr>
+          <p:cNvSpPr/>
+          <p:nvPr/>
+        </p:nvSpPr>
+        <p:spPr>
+          <a:xfrm>
+            <a:off x="8841420" y="953431"/>
+            <a:ext cx="426036" cy="405063"/>
+          </a:xfrm>
+          <a:prstGeom prst="smileyFace">
+            <a:avLst/>
+          </a:prstGeom>
+        </p:spPr>
+        <p:style>
+          <a:lnRef idx="2">
+            <a:schemeClr val="accent6"/>
+          </a:lnRef>
+          <a:fillRef idx="1">
+            <a:schemeClr val="lt1"/>
+          </a:fillRef>
+          <a:effectRef idx="0">
+            <a:schemeClr val="accent6"/>
+          </a:effectRef>
+          <a:fontRef idx="minor">
+            <a:schemeClr val="dk1"/>
+          </a:fontRef>
+        </p:style>
+        <p:txBody>
+          <a:bodyPr rtlCol="0" anchor="ctr"/>
+          <a:lstStyle/>
+          <a:p>
+            <a:pPr algn="ctr"/>
+            <a:endParaRPr lang="en-SI"/>
+          </a:p>
+        </p:txBody>
+      </p:sp>
+      <p:cxnSp>
+        <p:nvCxnSpPr>
+          <p:cNvPr id="19" name="Straight Arrow Connector 18">
+            <a:extLst>
+              <a:ext uri="{FF2B5EF4-FFF2-40B4-BE49-F238E27FC236}">
+                <a16:creationId xmlns:a16="http://schemas.microsoft.com/office/drawing/2014/main" id="{5247213B-F570-A59A-DD70-0AFF5B4169A2}"/>
+              </a:ext>
+            </a:extLst>
+          </p:cNvPr>
+          <p:cNvCxnSpPr>
+            <a:cxnSpLocks/>
+            <a:stCxn id="18" idx="4"/>
+            <a:endCxn id="15" idx="0"/>
+          </p:cNvCxnSpPr>
+          <p:nvPr/>
+        </p:nvCxnSpPr>
+        <p:spPr>
+          <a:xfrm flipH="1">
+            <a:off x="9049782" y="1358494"/>
+            <a:ext cx="4656" cy="660993"/>
+          </a:xfrm>
+          <a:prstGeom prst="straightConnector1">
+            <a:avLst/>
+          </a:prstGeom>
+          <a:ln>
+            <a:headEnd type="triangle"/>
+            <a:tailEnd type="triangle"/>
+          </a:ln>
+        </p:spPr>
+        <p:style>
+          <a:lnRef idx="2">
+            <a:schemeClr val="accent1"/>
+          </a:lnRef>
+          <a:fillRef idx="0">
+            <a:schemeClr val="accent1"/>
+          </a:fillRef>
+          <a:effectRef idx="1">
+            <a:schemeClr val="accent1"/>
+          </a:effectRef>
+          <a:fontRef idx="minor">
+            <a:schemeClr val="tx1"/>
+          </a:fontRef>
+        </p:style>
+      </p:cxnSp>
+    </p:spTree>
+    <p:extLst>
+      <p:ext uri="{BB962C8B-B14F-4D97-AF65-F5344CB8AC3E}">
+        <p14:creationId xmlns:p14="http://schemas.microsoft.com/office/powerpoint/2010/main" val="1620908857"/>
       </p:ext>
     </p:extLst>
   </p:cSld>
